--- a/TPs/FR_EN/images.pptx
+++ b/TPs/FR_EN/images.pptx
@@ -12,12 +12,13 @@
     <p:sldId id="256" r:id="rId6"/>
     <p:sldId id="266" r:id="rId7"/>
     <p:sldId id="267" r:id="rId8"/>
-    <p:sldId id="258" r:id="rId9"/>
-    <p:sldId id="259" r:id="rId10"/>
-    <p:sldId id="260" r:id="rId11"/>
-    <p:sldId id="262" r:id="rId12"/>
-    <p:sldId id="261" r:id="rId13"/>
-    <p:sldId id="263" r:id="rId14"/>
+    <p:sldId id="269" r:id="rId9"/>
+    <p:sldId id="258" r:id="rId10"/>
+    <p:sldId id="259" r:id="rId11"/>
+    <p:sldId id="260" r:id="rId12"/>
+    <p:sldId id="262" r:id="rId13"/>
+    <p:sldId id="261" r:id="rId14"/>
+    <p:sldId id="263" r:id="rId15"/>
   </p:sldIdLst>
   <p:sldSz cx="12192000" cy="6858000"/>
   <p:notesSz cx="6858000" cy="9144000"/>
@@ -127,7 +128,7 @@
 <file path=ppt/revisionInfo.xml><?xml version="1.0" encoding="utf-8"?>
 <p1510:revInfo xmlns:a="http://schemas.openxmlformats.org/drawingml/2006/main" xmlns:r="http://schemas.openxmlformats.org/officeDocument/2006/relationships" xmlns:p1510="http://schemas.microsoft.com/office/powerpoint/2015/10/main">
   <p1510:revLst>
-    <p1510:client id="{B6D36FE2-2785-41B6-AC54-166658F2A731}" v="6" dt="2026-06-22T12:17:59.545"/>
+    <p1510:client id="{086C646B-8BCE-4B48-ABD1-9376E05DB9E4}" v="5" dt="2026-09-21T07:36:24.881"/>
   </p1510:revLst>
 </p1510:revInfo>
 </file>
@@ -137,86 +138,142 @@
   <pc:docChgLst>
     <pc:chgData name="Alexis MARTIN" userId="ec32c3d9-5957-42d0-8757-996fd533d25b" providerId="ADAL" clId="{B76BE869-635B-4DC9-A437-AFDC8BC5A345}"/>
     <pc:docChg chg="custSel addSld modSld">
-      <pc:chgData name="Alexis MARTIN" userId="ec32c3d9-5957-42d0-8757-996fd533d25b" providerId="ADAL" clId="{B76BE869-635B-4DC9-A437-AFDC8BC5A345}" dt="2026-06-22T12:22:47.889" v="131" actId="1037"/>
+      <pc:chgData name="Alexis MARTIN" userId="ec32c3d9-5957-42d0-8757-996fd533d25b" providerId="ADAL" clId="{B76BE869-635B-4DC9-A437-AFDC8BC5A345}" dt="2026-09-21T07:36:52.984" v="214" actId="1076"/>
       <pc:docMkLst>
         <pc:docMk/>
       </pc:docMkLst>
-      <pc:sldChg chg="addSp delSp modSp new mod">
-        <pc:chgData name="Alexis MARTIN" userId="ec32c3d9-5957-42d0-8757-996fd533d25b" providerId="ADAL" clId="{B76BE869-635B-4DC9-A437-AFDC8BC5A345}" dt="2026-06-22T12:22:47.889" v="131" actId="1037"/>
+      <pc:sldChg chg="addSp delSp modSp add mod">
+        <pc:chgData name="Alexis MARTIN" userId="ec32c3d9-5957-42d0-8757-996fd533d25b" providerId="ADAL" clId="{B76BE869-635B-4DC9-A437-AFDC8BC5A345}" dt="2026-09-21T07:36:52.984" v="214" actId="1076"/>
         <pc:sldMkLst>
           <pc:docMk/>
-          <pc:sldMk cId="137391853" sldId="268"/>
+          <pc:sldMk cId="2211141522" sldId="269"/>
         </pc:sldMkLst>
-        <pc:spChg chg="del">
-          <ac:chgData name="Alexis MARTIN" userId="ec32c3d9-5957-42d0-8757-996fd533d25b" providerId="ADAL" clId="{B76BE869-635B-4DC9-A437-AFDC8BC5A345}" dt="2026-06-22T12:12:27.461" v="1" actId="478"/>
+        <pc:spChg chg="add mod">
+          <ac:chgData name="Alexis MARTIN" userId="ec32c3d9-5957-42d0-8757-996fd533d25b" providerId="ADAL" clId="{B76BE869-635B-4DC9-A437-AFDC8BC5A345}" dt="2026-09-21T07:34:34.161" v="155" actId="14100"/>
           <ac:spMkLst>
             <pc:docMk/>
-            <pc:sldMk cId="137391853" sldId="268"/>
-            <ac:spMk id="2" creationId="{A25AE2BB-F0EF-6530-95CE-197C714BD407}"/>
+            <pc:sldMk cId="2211141522" sldId="269"/>
+            <ac:spMk id="2" creationId="{A6D83C05-C7B4-738C-031F-00A5A705E84E}"/>
+          </ac:spMkLst>
+        </pc:spChg>
+        <pc:spChg chg="add mod">
+          <ac:chgData name="Alexis MARTIN" userId="ec32c3d9-5957-42d0-8757-996fd533d25b" providerId="ADAL" clId="{B76BE869-635B-4DC9-A437-AFDC8BC5A345}" dt="2026-09-21T07:34:57.394" v="173" actId="1076"/>
+          <ac:spMkLst>
+            <pc:docMk/>
+            <pc:sldMk cId="2211141522" sldId="269"/>
+            <ac:spMk id="3" creationId="{3E9489BC-AE3A-1DCA-18FB-0F6B53BF5814}"/>
           </ac:spMkLst>
         </pc:spChg>
         <pc:spChg chg="del">
-          <ac:chgData name="Alexis MARTIN" userId="ec32c3d9-5957-42d0-8757-996fd533d25b" providerId="ADAL" clId="{B76BE869-635B-4DC9-A437-AFDC8BC5A345}" dt="2026-06-22T12:12:27.461" v="1" actId="478"/>
+          <ac:chgData name="Alexis MARTIN" userId="ec32c3d9-5957-42d0-8757-996fd533d25b" providerId="ADAL" clId="{B76BE869-635B-4DC9-A437-AFDC8BC5A345}" dt="2026-09-21T07:33:12.464" v="133" actId="478"/>
           <ac:spMkLst>
             <pc:docMk/>
-            <pc:sldMk cId="137391853" sldId="268"/>
-            <ac:spMk id="3" creationId="{1C46A474-64F0-D078-429A-77946520AD15}"/>
+            <pc:sldMk cId="2211141522" sldId="269"/>
+            <ac:spMk id="5" creationId="{5FE94BEF-CBA9-EF96-E215-4CDBADA1CC6C}"/>
           </ac:spMkLst>
         </pc:spChg>
         <pc:spChg chg="add mod">
-          <ac:chgData name="Alexis MARTIN" userId="ec32c3d9-5957-42d0-8757-996fd533d25b" providerId="ADAL" clId="{B76BE869-635B-4DC9-A437-AFDC8BC5A345}" dt="2026-06-22T12:22:33.392" v="119" actId="208"/>
+          <ac:chgData name="Alexis MARTIN" userId="ec32c3d9-5957-42d0-8757-996fd533d25b" providerId="ADAL" clId="{B76BE869-635B-4DC9-A437-AFDC8BC5A345}" dt="2026-09-21T07:35:06.365" v="177" actId="20577"/>
           <ac:spMkLst>
             <pc:docMk/>
-            <pc:sldMk cId="137391853" sldId="268"/>
-            <ac:spMk id="6" creationId="{5A8B524F-3386-6B34-99D0-1E169D38B9CE}"/>
+            <pc:sldMk cId="2211141522" sldId="269"/>
+            <ac:spMk id="8" creationId="{19C49D94-66BB-9452-221B-55A9C463D52D}"/>
+          </ac:spMkLst>
+        </pc:spChg>
+        <pc:spChg chg="del">
+          <ac:chgData name="Alexis MARTIN" userId="ec32c3d9-5957-42d0-8757-996fd533d25b" providerId="ADAL" clId="{B76BE869-635B-4DC9-A437-AFDC8BC5A345}" dt="2026-09-21T07:33:12.464" v="133" actId="478"/>
+          <ac:spMkLst>
+            <pc:docMk/>
+            <pc:sldMk cId="2211141522" sldId="269"/>
+            <ac:spMk id="10" creationId="{C4ED0160-483C-0BDC-552A-D9009563C811}"/>
           </ac:spMkLst>
         </pc:spChg>
         <pc:spChg chg="add mod">
-          <ac:chgData name="Alexis MARTIN" userId="ec32c3d9-5957-42d0-8757-996fd533d25b" providerId="ADAL" clId="{B76BE869-635B-4DC9-A437-AFDC8BC5A345}" dt="2026-06-22T12:22:33.392" v="119" actId="208"/>
+          <ac:chgData name="Alexis MARTIN" userId="ec32c3d9-5957-42d0-8757-996fd533d25b" providerId="ADAL" clId="{B76BE869-635B-4DC9-A437-AFDC8BC5A345}" dt="2026-09-21T07:35:23.986" v="185" actId="14100"/>
           <ac:spMkLst>
             <pc:docMk/>
-            <pc:sldMk cId="137391853" sldId="268"/>
-            <ac:spMk id="7" creationId="{1844C822-5825-7289-F48C-0D943F099511}"/>
+            <pc:sldMk cId="2211141522" sldId="269"/>
+            <ac:spMk id="12" creationId="{57C5753D-D758-6E67-DF10-4245D722D4DC}"/>
           </ac:spMkLst>
         </pc:spChg>
         <pc:spChg chg="add mod">
-          <ac:chgData name="Alexis MARTIN" userId="ec32c3d9-5957-42d0-8757-996fd533d25b" providerId="ADAL" clId="{B76BE869-635B-4DC9-A437-AFDC8BC5A345}" dt="2026-06-22T12:22:47.889" v="131" actId="1037"/>
+          <ac:chgData name="Alexis MARTIN" userId="ec32c3d9-5957-42d0-8757-996fd533d25b" providerId="ADAL" clId="{B76BE869-635B-4DC9-A437-AFDC8BC5A345}" dt="2026-09-21T07:35:30.533" v="190" actId="1076"/>
           <ac:spMkLst>
             <pc:docMk/>
-            <pc:sldMk cId="137391853" sldId="268"/>
-            <ac:spMk id="8" creationId="{E1319278-42B0-44F8-C96F-1366EC95D0D8}"/>
+            <pc:sldMk cId="2211141522" sldId="269"/>
+            <ac:spMk id="14" creationId="{48688A21-AD29-E35F-27E1-97D3CA7FA66A}"/>
           </ac:spMkLst>
         </pc:spChg>
         <pc:spChg chg="add mod">
-          <ac:chgData name="Alexis MARTIN" userId="ec32c3d9-5957-42d0-8757-996fd533d25b" providerId="ADAL" clId="{B76BE869-635B-4DC9-A437-AFDC8BC5A345}" dt="2026-06-22T12:22:27.736" v="117" actId="207"/>
+          <ac:chgData name="Alexis MARTIN" userId="ec32c3d9-5957-42d0-8757-996fd533d25b" providerId="ADAL" clId="{B76BE869-635B-4DC9-A437-AFDC8BC5A345}" dt="2026-09-21T07:36:49.531" v="212" actId="1037"/>
           <ac:spMkLst>
             <pc:docMk/>
-            <pc:sldMk cId="137391853" sldId="268"/>
-            <ac:spMk id="9" creationId="{A60997E7-0FCD-AC74-3364-84A56E302DC7}"/>
+            <pc:sldMk cId="2211141522" sldId="269"/>
+            <ac:spMk id="23" creationId="{C820D652-3A75-EE18-8F23-E31FB143E769}"/>
           </ac:spMkLst>
         </pc:spChg>
         <pc:spChg chg="add mod">
-          <ac:chgData name="Alexis MARTIN" userId="ec32c3d9-5957-42d0-8757-996fd533d25b" providerId="ADAL" clId="{B76BE869-635B-4DC9-A437-AFDC8BC5A345}" dt="2026-06-22T12:22:18.817" v="115" actId="207"/>
+          <ac:chgData name="Alexis MARTIN" userId="ec32c3d9-5957-42d0-8757-996fd533d25b" providerId="ADAL" clId="{B76BE869-635B-4DC9-A437-AFDC8BC5A345}" dt="2026-09-21T07:36:52.984" v="214" actId="1076"/>
           <ac:spMkLst>
             <pc:docMk/>
-            <pc:sldMk cId="137391853" sldId="268"/>
-            <ac:spMk id="14" creationId="{47A09A54-0967-738F-4E0D-B8BC2472DD70}"/>
+            <pc:sldMk cId="2211141522" sldId="269"/>
+            <ac:spMk id="25" creationId="{8990D22E-36AC-972B-4E0C-025638723E83}"/>
           </ac:spMkLst>
         </pc:spChg>
-        <pc:picChg chg="add mod modCrop">
-          <ac:chgData name="Alexis MARTIN" userId="ec32c3d9-5957-42d0-8757-996fd533d25b" providerId="ADAL" clId="{B76BE869-635B-4DC9-A437-AFDC8BC5A345}" dt="2026-06-22T12:12:50.194" v="9" actId="1076"/>
+        <pc:picChg chg="mod modCrop">
+          <ac:chgData name="Alexis MARTIN" userId="ec32c3d9-5957-42d0-8757-996fd533d25b" providerId="ADAL" clId="{B76BE869-635B-4DC9-A437-AFDC8BC5A345}" dt="2026-09-21T07:33:33.160" v="134" actId="732"/>
           <ac:picMkLst>
             <pc:docMk/>
-            <pc:sldMk cId="137391853" sldId="268"/>
-            <ac:picMk id="5" creationId="{623DD589-21DB-BE1D-BC4E-631AAFC2B525}"/>
+            <pc:sldMk cId="2211141522" sldId="269"/>
+            <ac:picMk id="4" creationId="{2338A0D6-8EB8-41DB-823C-283287F15F6C}"/>
           </ac:picMkLst>
         </pc:picChg>
-        <pc:cxnChg chg="add mod">
-          <ac:chgData name="Alexis MARTIN" userId="ec32c3d9-5957-42d0-8757-996fd533d25b" providerId="ADAL" clId="{B76BE869-635B-4DC9-A437-AFDC8BC5A345}" dt="2026-06-22T12:22:24.254" v="116" actId="208"/>
+        <pc:cxnChg chg="del mod">
+          <ac:chgData name="Alexis MARTIN" userId="ec32c3d9-5957-42d0-8757-996fd533d25b" providerId="ADAL" clId="{B76BE869-635B-4DC9-A437-AFDC8BC5A345}" dt="2026-09-21T07:33:12.464" v="133" actId="478"/>
           <ac:cxnSpMkLst>
             <pc:docMk/>
-            <pc:sldMk cId="137391853" sldId="268"/>
-            <ac:cxnSpMk id="11" creationId="{FB275445-A7FB-30CE-BFE2-39DC2701A19F}"/>
+            <pc:sldMk cId="2211141522" sldId="269"/>
+            <ac:cxnSpMk id="7" creationId="{26A021FE-36AB-F891-875B-76D184FD9736}"/>
+          </ac:cxnSpMkLst>
+        </pc:cxnChg>
+        <pc:cxnChg chg="del mod">
+          <ac:chgData name="Alexis MARTIN" userId="ec32c3d9-5957-42d0-8757-996fd533d25b" providerId="ADAL" clId="{B76BE869-635B-4DC9-A437-AFDC8BC5A345}" dt="2026-09-21T07:33:12.464" v="133" actId="478"/>
+          <ac:cxnSpMkLst>
+            <pc:docMk/>
+            <pc:sldMk cId="2211141522" sldId="269"/>
+            <ac:cxnSpMk id="9" creationId="{AC39D432-9DA4-B940-237A-873C255FE6D2}"/>
+          </ac:cxnSpMkLst>
+        </pc:cxnChg>
+        <pc:cxnChg chg="add mod">
+          <ac:chgData name="Alexis MARTIN" userId="ec32c3d9-5957-42d0-8757-996fd533d25b" providerId="ADAL" clId="{B76BE869-635B-4DC9-A437-AFDC8BC5A345}" dt="2026-09-21T07:35:50.816" v="193" actId="1582"/>
+          <ac:cxnSpMkLst>
+            <pc:docMk/>
+            <pc:sldMk cId="2211141522" sldId="269"/>
+            <ac:cxnSpMk id="16" creationId="{648B0ADA-D500-5A71-FCB8-E85975EC8356}"/>
+          </ac:cxnSpMkLst>
+        </pc:cxnChg>
+        <pc:cxnChg chg="add mod">
+          <ac:chgData name="Alexis MARTIN" userId="ec32c3d9-5957-42d0-8757-996fd533d25b" providerId="ADAL" clId="{B76BE869-635B-4DC9-A437-AFDC8BC5A345}" dt="2026-09-21T07:35:56.029" v="195" actId="1076"/>
+          <ac:cxnSpMkLst>
+            <pc:docMk/>
+            <pc:sldMk cId="2211141522" sldId="269"/>
+            <ac:cxnSpMk id="17" creationId="{81CE3CF0-D908-31DA-324F-1DF5A3EA6F72}"/>
+          </ac:cxnSpMkLst>
+        </pc:cxnChg>
+        <pc:cxnChg chg="add mod">
+          <ac:chgData name="Alexis MARTIN" userId="ec32c3d9-5957-42d0-8757-996fd533d25b" providerId="ADAL" clId="{B76BE869-635B-4DC9-A437-AFDC8BC5A345}" dt="2026-09-21T07:36:23.350" v="203" actId="14100"/>
+          <ac:cxnSpMkLst>
+            <pc:docMk/>
+            <pc:sldMk cId="2211141522" sldId="269"/>
+            <ac:cxnSpMk id="18" creationId="{009DB122-3BD3-22D3-A83A-9C80A5E0773C}"/>
+          </ac:cxnSpMkLst>
+        </pc:cxnChg>
+        <pc:cxnChg chg="add mod">
+          <ac:chgData name="Alexis MARTIN" userId="ec32c3d9-5957-42d0-8757-996fd533d25b" providerId="ADAL" clId="{B76BE869-635B-4DC9-A437-AFDC8BC5A345}" dt="2026-09-21T07:36:27.362" v="205" actId="1076"/>
+          <ac:cxnSpMkLst>
+            <pc:docMk/>
+            <pc:sldMk cId="2211141522" sldId="269"/>
+            <ac:cxnSpMk id="22" creationId="{E2182D9F-5126-818D-4E34-B302A98D4C7B}"/>
           </ac:cxnSpMkLst>
         </pc:cxnChg>
       </pc:sldChg>
@@ -354,7 +411,7 @@
           <a:p>
             <a:fld id="{3C81DF40-1B9F-48AE-A782-32F07490D82F}" type="datetimeFigureOut">
               <a:rPr lang="fr-FR" smtClean="0"/>
-              <a:t>22/06/2026</a:t>
+              <a:t>21/09/2026</a:t>
             </a:fld>
             <a:endParaRPr lang="fr-FR"/>
           </a:p>
@@ -522,7 +579,7 @@
           <a:p>
             <a:fld id="{3C81DF40-1B9F-48AE-A782-32F07490D82F}" type="datetimeFigureOut">
               <a:rPr lang="fr-FR" smtClean="0"/>
-              <a:t>22/06/2026</a:t>
+              <a:t>21/09/2026</a:t>
             </a:fld>
             <a:endParaRPr lang="fr-FR"/>
           </a:p>
@@ -700,7 +757,7 @@
           <a:p>
             <a:fld id="{3C81DF40-1B9F-48AE-A782-32F07490D82F}" type="datetimeFigureOut">
               <a:rPr lang="fr-FR" smtClean="0"/>
-              <a:t>22/06/2026</a:t>
+              <a:t>21/09/2026</a:t>
             </a:fld>
             <a:endParaRPr lang="fr-FR"/>
           </a:p>
@@ -868,7 +925,7 @@
           <a:p>
             <a:fld id="{3C81DF40-1B9F-48AE-A782-32F07490D82F}" type="datetimeFigureOut">
               <a:rPr lang="fr-FR" smtClean="0"/>
-              <a:t>22/06/2026</a:t>
+              <a:t>21/09/2026</a:t>
             </a:fld>
             <a:endParaRPr lang="fr-FR"/>
           </a:p>
@@ -1113,7 +1170,7 @@
           <a:p>
             <a:fld id="{3C81DF40-1B9F-48AE-A782-32F07490D82F}" type="datetimeFigureOut">
               <a:rPr lang="fr-FR" smtClean="0"/>
-              <a:t>22/06/2026</a:t>
+              <a:t>21/09/2026</a:t>
             </a:fld>
             <a:endParaRPr lang="fr-FR"/>
           </a:p>
@@ -1342,7 +1399,7 @@
           <a:p>
             <a:fld id="{3C81DF40-1B9F-48AE-A782-32F07490D82F}" type="datetimeFigureOut">
               <a:rPr lang="fr-FR" smtClean="0"/>
-              <a:t>22/06/2026</a:t>
+              <a:t>21/09/2026</a:t>
             </a:fld>
             <a:endParaRPr lang="fr-FR"/>
           </a:p>
@@ -1706,7 +1763,7 @@
           <a:p>
             <a:fld id="{3C81DF40-1B9F-48AE-A782-32F07490D82F}" type="datetimeFigureOut">
               <a:rPr lang="fr-FR" smtClean="0"/>
-              <a:t>22/06/2026</a:t>
+              <a:t>21/09/2026</a:t>
             </a:fld>
             <a:endParaRPr lang="fr-FR"/>
           </a:p>
@@ -1823,7 +1880,7 @@
           <a:p>
             <a:fld id="{3C81DF40-1B9F-48AE-A782-32F07490D82F}" type="datetimeFigureOut">
               <a:rPr lang="fr-FR" smtClean="0"/>
-              <a:t>22/06/2026</a:t>
+              <a:t>21/09/2026</a:t>
             </a:fld>
             <a:endParaRPr lang="fr-FR"/>
           </a:p>
@@ -1918,7 +1975,7 @@
           <a:p>
             <a:fld id="{3C81DF40-1B9F-48AE-A782-32F07490D82F}" type="datetimeFigureOut">
               <a:rPr lang="fr-FR" smtClean="0"/>
-              <a:t>22/06/2026</a:t>
+              <a:t>21/09/2026</a:t>
             </a:fld>
             <a:endParaRPr lang="fr-FR"/>
           </a:p>
@@ -2193,7 +2250,7 @@
           <a:p>
             <a:fld id="{3C81DF40-1B9F-48AE-A782-32F07490D82F}" type="datetimeFigureOut">
               <a:rPr lang="fr-FR" smtClean="0"/>
-              <a:t>22/06/2026</a:t>
+              <a:t>21/09/2026</a:t>
             </a:fld>
             <a:endParaRPr lang="fr-FR"/>
           </a:p>
@@ -2445,7 +2502,7 @@
           <a:p>
             <a:fld id="{3C81DF40-1B9F-48AE-A782-32F07490D82F}" type="datetimeFigureOut">
               <a:rPr lang="fr-FR" smtClean="0"/>
-              <a:t>22/06/2026</a:t>
+              <a:t>21/09/2026</a:t>
             </a:fld>
             <a:endParaRPr lang="fr-FR"/>
           </a:p>
@@ -2656,7 +2713,7 @@
           <a:p>
             <a:fld id="{3C81DF40-1B9F-48AE-A782-32F07490D82F}" type="datetimeFigureOut">
               <a:rPr lang="fr-FR" smtClean="0"/>
-              <a:t>22/06/2026</a:t>
+              <a:t>21/09/2026</a:t>
             </a:fld>
             <a:endParaRPr lang="fr-FR"/>
           </a:p>
@@ -3113,2012 +3170,6 @@
           <a:chExt cx="0" cy="0"/>
         </a:xfrm>
       </p:grpSpPr>
-      <p:pic>
-        <p:nvPicPr>
-          <p:cNvPr id="4" name="Image 3"/>
-          <p:cNvPicPr>
-            <a:picLocks noChangeAspect="1"/>
-          </p:cNvPicPr>
-          <p:nvPr/>
-        </p:nvPicPr>
-        <p:blipFill>
-          <a:blip r:embed="rId2"/>
-          <a:stretch>
-            <a:fillRect/>
-          </a:stretch>
-        </p:blipFill>
-        <p:spPr>
-          <a:xfrm>
-            <a:off x="551676" y="771154"/>
-            <a:ext cx="11088647" cy="5315692"/>
-          </a:xfrm>
-          <a:prstGeom prst="rect">
-            <a:avLst/>
-          </a:prstGeom>
-        </p:spPr>
-      </p:pic>
-      <p:cxnSp>
-        <p:nvCxnSpPr>
-          <p:cNvPr id="6" name="Connecteur droit avec flèche 5"/>
-          <p:cNvCxnSpPr/>
-          <p:nvPr/>
-        </p:nvCxnSpPr>
-        <p:spPr>
-          <a:xfrm>
-            <a:off x="6311900" y="1949450"/>
-            <a:ext cx="104775" cy="0"/>
-          </a:xfrm>
-          <a:prstGeom prst="straightConnector1">
-            <a:avLst/>
-          </a:prstGeom>
-          <a:ln w="57150">
-            <a:solidFill>
-              <a:schemeClr val="tx1"/>
-            </a:solidFill>
-            <a:tailEnd type="triangle"/>
-          </a:ln>
-        </p:spPr>
-        <p:style>
-          <a:lnRef idx="1">
-            <a:schemeClr val="accent1"/>
-          </a:lnRef>
-          <a:fillRef idx="0">
-            <a:schemeClr val="accent1"/>
-          </a:fillRef>
-          <a:effectRef idx="0">
-            <a:schemeClr val="accent1"/>
-          </a:effectRef>
-          <a:fontRef idx="minor">
-            <a:schemeClr val="tx1"/>
-          </a:fontRef>
-        </p:style>
-      </p:cxnSp>
-      <p:sp>
-        <p:nvSpPr>
-          <p:cNvPr id="10" name="ZoneTexte 9"/>
-          <p:cNvSpPr txBox="1"/>
-          <p:nvPr/>
-        </p:nvSpPr>
-        <p:spPr>
-          <a:xfrm>
-            <a:off x="6182186" y="1487785"/>
-            <a:ext cx="330540" cy="400110"/>
-          </a:xfrm>
-          <a:prstGeom prst="rect">
-            <a:avLst/>
-          </a:prstGeom>
-          <a:noFill/>
-        </p:spPr>
-        <p:txBody>
-          <a:bodyPr wrap="none" rtlCol="0">
-            <a:spAutoFit/>
-          </a:bodyPr>
-          <a:lstStyle/>
-          <a:p>
-            <a:r>
-              <a:rPr lang="fr-FR" sz="2000" b="1" dirty="0"/>
-              <a:t>i</a:t>
-            </a:r>
-            <a:r>
-              <a:rPr lang="fr-FR" sz="2000" b="1" baseline="-25000" dirty="0"/>
-              <a:t>2</a:t>
-            </a:r>
-          </a:p>
-        </p:txBody>
-      </p:sp>
-      <p:sp>
-        <p:nvSpPr>
-          <p:cNvPr id="11" name="Ellipse 10"/>
-          <p:cNvSpPr/>
-          <p:nvPr/>
-        </p:nvSpPr>
-        <p:spPr>
-          <a:xfrm>
-            <a:off x="6095999" y="4104409"/>
-            <a:ext cx="215901" cy="207818"/>
-          </a:xfrm>
-          <a:prstGeom prst="ellipse">
-            <a:avLst/>
-          </a:prstGeom>
-          <a:solidFill>
-            <a:schemeClr val="tx1"/>
-          </a:solidFill>
-          <a:ln>
-            <a:noFill/>
-          </a:ln>
-        </p:spPr>
-        <p:style>
-          <a:lnRef idx="2">
-            <a:schemeClr val="accent1">
-              <a:shade val="50000"/>
-            </a:schemeClr>
-          </a:lnRef>
-          <a:fillRef idx="1">
-            <a:schemeClr val="accent1"/>
-          </a:fillRef>
-          <a:effectRef idx="0">
-            <a:schemeClr val="accent1"/>
-          </a:effectRef>
-          <a:fontRef idx="minor">
-            <a:schemeClr val="lt1"/>
-          </a:fontRef>
-        </p:style>
-        <p:txBody>
-          <a:bodyPr rtlCol="0" anchor="ctr"/>
-          <a:lstStyle/>
-          <a:p>
-            <a:pPr algn="ctr"/>
-            <a:endParaRPr lang="fr-FR"/>
-          </a:p>
-        </p:txBody>
-      </p:sp>
-      <p:sp>
-        <p:nvSpPr>
-          <p:cNvPr id="12" name="Ellipse 11"/>
-          <p:cNvSpPr/>
-          <p:nvPr/>
-        </p:nvSpPr>
-        <p:spPr>
-          <a:xfrm>
-            <a:off x="3721099" y="4637809"/>
-            <a:ext cx="215901" cy="207818"/>
-          </a:xfrm>
-          <a:prstGeom prst="ellipse">
-            <a:avLst/>
-          </a:prstGeom>
-          <a:solidFill>
-            <a:schemeClr val="tx1"/>
-          </a:solidFill>
-          <a:ln>
-            <a:noFill/>
-          </a:ln>
-        </p:spPr>
-        <p:style>
-          <a:lnRef idx="2">
-            <a:schemeClr val="accent1">
-              <a:shade val="50000"/>
-            </a:schemeClr>
-          </a:lnRef>
-          <a:fillRef idx="1">
-            <a:schemeClr val="accent1"/>
-          </a:fillRef>
-          <a:effectRef idx="0">
-            <a:schemeClr val="accent1"/>
-          </a:effectRef>
-          <a:fontRef idx="minor">
-            <a:schemeClr val="lt1"/>
-          </a:fontRef>
-        </p:style>
-        <p:txBody>
-          <a:bodyPr rtlCol="0" anchor="ctr"/>
-          <a:lstStyle/>
-          <a:p>
-            <a:pPr algn="ctr"/>
-            <a:endParaRPr lang="fr-FR"/>
-          </a:p>
-        </p:txBody>
-      </p:sp>
-      <p:sp>
-        <p:nvSpPr>
-          <p:cNvPr id="13" name="Ellipse 12"/>
-          <p:cNvSpPr/>
-          <p:nvPr/>
-        </p:nvSpPr>
-        <p:spPr>
-          <a:xfrm>
-            <a:off x="4267199" y="4000500"/>
-            <a:ext cx="215901" cy="207818"/>
-          </a:xfrm>
-          <a:prstGeom prst="ellipse">
-            <a:avLst/>
-          </a:prstGeom>
-          <a:solidFill>
-            <a:schemeClr val="tx1"/>
-          </a:solidFill>
-          <a:ln>
-            <a:noFill/>
-          </a:ln>
-        </p:spPr>
-        <p:style>
-          <a:lnRef idx="2">
-            <a:schemeClr val="accent1">
-              <a:shade val="50000"/>
-            </a:schemeClr>
-          </a:lnRef>
-          <a:fillRef idx="1">
-            <a:schemeClr val="accent1"/>
-          </a:fillRef>
-          <a:effectRef idx="0">
-            <a:schemeClr val="accent1"/>
-          </a:effectRef>
-          <a:fontRef idx="minor">
-            <a:schemeClr val="lt1"/>
-          </a:fontRef>
-        </p:style>
-        <p:txBody>
-          <a:bodyPr rtlCol="0" anchor="ctr"/>
-          <a:lstStyle/>
-          <a:p>
-            <a:pPr algn="ctr"/>
-            <a:endParaRPr lang="fr-FR"/>
-          </a:p>
-        </p:txBody>
-      </p:sp>
-      <p:sp>
-        <p:nvSpPr>
-          <p:cNvPr id="14" name="Ellipse 13"/>
-          <p:cNvSpPr/>
-          <p:nvPr/>
-        </p:nvSpPr>
-        <p:spPr>
-          <a:xfrm>
-            <a:off x="4267199" y="1914154"/>
-            <a:ext cx="215901" cy="207818"/>
-          </a:xfrm>
-          <a:prstGeom prst="ellipse">
-            <a:avLst/>
-          </a:prstGeom>
-          <a:solidFill>
-            <a:schemeClr val="tx1"/>
-          </a:solidFill>
-          <a:ln>
-            <a:noFill/>
-          </a:ln>
-        </p:spPr>
-        <p:style>
-          <a:lnRef idx="2">
-            <a:schemeClr val="accent1">
-              <a:shade val="50000"/>
-            </a:schemeClr>
-          </a:lnRef>
-          <a:fillRef idx="1">
-            <a:schemeClr val="accent1"/>
-          </a:fillRef>
-          <a:effectRef idx="0">
-            <a:schemeClr val="accent1"/>
-          </a:effectRef>
-          <a:fontRef idx="minor">
-            <a:schemeClr val="lt1"/>
-          </a:fontRef>
-        </p:style>
-        <p:txBody>
-          <a:bodyPr rtlCol="0" anchor="ctr"/>
-          <a:lstStyle/>
-          <a:p>
-            <a:pPr algn="ctr"/>
-            <a:endParaRPr lang="fr-FR"/>
-          </a:p>
-        </p:txBody>
-      </p:sp>
-      <p:sp>
-        <p:nvSpPr>
-          <p:cNvPr id="15" name="Ellipse 14"/>
-          <p:cNvSpPr/>
-          <p:nvPr/>
-        </p:nvSpPr>
-        <p:spPr>
-          <a:xfrm>
-            <a:off x="6720503" y="1844881"/>
-            <a:ext cx="215901" cy="207818"/>
-          </a:xfrm>
-          <a:prstGeom prst="ellipse">
-            <a:avLst/>
-          </a:prstGeom>
-          <a:solidFill>
-            <a:schemeClr val="tx1"/>
-          </a:solidFill>
-          <a:ln>
-            <a:noFill/>
-          </a:ln>
-        </p:spPr>
-        <p:style>
-          <a:lnRef idx="2">
-            <a:schemeClr val="accent1">
-              <a:shade val="50000"/>
-            </a:schemeClr>
-          </a:lnRef>
-          <a:fillRef idx="1">
-            <a:schemeClr val="accent1"/>
-          </a:fillRef>
-          <a:effectRef idx="0">
-            <a:schemeClr val="accent1"/>
-          </a:effectRef>
-          <a:fontRef idx="minor">
-            <a:schemeClr val="lt1"/>
-          </a:fontRef>
-        </p:style>
-        <p:txBody>
-          <a:bodyPr rtlCol="0" anchor="ctr"/>
-          <a:lstStyle/>
-          <a:p>
-            <a:pPr algn="ctr"/>
-            <a:endParaRPr lang="fr-FR"/>
-          </a:p>
-        </p:txBody>
-      </p:sp>
-      <p:sp>
-        <p:nvSpPr>
-          <p:cNvPr id="17" name="Rectangle 16"/>
-          <p:cNvSpPr/>
-          <p:nvPr/>
-        </p:nvSpPr>
-        <p:spPr>
-          <a:xfrm>
-            <a:off x="10414000" y="5130800"/>
-            <a:ext cx="990600" cy="457200"/>
-          </a:xfrm>
-          <a:prstGeom prst="rect">
-            <a:avLst/>
-          </a:prstGeom>
-          <a:solidFill>
-            <a:schemeClr val="bg1"/>
-          </a:solidFill>
-          <a:ln>
-            <a:noFill/>
-          </a:ln>
-        </p:spPr>
-        <p:style>
-          <a:lnRef idx="2">
-            <a:schemeClr val="accent1">
-              <a:shade val="50000"/>
-            </a:schemeClr>
-          </a:lnRef>
-          <a:fillRef idx="1">
-            <a:schemeClr val="accent1"/>
-          </a:fillRef>
-          <a:effectRef idx="0">
-            <a:schemeClr val="accent1"/>
-          </a:effectRef>
-          <a:fontRef idx="minor">
-            <a:schemeClr val="lt1"/>
-          </a:fontRef>
-        </p:style>
-        <p:txBody>
-          <a:bodyPr rtlCol="0" anchor="ctr"/>
-          <a:lstStyle/>
-          <a:p>
-            <a:pPr algn="ctr"/>
-            <a:endParaRPr lang="fr-FR"/>
-          </a:p>
-        </p:txBody>
-      </p:sp>
-      <p:sp>
-        <p:nvSpPr>
-          <p:cNvPr id="18" name="Ellipse 17"/>
-          <p:cNvSpPr/>
-          <p:nvPr/>
-        </p:nvSpPr>
-        <p:spPr>
-          <a:xfrm>
-            <a:off x="4261427" y="5605317"/>
-            <a:ext cx="215901" cy="207818"/>
-          </a:xfrm>
-          <a:prstGeom prst="ellipse">
-            <a:avLst/>
-          </a:prstGeom>
-          <a:solidFill>
-            <a:schemeClr val="tx1"/>
-          </a:solidFill>
-          <a:ln>
-            <a:noFill/>
-          </a:ln>
-        </p:spPr>
-        <p:style>
-          <a:lnRef idx="2">
-            <a:schemeClr val="accent1">
-              <a:shade val="50000"/>
-            </a:schemeClr>
-          </a:lnRef>
-          <a:fillRef idx="1">
-            <a:schemeClr val="accent1"/>
-          </a:fillRef>
-          <a:effectRef idx="0">
-            <a:schemeClr val="accent1"/>
-          </a:effectRef>
-          <a:fontRef idx="minor">
-            <a:schemeClr val="lt1"/>
-          </a:fontRef>
-        </p:style>
-        <p:txBody>
-          <a:bodyPr rtlCol="0" anchor="ctr"/>
-          <a:lstStyle/>
-          <a:p>
-            <a:pPr algn="ctr"/>
-            <a:endParaRPr lang="fr-FR"/>
-          </a:p>
-        </p:txBody>
-      </p:sp>
-      <p:sp>
-        <p:nvSpPr>
-          <p:cNvPr id="19" name="Rectangle 18"/>
-          <p:cNvSpPr/>
-          <p:nvPr/>
-        </p:nvSpPr>
-        <p:spPr>
-          <a:xfrm>
-            <a:off x="2322946" y="2168154"/>
-            <a:ext cx="392545" cy="951346"/>
-          </a:xfrm>
-          <a:prstGeom prst="rect">
-            <a:avLst/>
-          </a:prstGeom>
-          <a:solidFill>
-            <a:schemeClr val="bg1"/>
-          </a:solidFill>
-          <a:ln>
-            <a:noFill/>
-          </a:ln>
-        </p:spPr>
-        <p:style>
-          <a:lnRef idx="2">
-            <a:schemeClr val="accent1">
-              <a:shade val="50000"/>
-            </a:schemeClr>
-          </a:lnRef>
-          <a:fillRef idx="1">
-            <a:schemeClr val="accent1"/>
-          </a:fillRef>
-          <a:effectRef idx="0">
-            <a:schemeClr val="accent1"/>
-          </a:effectRef>
-          <a:fontRef idx="minor">
-            <a:schemeClr val="lt1"/>
-          </a:fontRef>
-        </p:style>
-        <p:txBody>
-          <a:bodyPr rtlCol="0" anchor="ctr"/>
-          <a:lstStyle/>
-          <a:p>
-            <a:pPr algn="ctr"/>
-            <a:endParaRPr lang="fr-FR"/>
-          </a:p>
-        </p:txBody>
-      </p:sp>
-      <p:sp>
-        <p:nvSpPr>
-          <p:cNvPr id="3" name="ZoneTexte 2"/>
-          <p:cNvSpPr txBox="1"/>
-          <p:nvPr/>
-        </p:nvSpPr>
-        <p:spPr>
-          <a:xfrm>
-            <a:off x="2950443" y="2044535"/>
-            <a:ext cx="700833" cy="400110"/>
-          </a:xfrm>
-          <a:prstGeom prst="rect">
-            <a:avLst/>
-          </a:prstGeom>
-          <a:noFill/>
-        </p:spPr>
-        <p:txBody>
-          <a:bodyPr wrap="none" rtlCol="0">
-            <a:spAutoFit/>
-          </a:bodyPr>
-          <a:lstStyle/>
-          <a:p>
-            <a:r>
-              <a:rPr lang="fr-FR" sz="2000" b="1" dirty="0"/>
-              <a:t>n</a:t>
-            </a:r>
-            <a:r>
-              <a:rPr lang="el-GR" sz="2000" b="1" baseline="-25000" dirty="0"/>
-              <a:t>φ</a:t>
-            </a:r>
-            <a:r>
-              <a:rPr lang="fr-FR" sz="2000" b="1" dirty="0"/>
-              <a:t>=1</a:t>
-            </a:r>
-          </a:p>
-        </p:txBody>
-      </p:sp>
-      <p:cxnSp>
-        <p:nvCxnSpPr>
-          <p:cNvPr id="7" name="Connecteur droit avec flèche 6"/>
-          <p:cNvCxnSpPr/>
-          <p:nvPr/>
-        </p:nvCxnSpPr>
-        <p:spPr>
-          <a:xfrm flipV="1">
-            <a:off x="2715491" y="2168154"/>
-            <a:ext cx="0" cy="1517155"/>
-          </a:xfrm>
-          <a:prstGeom prst="straightConnector1">
-            <a:avLst/>
-          </a:prstGeom>
-          <a:ln w="28575">
-            <a:solidFill>
-              <a:schemeClr val="tx1"/>
-            </a:solidFill>
-            <a:headEnd type="none" w="med" len="med"/>
-            <a:tailEnd type="arrow" w="med" len="med"/>
-          </a:ln>
-        </p:spPr>
-        <p:style>
-          <a:lnRef idx="1">
-            <a:schemeClr val="accent1"/>
-          </a:lnRef>
-          <a:fillRef idx="0">
-            <a:schemeClr val="accent1"/>
-          </a:fillRef>
-          <a:effectRef idx="0">
-            <a:schemeClr val="accent1"/>
-          </a:effectRef>
-          <a:fontRef idx="minor">
-            <a:schemeClr val="tx1"/>
-          </a:fontRef>
-        </p:style>
-      </p:cxnSp>
-      <p:sp>
-        <p:nvSpPr>
-          <p:cNvPr id="8" name="ZoneTexte 7"/>
-          <p:cNvSpPr txBox="1"/>
-          <p:nvPr/>
-        </p:nvSpPr>
-        <p:spPr>
-          <a:xfrm>
-            <a:off x="2127607" y="2274495"/>
-            <a:ext cx="653256" cy="400110"/>
-          </a:xfrm>
-          <a:prstGeom prst="rect">
-            <a:avLst/>
-          </a:prstGeom>
-          <a:noFill/>
-        </p:spPr>
-        <p:txBody>
-          <a:bodyPr wrap="none" rtlCol="0">
-            <a:spAutoFit/>
-          </a:bodyPr>
-          <a:lstStyle/>
-          <a:p>
-            <a:r>
-              <a:rPr lang="fr-FR" sz="2000" b="1" dirty="0"/>
-              <a:t>v</a:t>
-            </a:r>
-            <a:r>
-              <a:rPr lang="fr-FR" sz="2000" b="1" baseline="-25000" dirty="0"/>
-              <a:t>spire</a:t>
-            </a:r>
-          </a:p>
-        </p:txBody>
-      </p:sp>
-      <p:sp>
-        <p:nvSpPr>
-          <p:cNvPr id="20" name="Rectangle 19"/>
-          <p:cNvSpPr/>
-          <p:nvPr/>
-        </p:nvSpPr>
-        <p:spPr>
-          <a:xfrm>
-            <a:off x="1761754" y="2672657"/>
-            <a:ext cx="392545" cy="338200"/>
-          </a:xfrm>
-          <a:prstGeom prst="rect">
-            <a:avLst/>
-          </a:prstGeom>
-          <a:solidFill>
-            <a:schemeClr val="bg1"/>
-          </a:solidFill>
-          <a:ln>
-            <a:noFill/>
-          </a:ln>
-        </p:spPr>
-        <p:style>
-          <a:lnRef idx="2">
-            <a:schemeClr val="accent1">
-              <a:shade val="50000"/>
-            </a:schemeClr>
-          </a:lnRef>
-          <a:fillRef idx="1">
-            <a:schemeClr val="accent1"/>
-          </a:fillRef>
-          <a:effectRef idx="0">
-            <a:schemeClr val="accent1"/>
-          </a:effectRef>
-          <a:fontRef idx="minor">
-            <a:schemeClr val="lt1"/>
-          </a:fontRef>
-        </p:style>
-        <p:txBody>
-          <a:bodyPr rtlCol="0" anchor="ctr"/>
-          <a:lstStyle/>
-          <a:p>
-            <a:pPr algn="ctr"/>
-            <a:endParaRPr lang="fr-FR"/>
-          </a:p>
-        </p:txBody>
-      </p:sp>
-      <p:sp>
-        <p:nvSpPr>
-          <p:cNvPr id="9" name="Rectangle 8"/>
-          <p:cNvSpPr/>
-          <p:nvPr/>
-        </p:nvSpPr>
-        <p:spPr>
-          <a:xfrm>
-            <a:off x="1907448" y="3620777"/>
-            <a:ext cx="574324" cy="400110"/>
-          </a:xfrm>
-          <a:prstGeom prst="rect">
-            <a:avLst/>
-          </a:prstGeom>
-        </p:spPr>
-        <p:txBody>
-          <a:bodyPr wrap="none">
-            <a:spAutoFit/>
-          </a:bodyPr>
-          <a:lstStyle/>
-          <a:p>
-            <a:r>
-              <a:rPr lang="fr-FR" sz="2000" b="1" dirty="0"/>
-              <a:t>v</a:t>
-            </a:r>
-            <a:r>
-              <a:rPr lang="fr-FR" sz="2000" b="1" baseline="-25000" dirty="0"/>
-              <a:t>flux</a:t>
-            </a:r>
-            <a:endParaRPr lang="fr-FR" sz="2000" dirty="0"/>
-          </a:p>
-        </p:txBody>
-      </p:sp>
-      <p:sp>
-        <p:nvSpPr>
-          <p:cNvPr id="21" name="Rectangle 20"/>
-          <p:cNvSpPr/>
-          <p:nvPr/>
-        </p:nvSpPr>
-        <p:spPr>
-          <a:xfrm>
-            <a:off x="3455003" y="1610590"/>
-            <a:ext cx="392545" cy="338200"/>
-          </a:xfrm>
-          <a:prstGeom prst="rect">
-            <a:avLst/>
-          </a:prstGeom>
-          <a:solidFill>
-            <a:schemeClr val="bg1"/>
-          </a:solidFill>
-          <a:ln>
-            <a:noFill/>
-          </a:ln>
-        </p:spPr>
-        <p:style>
-          <a:lnRef idx="2">
-            <a:schemeClr val="accent1">
-              <a:shade val="50000"/>
-            </a:schemeClr>
-          </a:lnRef>
-          <a:fillRef idx="1">
-            <a:schemeClr val="accent1"/>
-          </a:fillRef>
-          <a:effectRef idx="0">
-            <a:schemeClr val="accent1"/>
-          </a:effectRef>
-          <a:fontRef idx="minor">
-            <a:schemeClr val="lt1"/>
-          </a:fontRef>
-        </p:style>
-        <p:txBody>
-          <a:bodyPr rtlCol="0" anchor="ctr"/>
-          <a:lstStyle/>
-          <a:p>
-            <a:pPr algn="ctr"/>
-            <a:endParaRPr lang="fr-FR"/>
-          </a:p>
-        </p:txBody>
-      </p:sp>
-      <p:sp>
-        <p:nvSpPr>
-          <p:cNvPr id="22" name="Rectangle 21"/>
-          <p:cNvSpPr/>
-          <p:nvPr/>
-        </p:nvSpPr>
-        <p:spPr>
-          <a:xfrm>
-            <a:off x="3721099" y="2742065"/>
-            <a:ext cx="393056" cy="400110"/>
-          </a:xfrm>
-          <a:prstGeom prst="rect">
-            <a:avLst/>
-          </a:prstGeom>
-        </p:spPr>
-        <p:txBody>
-          <a:bodyPr wrap="none">
-            <a:spAutoFit/>
-          </a:bodyPr>
-          <a:lstStyle/>
-          <a:p>
-            <a:r>
-              <a:rPr lang="fr-FR" sz="2000" b="1" dirty="0"/>
-              <a:t>v</a:t>
-            </a:r>
-            <a:r>
-              <a:rPr lang="fr-FR" sz="2000" b="1" baseline="-25000" dirty="0"/>
-              <a:t>1</a:t>
-            </a:r>
-            <a:endParaRPr lang="fr-FR" sz="2000" baseline="-25000" dirty="0"/>
-          </a:p>
-        </p:txBody>
-      </p:sp>
-      <p:sp>
-        <p:nvSpPr>
-          <p:cNvPr id="23" name="Rectangle 22"/>
-          <p:cNvSpPr/>
-          <p:nvPr/>
-        </p:nvSpPr>
-        <p:spPr>
-          <a:xfrm>
-            <a:off x="5750385" y="2726676"/>
-            <a:ext cx="393056" cy="400110"/>
-          </a:xfrm>
-          <a:prstGeom prst="rect">
-            <a:avLst/>
-          </a:prstGeom>
-        </p:spPr>
-        <p:txBody>
-          <a:bodyPr wrap="none">
-            <a:spAutoFit/>
-          </a:bodyPr>
-          <a:lstStyle/>
-          <a:p>
-            <a:r>
-              <a:rPr lang="fr-FR" sz="2000" b="1" dirty="0"/>
-              <a:t>v</a:t>
-            </a:r>
-            <a:r>
-              <a:rPr lang="fr-FR" sz="2000" b="1" baseline="-25000" dirty="0"/>
-              <a:t>2</a:t>
-            </a:r>
-            <a:endParaRPr lang="fr-FR" sz="2000" baseline="-25000" dirty="0"/>
-          </a:p>
-        </p:txBody>
-      </p:sp>
-      <p:sp>
-        <p:nvSpPr>
-          <p:cNvPr id="24" name="Rectangle 23"/>
-          <p:cNvSpPr/>
-          <p:nvPr/>
-        </p:nvSpPr>
-        <p:spPr>
-          <a:xfrm>
-            <a:off x="5543024" y="1594344"/>
-            <a:ext cx="392545" cy="338200"/>
-          </a:xfrm>
-          <a:prstGeom prst="rect">
-            <a:avLst/>
-          </a:prstGeom>
-          <a:solidFill>
-            <a:schemeClr val="bg1"/>
-          </a:solidFill>
-          <a:ln>
-            <a:noFill/>
-          </a:ln>
-        </p:spPr>
-        <p:style>
-          <a:lnRef idx="2">
-            <a:schemeClr val="accent1">
-              <a:shade val="50000"/>
-            </a:schemeClr>
-          </a:lnRef>
-          <a:fillRef idx="1">
-            <a:schemeClr val="accent1"/>
-          </a:fillRef>
-          <a:effectRef idx="0">
-            <a:schemeClr val="accent1"/>
-          </a:effectRef>
-          <a:fontRef idx="minor">
-            <a:schemeClr val="lt1"/>
-          </a:fontRef>
-        </p:style>
-        <p:txBody>
-          <a:bodyPr rtlCol="0" anchor="ctr"/>
-          <a:lstStyle/>
-          <a:p>
-            <a:pPr algn="ctr"/>
-            <a:endParaRPr lang="fr-FR"/>
-          </a:p>
-        </p:txBody>
-      </p:sp>
-      <p:cxnSp>
-        <p:nvCxnSpPr>
-          <p:cNvPr id="25" name="Connecteur droit avec flèche 24"/>
-          <p:cNvCxnSpPr/>
-          <p:nvPr/>
-        </p:nvCxnSpPr>
-        <p:spPr>
-          <a:xfrm>
-            <a:off x="4391024" y="1266824"/>
-            <a:ext cx="0" cy="157586"/>
-          </a:xfrm>
-          <a:prstGeom prst="straightConnector1">
-            <a:avLst/>
-          </a:prstGeom>
-          <a:ln w="57150">
-            <a:solidFill>
-              <a:schemeClr val="tx1"/>
-            </a:solidFill>
-            <a:tailEnd type="triangle"/>
-          </a:ln>
-        </p:spPr>
-        <p:style>
-          <a:lnRef idx="1">
-            <a:schemeClr val="accent1"/>
-          </a:lnRef>
-          <a:fillRef idx="0">
-            <a:schemeClr val="accent1"/>
-          </a:fillRef>
-          <a:effectRef idx="0">
-            <a:schemeClr val="accent1"/>
-          </a:effectRef>
-          <a:fontRef idx="minor">
-            <a:schemeClr val="tx1"/>
-          </a:fontRef>
-        </p:style>
-      </p:cxnSp>
-      <p:sp>
-        <p:nvSpPr>
-          <p:cNvPr id="28" name="ZoneTexte 27"/>
-          <p:cNvSpPr txBox="1"/>
-          <p:nvPr/>
-        </p:nvSpPr>
-        <p:spPr>
-          <a:xfrm>
-            <a:off x="4472372" y="1194234"/>
-            <a:ext cx="330540" cy="400110"/>
-          </a:xfrm>
-          <a:prstGeom prst="rect">
-            <a:avLst/>
-          </a:prstGeom>
-          <a:noFill/>
-        </p:spPr>
-        <p:txBody>
-          <a:bodyPr wrap="none" rtlCol="0">
-            <a:spAutoFit/>
-          </a:bodyPr>
-          <a:lstStyle/>
-          <a:p>
-            <a:r>
-              <a:rPr lang="fr-FR" sz="2000" b="1" dirty="0"/>
-              <a:t>i</a:t>
-            </a:r>
-            <a:r>
-              <a:rPr lang="fr-FR" sz="2000" b="1" baseline="-25000" dirty="0"/>
-              <a:t>1</a:t>
-            </a:r>
-          </a:p>
-        </p:txBody>
-      </p:sp>
-    </p:spTree>
-    <p:extLst>
-      <p:ext uri="{BB962C8B-B14F-4D97-AF65-F5344CB8AC3E}">
-        <p14:creationId xmlns:p14="http://schemas.microsoft.com/office/powerpoint/2010/main" val="3674708944"/>
-      </p:ext>
-    </p:extLst>
-  </p:cSld>
-  <p:clrMapOvr>
-    <a:masterClrMapping/>
-  </p:clrMapOvr>
-</p:sld>
-</file>
-
-<file path=ppt/slides/slide11.xml><?xml version="1.0" encoding="utf-8"?>
-<p:sld xmlns:a="http://schemas.openxmlformats.org/drawingml/2006/main" xmlns:r="http://schemas.openxmlformats.org/officeDocument/2006/relationships" xmlns:p="http://schemas.openxmlformats.org/presentationml/2006/main">
-  <p:cSld>
-    <p:spTree>
-      <p:nvGrpSpPr>
-        <p:cNvPr id="1" name=""/>
-        <p:cNvGrpSpPr/>
-        <p:nvPr/>
-      </p:nvGrpSpPr>
-      <p:grpSpPr>
-        <a:xfrm>
-          <a:off x="0" y="0"/>
-          <a:ext cx="0" cy="0"/>
-          <a:chOff x="0" y="0"/>
-          <a:chExt cx="0" cy="0"/>
-        </a:xfrm>
-      </p:grpSpPr>
-      <p:sp>
-        <p:nvSpPr>
-          <p:cNvPr id="2" name="Titre 1"/>
-          <p:cNvSpPr>
-            <a:spLocks noGrp="1"/>
-          </p:cNvSpPr>
-          <p:nvPr>
-            <p:ph type="ctrTitle"/>
-          </p:nvPr>
-        </p:nvSpPr>
-        <p:spPr/>
-        <p:txBody>
-          <a:bodyPr/>
-          <a:lstStyle/>
-          <a:p>
-            <a:r>
-              <a:rPr lang="fr-FR" b="1" dirty="0"/>
-              <a:t>TP </a:t>
-            </a:r>
-            <a:r>
-              <a:rPr lang="fr-FR" b="1" dirty="0" err="1"/>
-              <a:t>Forward</a:t>
-            </a:r>
-            <a:endParaRPr lang="fr-FR" b="1" dirty="0"/>
-          </a:p>
-        </p:txBody>
-      </p:sp>
-    </p:spTree>
-    <p:extLst>
-      <p:ext uri="{BB962C8B-B14F-4D97-AF65-F5344CB8AC3E}">
-        <p14:creationId xmlns:p14="http://schemas.microsoft.com/office/powerpoint/2010/main" val="3667489403"/>
-      </p:ext>
-    </p:extLst>
-  </p:cSld>
-  <p:clrMapOvr>
-    <a:masterClrMapping/>
-  </p:clrMapOvr>
-</p:sld>
-</file>
-
-<file path=ppt/slides/slide12.xml><?xml version="1.0" encoding="utf-8"?>
-<p:sld xmlns:a="http://schemas.openxmlformats.org/drawingml/2006/main" xmlns:r="http://schemas.openxmlformats.org/officeDocument/2006/relationships" xmlns:p="http://schemas.openxmlformats.org/presentationml/2006/main">
-  <p:cSld>
-    <p:spTree>
-      <p:nvGrpSpPr>
-        <p:cNvPr id="1" name=""/>
-        <p:cNvGrpSpPr/>
-        <p:nvPr/>
-      </p:nvGrpSpPr>
-      <p:grpSpPr>
-        <a:xfrm>
-          <a:off x="0" y="0"/>
-          <a:ext cx="0" cy="0"/>
-          <a:chOff x="0" y="0"/>
-          <a:chExt cx="0" cy="0"/>
-        </a:xfrm>
-      </p:grpSpPr>
-      <p:pic>
-        <p:nvPicPr>
-          <p:cNvPr id="4" name="Image 3"/>
-          <p:cNvPicPr>
-            <a:picLocks noChangeAspect="1"/>
-          </p:cNvPicPr>
-          <p:nvPr/>
-        </p:nvPicPr>
-        <p:blipFill>
-          <a:blip r:embed="rId2"/>
-          <a:stretch>
-            <a:fillRect/>
-          </a:stretch>
-        </p:blipFill>
-        <p:spPr>
-          <a:xfrm>
-            <a:off x="457018" y="891843"/>
-            <a:ext cx="11277963" cy="5074313"/>
-          </a:xfrm>
-          <a:prstGeom prst="rect">
-            <a:avLst/>
-          </a:prstGeom>
-        </p:spPr>
-      </p:pic>
-      <p:sp>
-        <p:nvSpPr>
-          <p:cNvPr id="5" name="Rectangle 4"/>
-          <p:cNvSpPr/>
-          <p:nvPr/>
-        </p:nvSpPr>
-        <p:spPr>
-          <a:xfrm>
-            <a:off x="10261600" y="5033819"/>
-            <a:ext cx="990600" cy="457200"/>
-          </a:xfrm>
-          <a:prstGeom prst="rect">
-            <a:avLst/>
-          </a:prstGeom>
-          <a:solidFill>
-            <a:schemeClr val="bg1"/>
-          </a:solidFill>
-          <a:ln>
-            <a:noFill/>
-          </a:ln>
-        </p:spPr>
-        <p:style>
-          <a:lnRef idx="2">
-            <a:schemeClr val="accent1">
-              <a:shade val="50000"/>
-            </a:schemeClr>
-          </a:lnRef>
-          <a:fillRef idx="1">
-            <a:schemeClr val="accent1"/>
-          </a:fillRef>
-          <a:effectRef idx="0">
-            <a:schemeClr val="accent1"/>
-          </a:effectRef>
-          <a:fontRef idx="minor">
-            <a:schemeClr val="lt1"/>
-          </a:fontRef>
-        </p:style>
-        <p:txBody>
-          <a:bodyPr rtlCol="0" anchor="ctr"/>
-          <a:lstStyle/>
-          <a:p>
-            <a:pPr algn="ctr"/>
-            <a:endParaRPr lang="fr-FR"/>
-          </a:p>
-        </p:txBody>
-      </p:sp>
-      <p:sp>
-        <p:nvSpPr>
-          <p:cNvPr id="6" name="Ellipse 5"/>
-          <p:cNvSpPr/>
-          <p:nvPr/>
-        </p:nvSpPr>
-        <p:spPr>
-          <a:xfrm>
-            <a:off x="3986828" y="1254331"/>
-            <a:ext cx="215901" cy="207818"/>
-          </a:xfrm>
-          <a:prstGeom prst="ellipse">
-            <a:avLst/>
-          </a:prstGeom>
-          <a:solidFill>
-            <a:schemeClr val="tx1"/>
-          </a:solidFill>
-          <a:ln>
-            <a:noFill/>
-          </a:ln>
-        </p:spPr>
-        <p:style>
-          <a:lnRef idx="2">
-            <a:schemeClr val="accent1">
-              <a:shade val="50000"/>
-            </a:schemeClr>
-          </a:lnRef>
-          <a:fillRef idx="1">
-            <a:schemeClr val="accent1"/>
-          </a:fillRef>
-          <a:effectRef idx="0">
-            <a:schemeClr val="accent1"/>
-          </a:effectRef>
-          <a:fontRef idx="minor">
-            <a:schemeClr val="lt1"/>
-          </a:fontRef>
-        </p:style>
-        <p:txBody>
-          <a:bodyPr rtlCol="0" anchor="ctr"/>
-          <a:lstStyle/>
-          <a:p>
-            <a:pPr algn="ctr"/>
-            <a:endParaRPr lang="fr-FR"/>
-          </a:p>
-        </p:txBody>
-      </p:sp>
-      <p:sp>
-        <p:nvSpPr>
-          <p:cNvPr id="7" name="Ellipse 6"/>
-          <p:cNvSpPr/>
-          <p:nvPr/>
-        </p:nvSpPr>
-        <p:spPr>
-          <a:xfrm>
-            <a:off x="5663228" y="1930606"/>
-            <a:ext cx="215901" cy="207818"/>
-          </a:xfrm>
-          <a:prstGeom prst="ellipse">
-            <a:avLst/>
-          </a:prstGeom>
-          <a:solidFill>
-            <a:schemeClr val="tx1"/>
-          </a:solidFill>
-          <a:ln>
-            <a:noFill/>
-          </a:ln>
-        </p:spPr>
-        <p:style>
-          <a:lnRef idx="2">
-            <a:schemeClr val="accent1">
-              <a:shade val="50000"/>
-            </a:schemeClr>
-          </a:lnRef>
-          <a:fillRef idx="1">
-            <a:schemeClr val="accent1"/>
-          </a:fillRef>
-          <a:effectRef idx="0">
-            <a:schemeClr val="accent1"/>
-          </a:effectRef>
-          <a:fontRef idx="minor">
-            <a:schemeClr val="lt1"/>
-          </a:fontRef>
-        </p:style>
-        <p:txBody>
-          <a:bodyPr rtlCol="0" anchor="ctr"/>
-          <a:lstStyle/>
-          <a:p>
-            <a:pPr algn="ctr"/>
-            <a:endParaRPr lang="fr-FR"/>
-          </a:p>
-        </p:txBody>
-      </p:sp>
-      <p:sp>
-        <p:nvSpPr>
-          <p:cNvPr id="8" name="Ellipse 7"/>
-          <p:cNvSpPr/>
-          <p:nvPr/>
-        </p:nvSpPr>
-        <p:spPr>
-          <a:xfrm>
-            <a:off x="5519381" y="4083256"/>
-            <a:ext cx="215901" cy="207818"/>
-          </a:xfrm>
-          <a:prstGeom prst="ellipse">
-            <a:avLst/>
-          </a:prstGeom>
-          <a:solidFill>
-            <a:schemeClr val="tx1"/>
-          </a:solidFill>
-          <a:ln>
-            <a:noFill/>
-          </a:ln>
-        </p:spPr>
-        <p:style>
-          <a:lnRef idx="2">
-            <a:schemeClr val="accent1">
-              <a:shade val="50000"/>
-            </a:schemeClr>
-          </a:lnRef>
-          <a:fillRef idx="1">
-            <a:schemeClr val="accent1"/>
-          </a:fillRef>
-          <a:effectRef idx="0">
-            <a:schemeClr val="accent1"/>
-          </a:effectRef>
-          <a:fontRef idx="minor">
-            <a:schemeClr val="lt1"/>
-          </a:fontRef>
-        </p:style>
-        <p:txBody>
-          <a:bodyPr rtlCol="0" anchor="ctr"/>
-          <a:lstStyle/>
-          <a:p>
-            <a:pPr algn="ctr"/>
-            <a:endParaRPr lang="fr-FR"/>
-          </a:p>
-        </p:txBody>
-      </p:sp>
-      <p:sp>
-        <p:nvSpPr>
-          <p:cNvPr id="9" name="Ellipse 8"/>
-          <p:cNvSpPr/>
-          <p:nvPr/>
-        </p:nvSpPr>
-        <p:spPr>
-          <a:xfrm>
-            <a:off x="8711228" y="2644981"/>
-            <a:ext cx="215901" cy="207818"/>
-          </a:xfrm>
-          <a:prstGeom prst="ellipse">
-            <a:avLst/>
-          </a:prstGeom>
-          <a:solidFill>
-            <a:schemeClr val="tx1"/>
-          </a:solidFill>
-          <a:ln>
-            <a:noFill/>
-          </a:ln>
-        </p:spPr>
-        <p:style>
-          <a:lnRef idx="2">
-            <a:schemeClr val="accent1">
-              <a:shade val="50000"/>
-            </a:schemeClr>
-          </a:lnRef>
-          <a:fillRef idx="1">
-            <a:schemeClr val="accent1"/>
-          </a:fillRef>
-          <a:effectRef idx="0">
-            <a:schemeClr val="accent1"/>
-          </a:effectRef>
-          <a:fontRef idx="minor">
-            <a:schemeClr val="lt1"/>
-          </a:fontRef>
-        </p:style>
-        <p:txBody>
-          <a:bodyPr rtlCol="0" anchor="ctr"/>
-          <a:lstStyle/>
-          <a:p>
-            <a:pPr algn="ctr"/>
-            <a:endParaRPr lang="fr-FR"/>
-          </a:p>
-        </p:txBody>
-      </p:sp>
-      <p:sp>
-        <p:nvSpPr>
-          <p:cNvPr id="10" name="Ellipse 9"/>
-          <p:cNvSpPr/>
-          <p:nvPr/>
-        </p:nvSpPr>
-        <p:spPr>
-          <a:xfrm>
-            <a:off x="3878877" y="4597606"/>
-            <a:ext cx="215901" cy="207818"/>
-          </a:xfrm>
-          <a:prstGeom prst="ellipse">
-            <a:avLst/>
-          </a:prstGeom>
-          <a:solidFill>
-            <a:schemeClr val="tx1"/>
-          </a:solidFill>
-          <a:ln>
-            <a:noFill/>
-          </a:ln>
-        </p:spPr>
-        <p:style>
-          <a:lnRef idx="2">
-            <a:schemeClr val="accent1">
-              <a:shade val="50000"/>
-            </a:schemeClr>
-          </a:lnRef>
-          <a:fillRef idx="1">
-            <a:schemeClr val="accent1"/>
-          </a:fillRef>
-          <a:effectRef idx="0">
-            <a:schemeClr val="accent1"/>
-          </a:effectRef>
-          <a:fontRef idx="minor">
-            <a:schemeClr val="lt1"/>
-          </a:fontRef>
-        </p:style>
-        <p:txBody>
-          <a:bodyPr rtlCol="0" anchor="ctr"/>
-          <a:lstStyle/>
-          <a:p>
-            <a:pPr algn="ctr"/>
-            <a:endParaRPr lang="fr-FR"/>
-          </a:p>
-        </p:txBody>
-      </p:sp>
-      <p:sp>
-        <p:nvSpPr>
-          <p:cNvPr id="11" name="Ellipse 10"/>
-          <p:cNvSpPr/>
-          <p:nvPr/>
-        </p:nvSpPr>
-        <p:spPr>
-          <a:xfrm>
-            <a:off x="4357881" y="4206421"/>
-            <a:ext cx="215901" cy="207818"/>
-          </a:xfrm>
-          <a:prstGeom prst="ellipse">
-            <a:avLst/>
-          </a:prstGeom>
-          <a:solidFill>
-            <a:schemeClr val="tx1"/>
-          </a:solidFill>
-          <a:ln>
-            <a:noFill/>
-          </a:ln>
-        </p:spPr>
-        <p:style>
-          <a:lnRef idx="2">
-            <a:schemeClr val="accent1">
-              <a:shade val="50000"/>
-            </a:schemeClr>
-          </a:lnRef>
-          <a:fillRef idx="1">
-            <a:schemeClr val="accent1"/>
-          </a:fillRef>
-          <a:effectRef idx="0">
-            <a:schemeClr val="accent1"/>
-          </a:effectRef>
-          <a:fontRef idx="minor">
-            <a:schemeClr val="lt1"/>
-          </a:fontRef>
-        </p:style>
-        <p:txBody>
-          <a:bodyPr rtlCol="0" anchor="ctr"/>
-          <a:lstStyle/>
-          <a:p>
-            <a:pPr algn="ctr"/>
-            <a:endParaRPr lang="fr-FR"/>
-          </a:p>
-        </p:txBody>
-      </p:sp>
-      <p:sp>
-        <p:nvSpPr>
-          <p:cNvPr id="12" name="Ellipse 11"/>
-          <p:cNvSpPr/>
-          <p:nvPr/>
-        </p:nvSpPr>
-        <p:spPr>
-          <a:xfrm>
-            <a:off x="3662976" y="4206421"/>
-            <a:ext cx="215901" cy="207818"/>
-          </a:xfrm>
-          <a:prstGeom prst="ellipse">
-            <a:avLst/>
-          </a:prstGeom>
-          <a:solidFill>
-            <a:schemeClr val="tx1"/>
-          </a:solidFill>
-          <a:ln>
-            <a:noFill/>
-          </a:ln>
-        </p:spPr>
-        <p:style>
-          <a:lnRef idx="2">
-            <a:schemeClr val="accent1">
-              <a:shade val="50000"/>
-            </a:schemeClr>
-          </a:lnRef>
-          <a:fillRef idx="1">
-            <a:schemeClr val="accent1"/>
-          </a:fillRef>
-          <a:effectRef idx="0">
-            <a:schemeClr val="accent1"/>
-          </a:effectRef>
-          <a:fontRef idx="minor">
-            <a:schemeClr val="lt1"/>
-          </a:fontRef>
-        </p:style>
-        <p:txBody>
-          <a:bodyPr rtlCol="0" anchor="ctr"/>
-          <a:lstStyle/>
-          <a:p>
-            <a:pPr algn="ctr"/>
-            <a:endParaRPr lang="fr-FR"/>
-          </a:p>
-        </p:txBody>
-      </p:sp>
-      <p:sp>
-        <p:nvSpPr>
-          <p:cNvPr id="13" name="Ellipse 12"/>
-          <p:cNvSpPr/>
-          <p:nvPr/>
-        </p:nvSpPr>
-        <p:spPr>
-          <a:xfrm>
-            <a:off x="3986828" y="5654881"/>
-            <a:ext cx="215901" cy="207818"/>
-          </a:xfrm>
-          <a:prstGeom prst="ellipse">
-            <a:avLst/>
-          </a:prstGeom>
-          <a:solidFill>
-            <a:schemeClr val="tx1"/>
-          </a:solidFill>
-          <a:ln>
-            <a:noFill/>
-          </a:ln>
-        </p:spPr>
-        <p:style>
-          <a:lnRef idx="2">
-            <a:schemeClr val="accent1">
-              <a:shade val="50000"/>
-            </a:schemeClr>
-          </a:lnRef>
-          <a:fillRef idx="1">
-            <a:schemeClr val="accent1"/>
-          </a:fillRef>
-          <a:effectRef idx="0">
-            <a:schemeClr val="accent1"/>
-          </a:effectRef>
-          <a:fontRef idx="minor">
-            <a:schemeClr val="lt1"/>
-          </a:fontRef>
-        </p:style>
-        <p:txBody>
-          <a:bodyPr rtlCol="0" anchor="ctr"/>
-          <a:lstStyle/>
-          <a:p>
-            <a:pPr algn="ctr"/>
-            <a:endParaRPr lang="fr-FR"/>
-          </a:p>
-        </p:txBody>
-      </p:sp>
-      <p:sp>
-        <p:nvSpPr>
-          <p:cNvPr id="14" name="Ellipse 13"/>
-          <p:cNvSpPr/>
-          <p:nvPr/>
-        </p:nvSpPr>
-        <p:spPr>
-          <a:xfrm>
-            <a:off x="7478174" y="2644981"/>
-            <a:ext cx="215901" cy="207818"/>
-          </a:xfrm>
-          <a:prstGeom prst="ellipse">
-            <a:avLst/>
-          </a:prstGeom>
-          <a:solidFill>
-            <a:schemeClr val="tx1"/>
-          </a:solidFill>
-          <a:ln>
-            <a:noFill/>
-          </a:ln>
-        </p:spPr>
-        <p:style>
-          <a:lnRef idx="2">
-            <a:schemeClr val="accent1">
-              <a:shade val="50000"/>
-            </a:schemeClr>
-          </a:lnRef>
-          <a:fillRef idx="1">
-            <a:schemeClr val="accent1"/>
-          </a:fillRef>
-          <a:effectRef idx="0">
-            <a:schemeClr val="accent1"/>
-          </a:effectRef>
-          <a:fontRef idx="minor">
-            <a:schemeClr val="lt1"/>
-          </a:fontRef>
-        </p:style>
-        <p:txBody>
-          <a:bodyPr rtlCol="0" anchor="ctr"/>
-          <a:lstStyle/>
-          <a:p>
-            <a:pPr algn="ctr"/>
-            <a:endParaRPr lang="fr-FR"/>
-          </a:p>
-        </p:txBody>
-      </p:sp>
-      <p:sp>
-        <p:nvSpPr>
-          <p:cNvPr id="15" name="Ellipse 14"/>
-          <p:cNvSpPr/>
-          <p:nvPr/>
-        </p:nvSpPr>
-        <p:spPr>
-          <a:xfrm>
-            <a:off x="9627042" y="4083256"/>
-            <a:ext cx="215901" cy="207818"/>
-          </a:xfrm>
-          <a:prstGeom prst="ellipse">
-            <a:avLst/>
-          </a:prstGeom>
-          <a:solidFill>
-            <a:schemeClr val="tx1"/>
-          </a:solidFill>
-          <a:ln>
-            <a:noFill/>
-          </a:ln>
-        </p:spPr>
-        <p:style>
-          <a:lnRef idx="2">
-            <a:schemeClr val="accent1">
-              <a:shade val="50000"/>
-            </a:schemeClr>
-          </a:lnRef>
-          <a:fillRef idx="1">
-            <a:schemeClr val="accent1"/>
-          </a:fillRef>
-          <a:effectRef idx="0">
-            <a:schemeClr val="accent1"/>
-          </a:effectRef>
-          <a:fontRef idx="minor">
-            <a:schemeClr val="lt1"/>
-          </a:fontRef>
-        </p:style>
-        <p:txBody>
-          <a:bodyPr rtlCol="0" anchor="ctr"/>
-          <a:lstStyle/>
-          <a:p>
-            <a:pPr algn="ctr"/>
-            <a:endParaRPr lang="fr-FR"/>
-          </a:p>
-        </p:txBody>
-      </p:sp>
-      <p:sp>
-        <p:nvSpPr>
-          <p:cNvPr id="16" name="Rectangle 15"/>
-          <p:cNvSpPr/>
-          <p:nvPr/>
-        </p:nvSpPr>
-        <p:spPr>
-          <a:xfrm>
-            <a:off x="2024991" y="2767857"/>
-            <a:ext cx="392545" cy="338200"/>
-          </a:xfrm>
-          <a:prstGeom prst="rect">
-            <a:avLst/>
-          </a:prstGeom>
-          <a:solidFill>
-            <a:schemeClr val="bg1"/>
-          </a:solidFill>
-          <a:ln>
-            <a:noFill/>
-          </a:ln>
-        </p:spPr>
-        <p:style>
-          <a:lnRef idx="2">
-            <a:schemeClr val="accent1">
-              <a:shade val="50000"/>
-            </a:schemeClr>
-          </a:lnRef>
-          <a:fillRef idx="1">
-            <a:schemeClr val="accent1"/>
-          </a:fillRef>
-          <a:effectRef idx="0">
-            <a:schemeClr val="accent1"/>
-          </a:effectRef>
-          <a:fontRef idx="minor">
-            <a:schemeClr val="lt1"/>
-          </a:fontRef>
-        </p:style>
-        <p:txBody>
-          <a:bodyPr rtlCol="0" anchor="ctr"/>
-          <a:lstStyle/>
-          <a:p>
-            <a:pPr algn="ctr"/>
-            <a:endParaRPr lang="fr-FR"/>
-          </a:p>
-        </p:txBody>
-      </p:sp>
-      <p:sp>
-        <p:nvSpPr>
-          <p:cNvPr id="17" name="Rectangle 16"/>
-          <p:cNvSpPr/>
-          <p:nvPr/>
-        </p:nvSpPr>
-        <p:spPr>
-          <a:xfrm>
-            <a:off x="2246663" y="2840099"/>
-            <a:ext cx="129308" cy="338200"/>
-          </a:xfrm>
-          <a:prstGeom prst="rect">
-            <a:avLst/>
-          </a:prstGeom>
-          <a:solidFill>
-            <a:schemeClr val="bg1"/>
-          </a:solidFill>
-          <a:ln>
-            <a:noFill/>
-          </a:ln>
-        </p:spPr>
-        <p:style>
-          <a:lnRef idx="2">
-            <a:schemeClr val="accent1">
-              <a:shade val="50000"/>
-            </a:schemeClr>
-          </a:lnRef>
-          <a:fillRef idx="1">
-            <a:schemeClr val="accent1"/>
-          </a:fillRef>
-          <a:effectRef idx="0">
-            <a:schemeClr val="accent1"/>
-          </a:effectRef>
-          <a:fontRef idx="minor">
-            <a:schemeClr val="lt1"/>
-          </a:fontRef>
-        </p:style>
-        <p:txBody>
-          <a:bodyPr rtlCol="0" anchor="ctr"/>
-          <a:lstStyle/>
-          <a:p>
-            <a:pPr algn="ctr"/>
-            <a:endParaRPr lang="fr-FR"/>
-          </a:p>
-        </p:txBody>
-      </p:sp>
-      <p:sp>
-        <p:nvSpPr>
-          <p:cNvPr id="18" name="Rectangle 17"/>
-          <p:cNvSpPr/>
-          <p:nvPr/>
-        </p:nvSpPr>
-        <p:spPr>
-          <a:xfrm>
-            <a:off x="2126500" y="3627127"/>
-            <a:ext cx="574324" cy="400110"/>
-          </a:xfrm>
-          <a:prstGeom prst="rect">
-            <a:avLst/>
-          </a:prstGeom>
-        </p:spPr>
-        <p:txBody>
-          <a:bodyPr wrap="none">
-            <a:spAutoFit/>
-          </a:bodyPr>
-          <a:lstStyle/>
-          <a:p>
-            <a:r>
-              <a:rPr lang="fr-FR" sz="2000" b="1" dirty="0"/>
-              <a:t>v</a:t>
-            </a:r>
-            <a:r>
-              <a:rPr lang="fr-FR" sz="2000" b="1" baseline="-25000" dirty="0"/>
-              <a:t>flux</a:t>
-            </a:r>
-            <a:endParaRPr lang="fr-FR" sz="2000" dirty="0"/>
-          </a:p>
-        </p:txBody>
-      </p:sp>
-      <p:sp>
-        <p:nvSpPr>
-          <p:cNvPr id="19" name="Rectangle 18"/>
-          <p:cNvSpPr/>
-          <p:nvPr/>
-        </p:nvSpPr>
-        <p:spPr>
-          <a:xfrm>
-            <a:off x="2507096" y="2226953"/>
-            <a:ext cx="392545" cy="951346"/>
-          </a:xfrm>
-          <a:prstGeom prst="rect">
-            <a:avLst/>
-          </a:prstGeom>
-          <a:solidFill>
-            <a:schemeClr val="bg1"/>
-          </a:solidFill>
-          <a:ln>
-            <a:noFill/>
-          </a:ln>
-        </p:spPr>
-        <p:style>
-          <a:lnRef idx="2">
-            <a:schemeClr val="accent1">
-              <a:shade val="50000"/>
-            </a:schemeClr>
-          </a:lnRef>
-          <a:fillRef idx="1">
-            <a:schemeClr val="accent1"/>
-          </a:fillRef>
-          <a:effectRef idx="0">
-            <a:schemeClr val="accent1"/>
-          </a:effectRef>
-          <a:fontRef idx="minor">
-            <a:schemeClr val="lt1"/>
-          </a:fontRef>
-        </p:style>
-        <p:txBody>
-          <a:bodyPr rtlCol="0" anchor="ctr"/>
-          <a:lstStyle/>
-          <a:p>
-            <a:pPr algn="ctr"/>
-            <a:endParaRPr lang="fr-FR"/>
-          </a:p>
-        </p:txBody>
-      </p:sp>
-      <p:cxnSp>
-        <p:nvCxnSpPr>
-          <p:cNvPr id="20" name="Connecteur droit avec flèche 19"/>
-          <p:cNvCxnSpPr/>
-          <p:nvPr/>
-        </p:nvCxnSpPr>
-        <p:spPr>
-          <a:xfrm flipV="1">
-            <a:off x="2899641" y="2226953"/>
-            <a:ext cx="0" cy="1517155"/>
-          </a:xfrm>
-          <a:prstGeom prst="straightConnector1">
-            <a:avLst/>
-          </a:prstGeom>
-          <a:ln w="28575">
-            <a:solidFill>
-              <a:schemeClr val="tx1"/>
-            </a:solidFill>
-            <a:headEnd type="none" w="med" len="med"/>
-            <a:tailEnd type="arrow" w="med" len="med"/>
-          </a:ln>
-        </p:spPr>
-        <p:style>
-          <a:lnRef idx="1">
-            <a:schemeClr val="accent1"/>
-          </a:lnRef>
-          <a:fillRef idx="0">
-            <a:schemeClr val="accent1"/>
-          </a:fillRef>
-          <a:effectRef idx="0">
-            <a:schemeClr val="accent1"/>
-          </a:effectRef>
-          <a:fontRef idx="minor">
-            <a:schemeClr val="tx1"/>
-          </a:fontRef>
-        </p:style>
-      </p:cxnSp>
-      <p:sp>
-        <p:nvSpPr>
-          <p:cNvPr id="21" name="ZoneTexte 20"/>
-          <p:cNvSpPr txBox="1"/>
-          <p:nvPr/>
-        </p:nvSpPr>
-        <p:spPr>
-          <a:xfrm>
-            <a:off x="2311757" y="2333294"/>
-            <a:ext cx="653256" cy="400110"/>
-          </a:xfrm>
-          <a:prstGeom prst="rect">
-            <a:avLst/>
-          </a:prstGeom>
-          <a:noFill/>
-        </p:spPr>
-        <p:txBody>
-          <a:bodyPr wrap="none" rtlCol="0">
-            <a:spAutoFit/>
-          </a:bodyPr>
-          <a:lstStyle/>
-          <a:p>
-            <a:r>
-              <a:rPr lang="fr-FR" sz="2000" b="1" dirty="0"/>
-              <a:t>v</a:t>
-            </a:r>
-            <a:r>
-              <a:rPr lang="fr-FR" sz="2000" b="1" baseline="-25000" dirty="0"/>
-              <a:t>spire</a:t>
-            </a:r>
-          </a:p>
-        </p:txBody>
-      </p:sp>
-      <p:sp>
-        <p:nvSpPr>
-          <p:cNvPr id="22" name="ZoneTexte 21"/>
-          <p:cNvSpPr txBox="1"/>
-          <p:nvPr/>
-        </p:nvSpPr>
-        <p:spPr>
-          <a:xfrm>
-            <a:off x="2925041" y="2069884"/>
-            <a:ext cx="700833" cy="400110"/>
-          </a:xfrm>
-          <a:prstGeom prst="rect">
-            <a:avLst/>
-          </a:prstGeom>
-          <a:noFill/>
-        </p:spPr>
-        <p:txBody>
-          <a:bodyPr wrap="none" rtlCol="0">
-            <a:spAutoFit/>
-          </a:bodyPr>
-          <a:lstStyle/>
-          <a:p>
-            <a:r>
-              <a:rPr lang="fr-FR" sz="2000" b="1" dirty="0"/>
-              <a:t>n</a:t>
-            </a:r>
-            <a:r>
-              <a:rPr lang="el-GR" sz="2000" b="1" baseline="-25000" dirty="0"/>
-              <a:t>φ</a:t>
-            </a:r>
-            <a:r>
-              <a:rPr lang="fr-FR" sz="2000" b="1" dirty="0"/>
-              <a:t>=1</a:t>
-            </a:r>
-          </a:p>
-        </p:txBody>
-      </p:sp>
-      <p:cxnSp>
-        <p:nvCxnSpPr>
-          <p:cNvPr id="23" name="Connecteur droit avec flèche 22"/>
-          <p:cNvCxnSpPr/>
-          <p:nvPr/>
-        </p:nvCxnSpPr>
-        <p:spPr>
-          <a:xfrm>
-            <a:off x="7907729" y="2762084"/>
-            <a:ext cx="104775" cy="0"/>
-          </a:xfrm>
-          <a:prstGeom prst="straightConnector1">
-            <a:avLst/>
-          </a:prstGeom>
-          <a:ln w="57150">
-            <a:solidFill>
-              <a:schemeClr val="tx1"/>
-            </a:solidFill>
-            <a:tailEnd type="triangle"/>
-          </a:ln>
-        </p:spPr>
-        <p:style>
-          <a:lnRef idx="1">
-            <a:schemeClr val="accent1"/>
-          </a:lnRef>
-          <a:fillRef idx="0">
-            <a:schemeClr val="accent1"/>
-          </a:fillRef>
-          <a:effectRef idx="0">
-            <a:schemeClr val="accent1"/>
-          </a:effectRef>
-          <a:fontRef idx="minor">
-            <a:schemeClr val="tx1"/>
-          </a:fontRef>
-        </p:style>
-      </p:cxnSp>
-      <p:sp>
-        <p:nvSpPr>
-          <p:cNvPr id="24" name="ZoneTexte 23"/>
-          <p:cNvSpPr txBox="1"/>
-          <p:nvPr/>
-        </p:nvSpPr>
-        <p:spPr>
-          <a:xfrm>
-            <a:off x="7778015" y="2300419"/>
-            <a:ext cx="330540" cy="400110"/>
-          </a:xfrm>
-          <a:prstGeom prst="rect">
-            <a:avLst/>
-          </a:prstGeom>
-          <a:noFill/>
-        </p:spPr>
-        <p:txBody>
-          <a:bodyPr wrap="none" rtlCol="0">
-            <a:spAutoFit/>
-          </a:bodyPr>
-          <a:lstStyle/>
-          <a:p>
-            <a:r>
-              <a:rPr lang="fr-FR" sz="2000" b="1" dirty="0"/>
-              <a:t>i</a:t>
-            </a:r>
-            <a:r>
-              <a:rPr lang="fr-FR" sz="2000" b="1" baseline="-25000" dirty="0"/>
-              <a:t>2</a:t>
-            </a:r>
-          </a:p>
-        </p:txBody>
-      </p:sp>
-      <p:cxnSp>
-        <p:nvCxnSpPr>
-          <p:cNvPr id="25" name="Connecteur droit avec flèche 24"/>
-          <p:cNvCxnSpPr/>
-          <p:nvPr/>
-        </p:nvCxnSpPr>
-        <p:spPr>
-          <a:xfrm>
-            <a:off x="4455512" y="3908090"/>
-            <a:ext cx="1" cy="169068"/>
-          </a:xfrm>
-          <a:prstGeom prst="straightConnector1">
-            <a:avLst/>
-          </a:prstGeom>
-          <a:ln w="57150">
-            <a:solidFill>
-              <a:schemeClr val="tx1"/>
-            </a:solidFill>
-            <a:tailEnd type="triangle"/>
-          </a:ln>
-        </p:spPr>
-        <p:style>
-          <a:lnRef idx="1">
-            <a:schemeClr val="accent1"/>
-          </a:lnRef>
-          <a:fillRef idx="0">
-            <a:schemeClr val="accent1"/>
-          </a:fillRef>
-          <a:effectRef idx="0">
-            <a:schemeClr val="accent1"/>
-          </a:effectRef>
-          <a:fontRef idx="minor">
-            <a:schemeClr val="tx1"/>
-          </a:fontRef>
-        </p:style>
-      </p:cxnSp>
-      <p:sp>
-        <p:nvSpPr>
-          <p:cNvPr id="26" name="ZoneTexte 25"/>
-          <p:cNvSpPr txBox="1"/>
-          <p:nvPr/>
-        </p:nvSpPr>
-        <p:spPr>
-          <a:xfrm>
-            <a:off x="4509586" y="3791013"/>
-            <a:ext cx="330540" cy="400110"/>
-          </a:xfrm>
-          <a:prstGeom prst="rect">
-            <a:avLst/>
-          </a:prstGeom>
-          <a:noFill/>
-        </p:spPr>
-        <p:txBody>
-          <a:bodyPr wrap="none" rtlCol="0">
-            <a:spAutoFit/>
-          </a:bodyPr>
-          <a:lstStyle/>
-          <a:p>
-            <a:r>
-              <a:rPr lang="fr-FR" sz="2000" b="1" dirty="0"/>
-              <a:t>i</a:t>
-            </a:r>
-            <a:r>
-              <a:rPr lang="fr-FR" sz="2000" b="1" baseline="-25000" dirty="0"/>
-              <a:t>1</a:t>
-            </a:r>
-          </a:p>
-        </p:txBody>
-      </p:sp>
-      <p:cxnSp>
-        <p:nvCxnSpPr>
-          <p:cNvPr id="32" name="Connecteur droit avec flèche 31"/>
-          <p:cNvCxnSpPr/>
-          <p:nvPr/>
-        </p:nvCxnSpPr>
-        <p:spPr>
-          <a:xfrm flipV="1">
-            <a:off x="3767484" y="3898109"/>
-            <a:ext cx="1" cy="165130"/>
-          </a:xfrm>
-          <a:prstGeom prst="straightConnector1">
-            <a:avLst/>
-          </a:prstGeom>
-          <a:ln w="57150">
-            <a:solidFill>
-              <a:schemeClr val="tx1"/>
-            </a:solidFill>
-            <a:tailEnd type="triangle"/>
-          </a:ln>
-        </p:spPr>
-        <p:style>
-          <a:lnRef idx="1">
-            <a:schemeClr val="accent1"/>
-          </a:lnRef>
-          <a:fillRef idx="0">
-            <a:schemeClr val="accent1"/>
-          </a:fillRef>
-          <a:effectRef idx="0">
-            <a:schemeClr val="accent1"/>
-          </a:effectRef>
-          <a:fontRef idx="minor">
-            <a:schemeClr val="tx1"/>
-          </a:fontRef>
-        </p:style>
-      </p:cxnSp>
-      <p:sp>
-        <p:nvSpPr>
-          <p:cNvPr id="33" name="ZoneTexte 32"/>
-          <p:cNvSpPr txBox="1"/>
-          <p:nvPr/>
-        </p:nvSpPr>
-        <p:spPr>
-          <a:xfrm>
-            <a:off x="3807995" y="3787055"/>
-            <a:ext cx="330540" cy="400110"/>
-          </a:xfrm>
-          <a:prstGeom prst="rect">
-            <a:avLst/>
-          </a:prstGeom>
-          <a:noFill/>
-        </p:spPr>
-        <p:txBody>
-          <a:bodyPr wrap="none" rtlCol="0">
-            <a:spAutoFit/>
-          </a:bodyPr>
-          <a:lstStyle/>
-          <a:p>
-            <a:r>
-              <a:rPr lang="fr-FR" sz="2000" b="1" dirty="0"/>
-              <a:t>i</a:t>
-            </a:r>
-            <a:r>
-              <a:rPr lang="fr-FR" sz="2000" b="1" baseline="-25000" dirty="0"/>
-              <a:t>3</a:t>
-            </a:r>
-          </a:p>
-        </p:txBody>
-      </p:sp>
-    </p:spTree>
-    <p:extLst>
-      <p:ext uri="{BB962C8B-B14F-4D97-AF65-F5344CB8AC3E}">
-        <p14:creationId xmlns:p14="http://schemas.microsoft.com/office/powerpoint/2010/main" val="3765914464"/>
-      </p:ext>
-    </p:extLst>
-  </p:cSld>
-  <p:clrMapOvr>
-    <a:masterClrMapping/>
-  </p:clrMapOvr>
-</p:sld>
-</file>
-
-<file path=ppt/slides/slide13.xml><?xml version="1.0" encoding="utf-8"?>
-<p:sld xmlns:a="http://schemas.openxmlformats.org/drawingml/2006/main" xmlns:r="http://schemas.openxmlformats.org/officeDocument/2006/relationships" xmlns:p="http://schemas.openxmlformats.org/presentationml/2006/main">
-  <p:cSld>
-    <p:spTree>
-      <p:nvGrpSpPr>
-        <p:cNvPr id="1" name=""/>
-        <p:cNvGrpSpPr/>
-        <p:nvPr/>
-      </p:nvGrpSpPr>
-      <p:grpSpPr>
-        <a:xfrm>
-          <a:off x="0" y="0"/>
-          <a:ext cx="0" cy="0"/>
-          <a:chOff x="0" y="0"/>
-          <a:chExt cx="0" cy="0"/>
-        </a:xfrm>
-      </p:grpSpPr>
       <p:cxnSp>
         <p:nvCxnSpPr>
           <p:cNvPr id="2" name="Connecteur droit avec flèche 1"/>
@@ -5241,10 +3292,7 @@
                 <a:pPr/>
                 <a14:m>
                   <m:oMathPara xmlns:m="http://schemas.openxmlformats.org/officeDocument/2006/math">
-                    <m:oMathParaPr>
-                      <m:jc m:val="centerGroup"/>
-                    </m:oMathParaPr>
-                    <m:oMath xmlns:m="http://schemas.openxmlformats.org/officeDocument/2006/math">
+                    <m:oMath>
                       <m:r>
                         <a:rPr lang="fr-FR" sz="1276" b="1" i="1" smtClean="0">
                           <a:latin typeface="Cambria Math" panose="02040503050406030204" pitchFamily="18" charset="0"/>
@@ -5355,10 +3403,7 @@
                 <a:pPr/>
                 <a14:m>
                   <m:oMathPara xmlns:m="http://schemas.openxmlformats.org/officeDocument/2006/math">
-                    <m:oMathParaPr>
-                      <m:jc m:val="centerGroup"/>
-                    </m:oMathParaPr>
-                    <m:oMath xmlns:m="http://schemas.openxmlformats.org/officeDocument/2006/math">
+                    <m:oMath>
                       <m:r>
                         <a:rPr lang="fr-FR" sz="1276" b="1" i="1">
                           <a:latin typeface="Cambria Math" panose="02040503050406030204" pitchFamily="18" charset="0"/>
@@ -6204,10 +4249,7 @@
                 <a:pPr/>
                 <a14:m>
                   <m:oMathPara xmlns:m="http://schemas.openxmlformats.org/officeDocument/2006/math">
-                    <m:oMathParaPr>
-                      <m:jc m:val="centerGroup"/>
-                    </m:oMathParaPr>
-                    <m:oMath xmlns:m="http://schemas.openxmlformats.org/officeDocument/2006/math">
+                    <m:oMath>
                       <m:r>
                         <a:rPr lang="fr-FR" sz="1276" b="1" i="1">
                           <a:latin typeface="Cambria Math" panose="02040503050406030204" pitchFamily="18" charset="0"/>
@@ -6306,10 +4348,7 @@
                 <a:pPr/>
                 <a14:m>
                   <m:oMathPara xmlns:m="http://schemas.openxmlformats.org/officeDocument/2006/math">
-                    <m:oMathParaPr>
-                      <m:jc m:val="centerGroup"/>
-                    </m:oMathParaPr>
-                    <m:oMath xmlns:m="http://schemas.openxmlformats.org/officeDocument/2006/math">
+                    <m:oMath>
                       <m:r>
                         <a:rPr lang="fr-FR" sz="1276" b="1" i="1">
                           <a:latin typeface="Cambria Math" panose="02040503050406030204" pitchFamily="18" charset="0"/>
@@ -6392,13 +4431,14 @@
           <a:lstStyle/>
           <a:p>
             <a:r>
-              <a:rPr lang="fr-FR" sz="1276" b="1" dirty="0"/>
+              <a:rPr lang="fr-FR" sz="1276" b="1"/>
               <a:t>i</a:t>
             </a:r>
             <a:r>
-              <a:rPr lang="fr-FR" sz="1276" b="1" baseline="-25000" dirty="0"/>
-              <a:t>3</a:t>
-            </a:r>
+              <a:rPr lang="fr-FR" sz="1276" b="1" baseline="-25000"/>
+              <a:t>2</a:t>
+            </a:r>
+            <a:endParaRPr lang="fr-FR" sz="1276" b="1" baseline="-25000" dirty="0"/>
           </a:p>
         </p:txBody>
       </p:sp>
@@ -6711,10 +4751,3798 @@
                 <a:pPr/>
                 <a14:m>
                   <m:oMathPara xmlns:m="http://schemas.openxmlformats.org/officeDocument/2006/math">
-                    <m:oMathParaPr>
-                      <m:jc m:val="centerGroup"/>
-                    </m:oMathParaPr>
-                    <m:oMath xmlns:m="http://schemas.openxmlformats.org/officeDocument/2006/math">
+                    <m:oMath>
+                      <m:r>
+                        <a:rPr lang="el-GR" sz="1276" b="1" i="1" smtClean="0">
+                          <a:solidFill>
+                            <a:srgbClr val="FF0000"/>
+                          </a:solidFill>
+                          <a:latin typeface="Cambria Math" panose="02040503050406030204" pitchFamily="18" charset="0"/>
+                        </a:rPr>
+                        <m:t>𝜶</m:t>
+                      </m:r>
+                      <m:r>
+                        <a:rPr lang="fr-FR" sz="1276" b="1" i="1">
+                          <a:solidFill>
+                            <a:srgbClr val="FF0000"/>
+                          </a:solidFill>
+                          <a:latin typeface="Cambria Math" panose="02040503050406030204" pitchFamily="18" charset="0"/>
+                        </a:rPr>
+                        <m:t>𝑻</m:t>
+                      </m:r>
+                    </m:oMath>
+                  </m:oMathPara>
+                </a14:m>
+                <a:endParaRPr lang="fr-FR" sz="1276" b="1" dirty="0">
+                  <a:solidFill>
+                    <a:srgbClr val="FF0000"/>
+                  </a:solidFill>
+                </a:endParaRPr>
+              </a:p>
+            </p:txBody>
+          </p:sp>
+        </mc:Choice>
+        <mc:Fallback xmlns="">
+          <p:sp>
+            <p:nvSpPr>
+              <p:cNvPr id="95" name="ZoneTexte 94"/>
+              <p:cNvSpPr txBox="1">
+                <a:spLocks noRot="1" noChangeAspect="1" noMove="1" noResize="1" noEditPoints="1" noAdjustHandles="1" noChangeArrowheads="1" noChangeShapeType="1" noTextEdit="1"/>
+              </p:cNvSpPr>
+              <p:nvPr/>
+            </p:nvSpPr>
+            <p:spPr>
+              <a:xfrm>
+                <a:off x="3844026" y="1487350"/>
+                <a:ext cx="434734" cy="288669"/>
+              </a:xfrm>
+              <a:prstGeom prst="rect">
+                <a:avLst/>
+              </a:prstGeom>
+              <a:blipFill>
+                <a:blip r:embed="rId6"/>
+                <a:stretch>
+                  <a:fillRect/>
+                </a:stretch>
+              </a:blipFill>
+            </p:spPr>
+            <p:txBody>
+              <a:bodyPr/>
+              <a:lstStyle/>
+              <a:p>
+                <a:r>
+                  <a:rPr lang="fr-FR">
+                    <a:noFill/>
+                  </a:rPr>
+                  <a:t> </a:t>
+                </a:r>
+              </a:p>
+            </p:txBody>
+          </p:sp>
+        </mc:Fallback>
+      </mc:AlternateContent>
+      <p:cxnSp>
+        <p:nvCxnSpPr>
+          <p:cNvPr id="176" name="Connecteur droit 175"/>
+          <p:cNvCxnSpPr/>
+          <p:nvPr/>
+        </p:nvCxnSpPr>
+        <p:spPr>
+          <a:xfrm flipV="1">
+            <a:off x="5674778" y="1009009"/>
+            <a:ext cx="0" cy="422405"/>
+          </a:xfrm>
+          <a:prstGeom prst="line">
+            <a:avLst/>
+          </a:prstGeom>
+          <a:ln w="38100">
+            <a:solidFill>
+              <a:srgbClr val="FF0000"/>
+            </a:solidFill>
+          </a:ln>
+        </p:spPr>
+        <p:style>
+          <a:lnRef idx="1">
+            <a:schemeClr val="accent1"/>
+          </a:lnRef>
+          <a:fillRef idx="0">
+            <a:schemeClr val="accent1"/>
+          </a:fillRef>
+          <a:effectRef idx="0">
+            <a:schemeClr val="accent1"/>
+          </a:effectRef>
+          <a:fontRef idx="minor">
+            <a:schemeClr val="tx1"/>
+          </a:fontRef>
+        </p:style>
+      </p:cxnSp>
+      <p:cxnSp>
+        <p:nvCxnSpPr>
+          <p:cNvPr id="177" name="Connecteur droit 176"/>
+          <p:cNvCxnSpPr/>
+          <p:nvPr/>
+        </p:nvCxnSpPr>
+        <p:spPr>
+          <a:xfrm flipV="1">
+            <a:off x="6096441" y="1009008"/>
+            <a:ext cx="0" cy="422405"/>
+          </a:xfrm>
+          <a:prstGeom prst="line">
+            <a:avLst/>
+          </a:prstGeom>
+          <a:ln w="38100">
+            <a:solidFill>
+              <a:srgbClr val="FF0000"/>
+            </a:solidFill>
+          </a:ln>
+        </p:spPr>
+        <p:style>
+          <a:lnRef idx="1">
+            <a:schemeClr val="accent1"/>
+          </a:lnRef>
+          <a:fillRef idx="0">
+            <a:schemeClr val="accent1"/>
+          </a:fillRef>
+          <a:effectRef idx="0">
+            <a:schemeClr val="accent1"/>
+          </a:effectRef>
+          <a:fontRef idx="minor">
+            <a:schemeClr val="tx1"/>
+          </a:fontRef>
+        </p:style>
+      </p:cxnSp>
+      <p:cxnSp>
+        <p:nvCxnSpPr>
+          <p:cNvPr id="178" name="Connecteur droit 177"/>
+          <p:cNvCxnSpPr/>
+          <p:nvPr/>
+        </p:nvCxnSpPr>
+        <p:spPr>
+          <a:xfrm>
+            <a:off x="5659385" y="1025629"/>
+            <a:ext cx="437056" cy="0"/>
+          </a:xfrm>
+          <a:prstGeom prst="line">
+            <a:avLst/>
+          </a:prstGeom>
+          <a:ln w="38100">
+            <a:solidFill>
+              <a:srgbClr val="FF0000"/>
+            </a:solidFill>
+          </a:ln>
+        </p:spPr>
+        <p:style>
+          <a:lnRef idx="1">
+            <a:schemeClr val="accent1"/>
+          </a:lnRef>
+          <a:fillRef idx="0">
+            <a:schemeClr val="accent1"/>
+          </a:fillRef>
+          <a:effectRef idx="0">
+            <a:schemeClr val="accent1"/>
+          </a:effectRef>
+          <a:fontRef idx="minor">
+            <a:schemeClr val="tx1"/>
+          </a:fontRef>
+        </p:style>
+      </p:cxnSp>
+    </p:spTree>
+    <p:extLst>
+      <p:ext uri="{BB962C8B-B14F-4D97-AF65-F5344CB8AC3E}">
+        <p14:creationId xmlns:p14="http://schemas.microsoft.com/office/powerpoint/2010/main" val="2044163002"/>
+      </p:ext>
+    </p:extLst>
+  </p:cSld>
+  <p:clrMapOvr>
+    <a:masterClrMapping/>
+  </p:clrMapOvr>
+</p:sld>
+</file>
+
+<file path=ppt/slides/slide11.xml><?xml version="1.0" encoding="utf-8"?>
+<p:sld xmlns:a="http://schemas.openxmlformats.org/drawingml/2006/main" xmlns:r="http://schemas.openxmlformats.org/officeDocument/2006/relationships" xmlns:p="http://schemas.openxmlformats.org/presentationml/2006/main">
+  <p:cSld>
+    <p:spTree>
+      <p:nvGrpSpPr>
+        <p:cNvPr id="1" name=""/>
+        <p:cNvGrpSpPr/>
+        <p:nvPr/>
+      </p:nvGrpSpPr>
+      <p:grpSpPr>
+        <a:xfrm>
+          <a:off x="0" y="0"/>
+          <a:ext cx="0" cy="0"/>
+          <a:chOff x="0" y="0"/>
+          <a:chExt cx="0" cy="0"/>
+        </a:xfrm>
+      </p:grpSpPr>
+      <p:pic>
+        <p:nvPicPr>
+          <p:cNvPr id="4" name="Image 3"/>
+          <p:cNvPicPr>
+            <a:picLocks noChangeAspect="1"/>
+          </p:cNvPicPr>
+          <p:nvPr/>
+        </p:nvPicPr>
+        <p:blipFill>
+          <a:blip r:embed="rId2"/>
+          <a:stretch>
+            <a:fillRect/>
+          </a:stretch>
+        </p:blipFill>
+        <p:spPr>
+          <a:xfrm>
+            <a:off x="551676" y="771154"/>
+            <a:ext cx="11088647" cy="5315692"/>
+          </a:xfrm>
+          <a:prstGeom prst="rect">
+            <a:avLst/>
+          </a:prstGeom>
+        </p:spPr>
+      </p:pic>
+      <p:cxnSp>
+        <p:nvCxnSpPr>
+          <p:cNvPr id="6" name="Connecteur droit avec flèche 5"/>
+          <p:cNvCxnSpPr/>
+          <p:nvPr/>
+        </p:nvCxnSpPr>
+        <p:spPr>
+          <a:xfrm>
+            <a:off x="6311900" y="1949450"/>
+            <a:ext cx="104775" cy="0"/>
+          </a:xfrm>
+          <a:prstGeom prst="straightConnector1">
+            <a:avLst/>
+          </a:prstGeom>
+          <a:ln w="57150">
+            <a:solidFill>
+              <a:schemeClr val="tx1"/>
+            </a:solidFill>
+            <a:tailEnd type="triangle"/>
+          </a:ln>
+        </p:spPr>
+        <p:style>
+          <a:lnRef idx="1">
+            <a:schemeClr val="accent1"/>
+          </a:lnRef>
+          <a:fillRef idx="0">
+            <a:schemeClr val="accent1"/>
+          </a:fillRef>
+          <a:effectRef idx="0">
+            <a:schemeClr val="accent1"/>
+          </a:effectRef>
+          <a:fontRef idx="minor">
+            <a:schemeClr val="tx1"/>
+          </a:fontRef>
+        </p:style>
+      </p:cxnSp>
+      <p:sp>
+        <p:nvSpPr>
+          <p:cNvPr id="10" name="ZoneTexte 9"/>
+          <p:cNvSpPr txBox="1"/>
+          <p:nvPr/>
+        </p:nvSpPr>
+        <p:spPr>
+          <a:xfrm>
+            <a:off x="6182186" y="1487785"/>
+            <a:ext cx="330540" cy="400110"/>
+          </a:xfrm>
+          <a:prstGeom prst="rect">
+            <a:avLst/>
+          </a:prstGeom>
+          <a:noFill/>
+        </p:spPr>
+        <p:txBody>
+          <a:bodyPr wrap="none" rtlCol="0">
+            <a:spAutoFit/>
+          </a:bodyPr>
+          <a:lstStyle/>
+          <a:p>
+            <a:r>
+              <a:rPr lang="fr-FR" sz="2000" b="1" dirty="0"/>
+              <a:t>i</a:t>
+            </a:r>
+            <a:r>
+              <a:rPr lang="fr-FR" sz="2000" b="1" baseline="-25000" dirty="0"/>
+              <a:t>2</a:t>
+            </a:r>
+          </a:p>
+        </p:txBody>
+      </p:sp>
+      <p:sp>
+        <p:nvSpPr>
+          <p:cNvPr id="11" name="Ellipse 10"/>
+          <p:cNvSpPr/>
+          <p:nvPr/>
+        </p:nvSpPr>
+        <p:spPr>
+          <a:xfrm>
+            <a:off x="6095999" y="4104409"/>
+            <a:ext cx="215901" cy="207818"/>
+          </a:xfrm>
+          <a:prstGeom prst="ellipse">
+            <a:avLst/>
+          </a:prstGeom>
+          <a:solidFill>
+            <a:schemeClr val="tx1"/>
+          </a:solidFill>
+          <a:ln>
+            <a:noFill/>
+          </a:ln>
+        </p:spPr>
+        <p:style>
+          <a:lnRef idx="2">
+            <a:schemeClr val="accent1">
+              <a:shade val="50000"/>
+            </a:schemeClr>
+          </a:lnRef>
+          <a:fillRef idx="1">
+            <a:schemeClr val="accent1"/>
+          </a:fillRef>
+          <a:effectRef idx="0">
+            <a:schemeClr val="accent1"/>
+          </a:effectRef>
+          <a:fontRef idx="minor">
+            <a:schemeClr val="lt1"/>
+          </a:fontRef>
+        </p:style>
+        <p:txBody>
+          <a:bodyPr rtlCol="0" anchor="ctr"/>
+          <a:lstStyle/>
+          <a:p>
+            <a:pPr algn="ctr"/>
+            <a:endParaRPr lang="fr-FR"/>
+          </a:p>
+        </p:txBody>
+      </p:sp>
+      <p:sp>
+        <p:nvSpPr>
+          <p:cNvPr id="12" name="Ellipse 11"/>
+          <p:cNvSpPr/>
+          <p:nvPr/>
+        </p:nvSpPr>
+        <p:spPr>
+          <a:xfrm>
+            <a:off x="3721099" y="4637809"/>
+            <a:ext cx="215901" cy="207818"/>
+          </a:xfrm>
+          <a:prstGeom prst="ellipse">
+            <a:avLst/>
+          </a:prstGeom>
+          <a:solidFill>
+            <a:schemeClr val="tx1"/>
+          </a:solidFill>
+          <a:ln>
+            <a:noFill/>
+          </a:ln>
+        </p:spPr>
+        <p:style>
+          <a:lnRef idx="2">
+            <a:schemeClr val="accent1">
+              <a:shade val="50000"/>
+            </a:schemeClr>
+          </a:lnRef>
+          <a:fillRef idx="1">
+            <a:schemeClr val="accent1"/>
+          </a:fillRef>
+          <a:effectRef idx="0">
+            <a:schemeClr val="accent1"/>
+          </a:effectRef>
+          <a:fontRef idx="minor">
+            <a:schemeClr val="lt1"/>
+          </a:fontRef>
+        </p:style>
+        <p:txBody>
+          <a:bodyPr rtlCol="0" anchor="ctr"/>
+          <a:lstStyle/>
+          <a:p>
+            <a:pPr algn="ctr"/>
+            <a:endParaRPr lang="fr-FR"/>
+          </a:p>
+        </p:txBody>
+      </p:sp>
+      <p:sp>
+        <p:nvSpPr>
+          <p:cNvPr id="13" name="Ellipse 12"/>
+          <p:cNvSpPr/>
+          <p:nvPr/>
+        </p:nvSpPr>
+        <p:spPr>
+          <a:xfrm>
+            <a:off x="4267199" y="4000500"/>
+            <a:ext cx="215901" cy="207818"/>
+          </a:xfrm>
+          <a:prstGeom prst="ellipse">
+            <a:avLst/>
+          </a:prstGeom>
+          <a:solidFill>
+            <a:schemeClr val="tx1"/>
+          </a:solidFill>
+          <a:ln>
+            <a:noFill/>
+          </a:ln>
+        </p:spPr>
+        <p:style>
+          <a:lnRef idx="2">
+            <a:schemeClr val="accent1">
+              <a:shade val="50000"/>
+            </a:schemeClr>
+          </a:lnRef>
+          <a:fillRef idx="1">
+            <a:schemeClr val="accent1"/>
+          </a:fillRef>
+          <a:effectRef idx="0">
+            <a:schemeClr val="accent1"/>
+          </a:effectRef>
+          <a:fontRef idx="minor">
+            <a:schemeClr val="lt1"/>
+          </a:fontRef>
+        </p:style>
+        <p:txBody>
+          <a:bodyPr rtlCol="0" anchor="ctr"/>
+          <a:lstStyle/>
+          <a:p>
+            <a:pPr algn="ctr"/>
+            <a:endParaRPr lang="fr-FR"/>
+          </a:p>
+        </p:txBody>
+      </p:sp>
+      <p:sp>
+        <p:nvSpPr>
+          <p:cNvPr id="14" name="Ellipse 13"/>
+          <p:cNvSpPr/>
+          <p:nvPr/>
+        </p:nvSpPr>
+        <p:spPr>
+          <a:xfrm>
+            <a:off x="4267199" y="1914154"/>
+            <a:ext cx="215901" cy="207818"/>
+          </a:xfrm>
+          <a:prstGeom prst="ellipse">
+            <a:avLst/>
+          </a:prstGeom>
+          <a:solidFill>
+            <a:schemeClr val="tx1"/>
+          </a:solidFill>
+          <a:ln>
+            <a:noFill/>
+          </a:ln>
+        </p:spPr>
+        <p:style>
+          <a:lnRef idx="2">
+            <a:schemeClr val="accent1">
+              <a:shade val="50000"/>
+            </a:schemeClr>
+          </a:lnRef>
+          <a:fillRef idx="1">
+            <a:schemeClr val="accent1"/>
+          </a:fillRef>
+          <a:effectRef idx="0">
+            <a:schemeClr val="accent1"/>
+          </a:effectRef>
+          <a:fontRef idx="minor">
+            <a:schemeClr val="lt1"/>
+          </a:fontRef>
+        </p:style>
+        <p:txBody>
+          <a:bodyPr rtlCol="0" anchor="ctr"/>
+          <a:lstStyle/>
+          <a:p>
+            <a:pPr algn="ctr"/>
+            <a:endParaRPr lang="fr-FR"/>
+          </a:p>
+        </p:txBody>
+      </p:sp>
+      <p:sp>
+        <p:nvSpPr>
+          <p:cNvPr id="15" name="Ellipse 14"/>
+          <p:cNvSpPr/>
+          <p:nvPr/>
+        </p:nvSpPr>
+        <p:spPr>
+          <a:xfrm>
+            <a:off x="6720503" y="1844881"/>
+            <a:ext cx="215901" cy="207818"/>
+          </a:xfrm>
+          <a:prstGeom prst="ellipse">
+            <a:avLst/>
+          </a:prstGeom>
+          <a:solidFill>
+            <a:schemeClr val="tx1"/>
+          </a:solidFill>
+          <a:ln>
+            <a:noFill/>
+          </a:ln>
+        </p:spPr>
+        <p:style>
+          <a:lnRef idx="2">
+            <a:schemeClr val="accent1">
+              <a:shade val="50000"/>
+            </a:schemeClr>
+          </a:lnRef>
+          <a:fillRef idx="1">
+            <a:schemeClr val="accent1"/>
+          </a:fillRef>
+          <a:effectRef idx="0">
+            <a:schemeClr val="accent1"/>
+          </a:effectRef>
+          <a:fontRef idx="minor">
+            <a:schemeClr val="lt1"/>
+          </a:fontRef>
+        </p:style>
+        <p:txBody>
+          <a:bodyPr rtlCol="0" anchor="ctr"/>
+          <a:lstStyle/>
+          <a:p>
+            <a:pPr algn="ctr"/>
+            <a:endParaRPr lang="fr-FR"/>
+          </a:p>
+        </p:txBody>
+      </p:sp>
+      <p:sp>
+        <p:nvSpPr>
+          <p:cNvPr id="17" name="Rectangle 16"/>
+          <p:cNvSpPr/>
+          <p:nvPr/>
+        </p:nvSpPr>
+        <p:spPr>
+          <a:xfrm>
+            <a:off x="10414000" y="5130800"/>
+            <a:ext cx="990600" cy="457200"/>
+          </a:xfrm>
+          <a:prstGeom prst="rect">
+            <a:avLst/>
+          </a:prstGeom>
+          <a:solidFill>
+            <a:schemeClr val="bg1"/>
+          </a:solidFill>
+          <a:ln>
+            <a:noFill/>
+          </a:ln>
+        </p:spPr>
+        <p:style>
+          <a:lnRef idx="2">
+            <a:schemeClr val="accent1">
+              <a:shade val="50000"/>
+            </a:schemeClr>
+          </a:lnRef>
+          <a:fillRef idx="1">
+            <a:schemeClr val="accent1"/>
+          </a:fillRef>
+          <a:effectRef idx="0">
+            <a:schemeClr val="accent1"/>
+          </a:effectRef>
+          <a:fontRef idx="minor">
+            <a:schemeClr val="lt1"/>
+          </a:fontRef>
+        </p:style>
+        <p:txBody>
+          <a:bodyPr rtlCol="0" anchor="ctr"/>
+          <a:lstStyle/>
+          <a:p>
+            <a:pPr algn="ctr"/>
+            <a:endParaRPr lang="fr-FR"/>
+          </a:p>
+        </p:txBody>
+      </p:sp>
+      <p:sp>
+        <p:nvSpPr>
+          <p:cNvPr id="18" name="Ellipse 17"/>
+          <p:cNvSpPr/>
+          <p:nvPr/>
+        </p:nvSpPr>
+        <p:spPr>
+          <a:xfrm>
+            <a:off x="4261427" y="5605317"/>
+            <a:ext cx="215901" cy="207818"/>
+          </a:xfrm>
+          <a:prstGeom prst="ellipse">
+            <a:avLst/>
+          </a:prstGeom>
+          <a:solidFill>
+            <a:schemeClr val="tx1"/>
+          </a:solidFill>
+          <a:ln>
+            <a:noFill/>
+          </a:ln>
+        </p:spPr>
+        <p:style>
+          <a:lnRef idx="2">
+            <a:schemeClr val="accent1">
+              <a:shade val="50000"/>
+            </a:schemeClr>
+          </a:lnRef>
+          <a:fillRef idx="1">
+            <a:schemeClr val="accent1"/>
+          </a:fillRef>
+          <a:effectRef idx="0">
+            <a:schemeClr val="accent1"/>
+          </a:effectRef>
+          <a:fontRef idx="minor">
+            <a:schemeClr val="lt1"/>
+          </a:fontRef>
+        </p:style>
+        <p:txBody>
+          <a:bodyPr rtlCol="0" anchor="ctr"/>
+          <a:lstStyle/>
+          <a:p>
+            <a:pPr algn="ctr"/>
+            <a:endParaRPr lang="fr-FR"/>
+          </a:p>
+        </p:txBody>
+      </p:sp>
+      <p:sp>
+        <p:nvSpPr>
+          <p:cNvPr id="19" name="Rectangle 18"/>
+          <p:cNvSpPr/>
+          <p:nvPr/>
+        </p:nvSpPr>
+        <p:spPr>
+          <a:xfrm>
+            <a:off x="2322946" y="2168154"/>
+            <a:ext cx="392545" cy="951346"/>
+          </a:xfrm>
+          <a:prstGeom prst="rect">
+            <a:avLst/>
+          </a:prstGeom>
+          <a:solidFill>
+            <a:schemeClr val="bg1"/>
+          </a:solidFill>
+          <a:ln>
+            <a:noFill/>
+          </a:ln>
+        </p:spPr>
+        <p:style>
+          <a:lnRef idx="2">
+            <a:schemeClr val="accent1">
+              <a:shade val="50000"/>
+            </a:schemeClr>
+          </a:lnRef>
+          <a:fillRef idx="1">
+            <a:schemeClr val="accent1"/>
+          </a:fillRef>
+          <a:effectRef idx="0">
+            <a:schemeClr val="accent1"/>
+          </a:effectRef>
+          <a:fontRef idx="minor">
+            <a:schemeClr val="lt1"/>
+          </a:fontRef>
+        </p:style>
+        <p:txBody>
+          <a:bodyPr rtlCol="0" anchor="ctr"/>
+          <a:lstStyle/>
+          <a:p>
+            <a:pPr algn="ctr"/>
+            <a:endParaRPr lang="fr-FR"/>
+          </a:p>
+        </p:txBody>
+      </p:sp>
+      <p:sp>
+        <p:nvSpPr>
+          <p:cNvPr id="3" name="ZoneTexte 2"/>
+          <p:cNvSpPr txBox="1"/>
+          <p:nvPr/>
+        </p:nvSpPr>
+        <p:spPr>
+          <a:xfrm>
+            <a:off x="2950443" y="2044535"/>
+            <a:ext cx="700833" cy="400110"/>
+          </a:xfrm>
+          <a:prstGeom prst="rect">
+            <a:avLst/>
+          </a:prstGeom>
+          <a:noFill/>
+        </p:spPr>
+        <p:txBody>
+          <a:bodyPr wrap="none" rtlCol="0">
+            <a:spAutoFit/>
+          </a:bodyPr>
+          <a:lstStyle/>
+          <a:p>
+            <a:r>
+              <a:rPr lang="fr-FR" sz="2000" b="1" dirty="0"/>
+              <a:t>n</a:t>
+            </a:r>
+            <a:r>
+              <a:rPr lang="el-GR" sz="2000" b="1" baseline="-25000" dirty="0"/>
+              <a:t>φ</a:t>
+            </a:r>
+            <a:r>
+              <a:rPr lang="fr-FR" sz="2000" b="1" dirty="0"/>
+              <a:t>=1</a:t>
+            </a:r>
+          </a:p>
+        </p:txBody>
+      </p:sp>
+      <p:cxnSp>
+        <p:nvCxnSpPr>
+          <p:cNvPr id="7" name="Connecteur droit avec flèche 6"/>
+          <p:cNvCxnSpPr/>
+          <p:nvPr/>
+        </p:nvCxnSpPr>
+        <p:spPr>
+          <a:xfrm flipV="1">
+            <a:off x="2715491" y="2168154"/>
+            <a:ext cx="0" cy="1517155"/>
+          </a:xfrm>
+          <a:prstGeom prst="straightConnector1">
+            <a:avLst/>
+          </a:prstGeom>
+          <a:ln w="28575">
+            <a:solidFill>
+              <a:schemeClr val="tx1"/>
+            </a:solidFill>
+            <a:headEnd type="none" w="med" len="med"/>
+            <a:tailEnd type="arrow" w="med" len="med"/>
+          </a:ln>
+        </p:spPr>
+        <p:style>
+          <a:lnRef idx="1">
+            <a:schemeClr val="accent1"/>
+          </a:lnRef>
+          <a:fillRef idx="0">
+            <a:schemeClr val="accent1"/>
+          </a:fillRef>
+          <a:effectRef idx="0">
+            <a:schemeClr val="accent1"/>
+          </a:effectRef>
+          <a:fontRef idx="minor">
+            <a:schemeClr val="tx1"/>
+          </a:fontRef>
+        </p:style>
+      </p:cxnSp>
+      <p:sp>
+        <p:nvSpPr>
+          <p:cNvPr id="8" name="ZoneTexte 7"/>
+          <p:cNvSpPr txBox="1"/>
+          <p:nvPr/>
+        </p:nvSpPr>
+        <p:spPr>
+          <a:xfrm>
+            <a:off x="2127607" y="2274495"/>
+            <a:ext cx="653256" cy="400110"/>
+          </a:xfrm>
+          <a:prstGeom prst="rect">
+            <a:avLst/>
+          </a:prstGeom>
+          <a:noFill/>
+        </p:spPr>
+        <p:txBody>
+          <a:bodyPr wrap="none" rtlCol="0">
+            <a:spAutoFit/>
+          </a:bodyPr>
+          <a:lstStyle/>
+          <a:p>
+            <a:r>
+              <a:rPr lang="fr-FR" sz="2000" b="1" dirty="0"/>
+              <a:t>v</a:t>
+            </a:r>
+            <a:r>
+              <a:rPr lang="fr-FR" sz="2000" b="1" baseline="-25000" dirty="0"/>
+              <a:t>spire</a:t>
+            </a:r>
+          </a:p>
+        </p:txBody>
+      </p:sp>
+      <p:sp>
+        <p:nvSpPr>
+          <p:cNvPr id="20" name="Rectangle 19"/>
+          <p:cNvSpPr/>
+          <p:nvPr/>
+        </p:nvSpPr>
+        <p:spPr>
+          <a:xfrm>
+            <a:off x="1761754" y="2672657"/>
+            <a:ext cx="392545" cy="338200"/>
+          </a:xfrm>
+          <a:prstGeom prst="rect">
+            <a:avLst/>
+          </a:prstGeom>
+          <a:solidFill>
+            <a:schemeClr val="bg1"/>
+          </a:solidFill>
+          <a:ln>
+            <a:noFill/>
+          </a:ln>
+        </p:spPr>
+        <p:style>
+          <a:lnRef idx="2">
+            <a:schemeClr val="accent1">
+              <a:shade val="50000"/>
+            </a:schemeClr>
+          </a:lnRef>
+          <a:fillRef idx="1">
+            <a:schemeClr val="accent1"/>
+          </a:fillRef>
+          <a:effectRef idx="0">
+            <a:schemeClr val="accent1"/>
+          </a:effectRef>
+          <a:fontRef idx="minor">
+            <a:schemeClr val="lt1"/>
+          </a:fontRef>
+        </p:style>
+        <p:txBody>
+          <a:bodyPr rtlCol="0" anchor="ctr"/>
+          <a:lstStyle/>
+          <a:p>
+            <a:pPr algn="ctr"/>
+            <a:endParaRPr lang="fr-FR"/>
+          </a:p>
+        </p:txBody>
+      </p:sp>
+      <p:sp>
+        <p:nvSpPr>
+          <p:cNvPr id="9" name="Rectangle 8"/>
+          <p:cNvSpPr/>
+          <p:nvPr/>
+        </p:nvSpPr>
+        <p:spPr>
+          <a:xfrm>
+            <a:off x="1907448" y="3620777"/>
+            <a:ext cx="574324" cy="400110"/>
+          </a:xfrm>
+          <a:prstGeom prst="rect">
+            <a:avLst/>
+          </a:prstGeom>
+        </p:spPr>
+        <p:txBody>
+          <a:bodyPr wrap="none">
+            <a:spAutoFit/>
+          </a:bodyPr>
+          <a:lstStyle/>
+          <a:p>
+            <a:r>
+              <a:rPr lang="fr-FR" sz="2000" b="1" dirty="0"/>
+              <a:t>v</a:t>
+            </a:r>
+            <a:r>
+              <a:rPr lang="fr-FR" sz="2000" b="1" baseline="-25000" dirty="0"/>
+              <a:t>flux</a:t>
+            </a:r>
+            <a:endParaRPr lang="fr-FR" sz="2000" dirty="0"/>
+          </a:p>
+        </p:txBody>
+      </p:sp>
+      <p:sp>
+        <p:nvSpPr>
+          <p:cNvPr id="21" name="Rectangle 20"/>
+          <p:cNvSpPr/>
+          <p:nvPr/>
+        </p:nvSpPr>
+        <p:spPr>
+          <a:xfrm>
+            <a:off x="3455003" y="1610590"/>
+            <a:ext cx="392545" cy="338200"/>
+          </a:xfrm>
+          <a:prstGeom prst="rect">
+            <a:avLst/>
+          </a:prstGeom>
+          <a:solidFill>
+            <a:schemeClr val="bg1"/>
+          </a:solidFill>
+          <a:ln>
+            <a:noFill/>
+          </a:ln>
+        </p:spPr>
+        <p:style>
+          <a:lnRef idx="2">
+            <a:schemeClr val="accent1">
+              <a:shade val="50000"/>
+            </a:schemeClr>
+          </a:lnRef>
+          <a:fillRef idx="1">
+            <a:schemeClr val="accent1"/>
+          </a:fillRef>
+          <a:effectRef idx="0">
+            <a:schemeClr val="accent1"/>
+          </a:effectRef>
+          <a:fontRef idx="minor">
+            <a:schemeClr val="lt1"/>
+          </a:fontRef>
+        </p:style>
+        <p:txBody>
+          <a:bodyPr rtlCol="0" anchor="ctr"/>
+          <a:lstStyle/>
+          <a:p>
+            <a:pPr algn="ctr"/>
+            <a:endParaRPr lang="fr-FR"/>
+          </a:p>
+        </p:txBody>
+      </p:sp>
+      <p:sp>
+        <p:nvSpPr>
+          <p:cNvPr id="22" name="Rectangle 21"/>
+          <p:cNvSpPr/>
+          <p:nvPr/>
+        </p:nvSpPr>
+        <p:spPr>
+          <a:xfrm>
+            <a:off x="3721099" y="2742065"/>
+            <a:ext cx="393056" cy="400110"/>
+          </a:xfrm>
+          <a:prstGeom prst="rect">
+            <a:avLst/>
+          </a:prstGeom>
+        </p:spPr>
+        <p:txBody>
+          <a:bodyPr wrap="none">
+            <a:spAutoFit/>
+          </a:bodyPr>
+          <a:lstStyle/>
+          <a:p>
+            <a:r>
+              <a:rPr lang="fr-FR" sz="2000" b="1" dirty="0"/>
+              <a:t>v</a:t>
+            </a:r>
+            <a:r>
+              <a:rPr lang="fr-FR" sz="2000" b="1" baseline="-25000" dirty="0"/>
+              <a:t>1</a:t>
+            </a:r>
+            <a:endParaRPr lang="fr-FR" sz="2000" baseline="-25000" dirty="0"/>
+          </a:p>
+        </p:txBody>
+      </p:sp>
+      <p:sp>
+        <p:nvSpPr>
+          <p:cNvPr id="23" name="Rectangle 22"/>
+          <p:cNvSpPr/>
+          <p:nvPr/>
+        </p:nvSpPr>
+        <p:spPr>
+          <a:xfrm>
+            <a:off x="5750385" y="2726676"/>
+            <a:ext cx="393056" cy="400110"/>
+          </a:xfrm>
+          <a:prstGeom prst="rect">
+            <a:avLst/>
+          </a:prstGeom>
+        </p:spPr>
+        <p:txBody>
+          <a:bodyPr wrap="none">
+            <a:spAutoFit/>
+          </a:bodyPr>
+          <a:lstStyle/>
+          <a:p>
+            <a:r>
+              <a:rPr lang="fr-FR" sz="2000" b="1" dirty="0"/>
+              <a:t>v</a:t>
+            </a:r>
+            <a:r>
+              <a:rPr lang="fr-FR" sz="2000" b="1" baseline="-25000" dirty="0"/>
+              <a:t>2</a:t>
+            </a:r>
+            <a:endParaRPr lang="fr-FR" sz="2000" baseline="-25000" dirty="0"/>
+          </a:p>
+        </p:txBody>
+      </p:sp>
+      <p:sp>
+        <p:nvSpPr>
+          <p:cNvPr id="24" name="Rectangle 23"/>
+          <p:cNvSpPr/>
+          <p:nvPr/>
+        </p:nvSpPr>
+        <p:spPr>
+          <a:xfrm>
+            <a:off x="5543024" y="1594344"/>
+            <a:ext cx="392545" cy="338200"/>
+          </a:xfrm>
+          <a:prstGeom prst="rect">
+            <a:avLst/>
+          </a:prstGeom>
+          <a:solidFill>
+            <a:schemeClr val="bg1"/>
+          </a:solidFill>
+          <a:ln>
+            <a:noFill/>
+          </a:ln>
+        </p:spPr>
+        <p:style>
+          <a:lnRef idx="2">
+            <a:schemeClr val="accent1">
+              <a:shade val="50000"/>
+            </a:schemeClr>
+          </a:lnRef>
+          <a:fillRef idx="1">
+            <a:schemeClr val="accent1"/>
+          </a:fillRef>
+          <a:effectRef idx="0">
+            <a:schemeClr val="accent1"/>
+          </a:effectRef>
+          <a:fontRef idx="minor">
+            <a:schemeClr val="lt1"/>
+          </a:fontRef>
+        </p:style>
+        <p:txBody>
+          <a:bodyPr rtlCol="0" anchor="ctr"/>
+          <a:lstStyle/>
+          <a:p>
+            <a:pPr algn="ctr"/>
+            <a:endParaRPr lang="fr-FR"/>
+          </a:p>
+        </p:txBody>
+      </p:sp>
+      <p:cxnSp>
+        <p:nvCxnSpPr>
+          <p:cNvPr id="25" name="Connecteur droit avec flèche 24"/>
+          <p:cNvCxnSpPr/>
+          <p:nvPr/>
+        </p:nvCxnSpPr>
+        <p:spPr>
+          <a:xfrm>
+            <a:off x="4391024" y="1266824"/>
+            <a:ext cx="0" cy="157586"/>
+          </a:xfrm>
+          <a:prstGeom prst="straightConnector1">
+            <a:avLst/>
+          </a:prstGeom>
+          <a:ln w="57150">
+            <a:solidFill>
+              <a:schemeClr val="tx1"/>
+            </a:solidFill>
+            <a:tailEnd type="triangle"/>
+          </a:ln>
+        </p:spPr>
+        <p:style>
+          <a:lnRef idx="1">
+            <a:schemeClr val="accent1"/>
+          </a:lnRef>
+          <a:fillRef idx="0">
+            <a:schemeClr val="accent1"/>
+          </a:fillRef>
+          <a:effectRef idx="0">
+            <a:schemeClr val="accent1"/>
+          </a:effectRef>
+          <a:fontRef idx="minor">
+            <a:schemeClr val="tx1"/>
+          </a:fontRef>
+        </p:style>
+      </p:cxnSp>
+      <p:sp>
+        <p:nvSpPr>
+          <p:cNvPr id="28" name="ZoneTexte 27"/>
+          <p:cNvSpPr txBox="1"/>
+          <p:nvPr/>
+        </p:nvSpPr>
+        <p:spPr>
+          <a:xfrm>
+            <a:off x="4472372" y="1194234"/>
+            <a:ext cx="330540" cy="400110"/>
+          </a:xfrm>
+          <a:prstGeom prst="rect">
+            <a:avLst/>
+          </a:prstGeom>
+          <a:noFill/>
+        </p:spPr>
+        <p:txBody>
+          <a:bodyPr wrap="none" rtlCol="0">
+            <a:spAutoFit/>
+          </a:bodyPr>
+          <a:lstStyle/>
+          <a:p>
+            <a:r>
+              <a:rPr lang="fr-FR" sz="2000" b="1" dirty="0"/>
+              <a:t>i</a:t>
+            </a:r>
+            <a:r>
+              <a:rPr lang="fr-FR" sz="2000" b="1" baseline="-25000" dirty="0"/>
+              <a:t>1</a:t>
+            </a:r>
+          </a:p>
+        </p:txBody>
+      </p:sp>
+    </p:spTree>
+    <p:extLst>
+      <p:ext uri="{BB962C8B-B14F-4D97-AF65-F5344CB8AC3E}">
+        <p14:creationId xmlns:p14="http://schemas.microsoft.com/office/powerpoint/2010/main" val="3674708944"/>
+      </p:ext>
+    </p:extLst>
+  </p:cSld>
+  <p:clrMapOvr>
+    <a:masterClrMapping/>
+  </p:clrMapOvr>
+</p:sld>
+</file>
+
+<file path=ppt/slides/slide12.xml><?xml version="1.0" encoding="utf-8"?>
+<p:sld xmlns:a="http://schemas.openxmlformats.org/drawingml/2006/main" xmlns:r="http://schemas.openxmlformats.org/officeDocument/2006/relationships" xmlns:p="http://schemas.openxmlformats.org/presentationml/2006/main">
+  <p:cSld>
+    <p:spTree>
+      <p:nvGrpSpPr>
+        <p:cNvPr id="1" name=""/>
+        <p:cNvGrpSpPr/>
+        <p:nvPr/>
+      </p:nvGrpSpPr>
+      <p:grpSpPr>
+        <a:xfrm>
+          <a:off x="0" y="0"/>
+          <a:ext cx="0" cy="0"/>
+          <a:chOff x="0" y="0"/>
+          <a:chExt cx="0" cy="0"/>
+        </a:xfrm>
+      </p:grpSpPr>
+      <p:sp>
+        <p:nvSpPr>
+          <p:cNvPr id="2" name="Titre 1"/>
+          <p:cNvSpPr>
+            <a:spLocks noGrp="1"/>
+          </p:cNvSpPr>
+          <p:nvPr>
+            <p:ph type="ctrTitle"/>
+          </p:nvPr>
+        </p:nvSpPr>
+        <p:spPr/>
+        <p:txBody>
+          <a:bodyPr/>
+          <a:lstStyle/>
+          <a:p>
+            <a:r>
+              <a:rPr lang="fr-FR" b="1" dirty="0"/>
+              <a:t>TP </a:t>
+            </a:r>
+            <a:r>
+              <a:rPr lang="fr-FR" b="1" dirty="0" err="1"/>
+              <a:t>Forward</a:t>
+            </a:r>
+            <a:endParaRPr lang="fr-FR" b="1" dirty="0"/>
+          </a:p>
+        </p:txBody>
+      </p:sp>
+    </p:spTree>
+    <p:extLst>
+      <p:ext uri="{BB962C8B-B14F-4D97-AF65-F5344CB8AC3E}">
+        <p14:creationId xmlns:p14="http://schemas.microsoft.com/office/powerpoint/2010/main" val="3667489403"/>
+      </p:ext>
+    </p:extLst>
+  </p:cSld>
+  <p:clrMapOvr>
+    <a:masterClrMapping/>
+  </p:clrMapOvr>
+</p:sld>
+</file>
+
+<file path=ppt/slides/slide13.xml><?xml version="1.0" encoding="utf-8"?>
+<p:sld xmlns:a="http://schemas.openxmlformats.org/drawingml/2006/main" xmlns:r="http://schemas.openxmlformats.org/officeDocument/2006/relationships" xmlns:p="http://schemas.openxmlformats.org/presentationml/2006/main">
+  <p:cSld>
+    <p:spTree>
+      <p:nvGrpSpPr>
+        <p:cNvPr id="1" name=""/>
+        <p:cNvGrpSpPr/>
+        <p:nvPr/>
+      </p:nvGrpSpPr>
+      <p:grpSpPr>
+        <a:xfrm>
+          <a:off x="0" y="0"/>
+          <a:ext cx="0" cy="0"/>
+          <a:chOff x="0" y="0"/>
+          <a:chExt cx="0" cy="0"/>
+        </a:xfrm>
+      </p:grpSpPr>
+      <p:pic>
+        <p:nvPicPr>
+          <p:cNvPr id="4" name="Image 3"/>
+          <p:cNvPicPr>
+            <a:picLocks noChangeAspect="1"/>
+          </p:cNvPicPr>
+          <p:nvPr/>
+        </p:nvPicPr>
+        <p:blipFill>
+          <a:blip r:embed="rId2"/>
+          <a:stretch>
+            <a:fillRect/>
+          </a:stretch>
+        </p:blipFill>
+        <p:spPr>
+          <a:xfrm>
+            <a:off x="457018" y="891843"/>
+            <a:ext cx="11277963" cy="5074313"/>
+          </a:xfrm>
+          <a:prstGeom prst="rect">
+            <a:avLst/>
+          </a:prstGeom>
+        </p:spPr>
+      </p:pic>
+      <p:sp>
+        <p:nvSpPr>
+          <p:cNvPr id="5" name="Rectangle 4"/>
+          <p:cNvSpPr/>
+          <p:nvPr/>
+        </p:nvSpPr>
+        <p:spPr>
+          <a:xfrm>
+            <a:off x="10261600" y="5033819"/>
+            <a:ext cx="990600" cy="457200"/>
+          </a:xfrm>
+          <a:prstGeom prst="rect">
+            <a:avLst/>
+          </a:prstGeom>
+          <a:solidFill>
+            <a:schemeClr val="bg1"/>
+          </a:solidFill>
+          <a:ln>
+            <a:noFill/>
+          </a:ln>
+        </p:spPr>
+        <p:style>
+          <a:lnRef idx="2">
+            <a:schemeClr val="accent1">
+              <a:shade val="50000"/>
+            </a:schemeClr>
+          </a:lnRef>
+          <a:fillRef idx="1">
+            <a:schemeClr val="accent1"/>
+          </a:fillRef>
+          <a:effectRef idx="0">
+            <a:schemeClr val="accent1"/>
+          </a:effectRef>
+          <a:fontRef idx="minor">
+            <a:schemeClr val="lt1"/>
+          </a:fontRef>
+        </p:style>
+        <p:txBody>
+          <a:bodyPr rtlCol="0" anchor="ctr"/>
+          <a:lstStyle/>
+          <a:p>
+            <a:pPr algn="ctr"/>
+            <a:endParaRPr lang="fr-FR"/>
+          </a:p>
+        </p:txBody>
+      </p:sp>
+      <p:sp>
+        <p:nvSpPr>
+          <p:cNvPr id="6" name="Ellipse 5"/>
+          <p:cNvSpPr/>
+          <p:nvPr/>
+        </p:nvSpPr>
+        <p:spPr>
+          <a:xfrm>
+            <a:off x="3986828" y="1254331"/>
+            <a:ext cx="215901" cy="207818"/>
+          </a:xfrm>
+          <a:prstGeom prst="ellipse">
+            <a:avLst/>
+          </a:prstGeom>
+          <a:solidFill>
+            <a:schemeClr val="tx1"/>
+          </a:solidFill>
+          <a:ln>
+            <a:noFill/>
+          </a:ln>
+        </p:spPr>
+        <p:style>
+          <a:lnRef idx="2">
+            <a:schemeClr val="accent1">
+              <a:shade val="50000"/>
+            </a:schemeClr>
+          </a:lnRef>
+          <a:fillRef idx="1">
+            <a:schemeClr val="accent1"/>
+          </a:fillRef>
+          <a:effectRef idx="0">
+            <a:schemeClr val="accent1"/>
+          </a:effectRef>
+          <a:fontRef idx="minor">
+            <a:schemeClr val="lt1"/>
+          </a:fontRef>
+        </p:style>
+        <p:txBody>
+          <a:bodyPr rtlCol="0" anchor="ctr"/>
+          <a:lstStyle/>
+          <a:p>
+            <a:pPr algn="ctr"/>
+            <a:endParaRPr lang="fr-FR"/>
+          </a:p>
+        </p:txBody>
+      </p:sp>
+      <p:sp>
+        <p:nvSpPr>
+          <p:cNvPr id="7" name="Ellipse 6"/>
+          <p:cNvSpPr/>
+          <p:nvPr/>
+        </p:nvSpPr>
+        <p:spPr>
+          <a:xfrm>
+            <a:off x="5663228" y="1930606"/>
+            <a:ext cx="215901" cy="207818"/>
+          </a:xfrm>
+          <a:prstGeom prst="ellipse">
+            <a:avLst/>
+          </a:prstGeom>
+          <a:solidFill>
+            <a:schemeClr val="tx1"/>
+          </a:solidFill>
+          <a:ln>
+            <a:noFill/>
+          </a:ln>
+        </p:spPr>
+        <p:style>
+          <a:lnRef idx="2">
+            <a:schemeClr val="accent1">
+              <a:shade val="50000"/>
+            </a:schemeClr>
+          </a:lnRef>
+          <a:fillRef idx="1">
+            <a:schemeClr val="accent1"/>
+          </a:fillRef>
+          <a:effectRef idx="0">
+            <a:schemeClr val="accent1"/>
+          </a:effectRef>
+          <a:fontRef idx="minor">
+            <a:schemeClr val="lt1"/>
+          </a:fontRef>
+        </p:style>
+        <p:txBody>
+          <a:bodyPr rtlCol="0" anchor="ctr"/>
+          <a:lstStyle/>
+          <a:p>
+            <a:pPr algn="ctr"/>
+            <a:endParaRPr lang="fr-FR"/>
+          </a:p>
+        </p:txBody>
+      </p:sp>
+      <p:sp>
+        <p:nvSpPr>
+          <p:cNvPr id="8" name="Ellipse 7"/>
+          <p:cNvSpPr/>
+          <p:nvPr/>
+        </p:nvSpPr>
+        <p:spPr>
+          <a:xfrm>
+            <a:off x="5519381" y="4083256"/>
+            <a:ext cx="215901" cy="207818"/>
+          </a:xfrm>
+          <a:prstGeom prst="ellipse">
+            <a:avLst/>
+          </a:prstGeom>
+          <a:solidFill>
+            <a:schemeClr val="tx1"/>
+          </a:solidFill>
+          <a:ln>
+            <a:noFill/>
+          </a:ln>
+        </p:spPr>
+        <p:style>
+          <a:lnRef idx="2">
+            <a:schemeClr val="accent1">
+              <a:shade val="50000"/>
+            </a:schemeClr>
+          </a:lnRef>
+          <a:fillRef idx="1">
+            <a:schemeClr val="accent1"/>
+          </a:fillRef>
+          <a:effectRef idx="0">
+            <a:schemeClr val="accent1"/>
+          </a:effectRef>
+          <a:fontRef idx="minor">
+            <a:schemeClr val="lt1"/>
+          </a:fontRef>
+        </p:style>
+        <p:txBody>
+          <a:bodyPr rtlCol="0" anchor="ctr"/>
+          <a:lstStyle/>
+          <a:p>
+            <a:pPr algn="ctr"/>
+            <a:endParaRPr lang="fr-FR"/>
+          </a:p>
+        </p:txBody>
+      </p:sp>
+      <p:sp>
+        <p:nvSpPr>
+          <p:cNvPr id="9" name="Ellipse 8"/>
+          <p:cNvSpPr/>
+          <p:nvPr/>
+        </p:nvSpPr>
+        <p:spPr>
+          <a:xfrm>
+            <a:off x="8711228" y="2644981"/>
+            <a:ext cx="215901" cy="207818"/>
+          </a:xfrm>
+          <a:prstGeom prst="ellipse">
+            <a:avLst/>
+          </a:prstGeom>
+          <a:solidFill>
+            <a:schemeClr val="tx1"/>
+          </a:solidFill>
+          <a:ln>
+            <a:noFill/>
+          </a:ln>
+        </p:spPr>
+        <p:style>
+          <a:lnRef idx="2">
+            <a:schemeClr val="accent1">
+              <a:shade val="50000"/>
+            </a:schemeClr>
+          </a:lnRef>
+          <a:fillRef idx="1">
+            <a:schemeClr val="accent1"/>
+          </a:fillRef>
+          <a:effectRef idx="0">
+            <a:schemeClr val="accent1"/>
+          </a:effectRef>
+          <a:fontRef idx="minor">
+            <a:schemeClr val="lt1"/>
+          </a:fontRef>
+        </p:style>
+        <p:txBody>
+          <a:bodyPr rtlCol="0" anchor="ctr"/>
+          <a:lstStyle/>
+          <a:p>
+            <a:pPr algn="ctr"/>
+            <a:endParaRPr lang="fr-FR"/>
+          </a:p>
+        </p:txBody>
+      </p:sp>
+      <p:sp>
+        <p:nvSpPr>
+          <p:cNvPr id="10" name="Ellipse 9"/>
+          <p:cNvSpPr/>
+          <p:nvPr/>
+        </p:nvSpPr>
+        <p:spPr>
+          <a:xfrm>
+            <a:off x="3878877" y="4597606"/>
+            <a:ext cx="215901" cy="207818"/>
+          </a:xfrm>
+          <a:prstGeom prst="ellipse">
+            <a:avLst/>
+          </a:prstGeom>
+          <a:solidFill>
+            <a:schemeClr val="tx1"/>
+          </a:solidFill>
+          <a:ln>
+            <a:noFill/>
+          </a:ln>
+        </p:spPr>
+        <p:style>
+          <a:lnRef idx="2">
+            <a:schemeClr val="accent1">
+              <a:shade val="50000"/>
+            </a:schemeClr>
+          </a:lnRef>
+          <a:fillRef idx="1">
+            <a:schemeClr val="accent1"/>
+          </a:fillRef>
+          <a:effectRef idx="0">
+            <a:schemeClr val="accent1"/>
+          </a:effectRef>
+          <a:fontRef idx="minor">
+            <a:schemeClr val="lt1"/>
+          </a:fontRef>
+        </p:style>
+        <p:txBody>
+          <a:bodyPr rtlCol="0" anchor="ctr"/>
+          <a:lstStyle/>
+          <a:p>
+            <a:pPr algn="ctr"/>
+            <a:endParaRPr lang="fr-FR"/>
+          </a:p>
+        </p:txBody>
+      </p:sp>
+      <p:sp>
+        <p:nvSpPr>
+          <p:cNvPr id="11" name="Ellipse 10"/>
+          <p:cNvSpPr/>
+          <p:nvPr/>
+        </p:nvSpPr>
+        <p:spPr>
+          <a:xfrm>
+            <a:off x="4357881" y="4206421"/>
+            <a:ext cx="215901" cy="207818"/>
+          </a:xfrm>
+          <a:prstGeom prst="ellipse">
+            <a:avLst/>
+          </a:prstGeom>
+          <a:solidFill>
+            <a:schemeClr val="tx1"/>
+          </a:solidFill>
+          <a:ln>
+            <a:noFill/>
+          </a:ln>
+        </p:spPr>
+        <p:style>
+          <a:lnRef idx="2">
+            <a:schemeClr val="accent1">
+              <a:shade val="50000"/>
+            </a:schemeClr>
+          </a:lnRef>
+          <a:fillRef idx="1">
+            <a:schemeClr val="accent1"/>
+          </a:fillRef>
+          <a:effectRef idx="0">
+            <a:schemeClr val="accent1"/>
+          </a:effectRef>
+          <a:fontRef idx="minor">
+            <a:schemeClr val="lt1"/>
+          </a:fontRef>
+        </p:style>
+        <p:txBody>
+          <a:bodyPr rtlCol="0" anchor="ctr"/>
+          <a:lstStyle/>
+          <a:p>
+            <a:pPr algn="ctr"/>
+            <a:endParaRPr lang="fr-FR"/>
+          </a:p>
+        </p:txBody>
+      </p:sp>
+      <p:sp>
+        <p:nvSpPr>
+          <p:cNvPr id="12" name="Ellipse 11"/>
+          <p:cNvSpPr/>
+          <p:nvPr/>
+        </p:nvSpPr>
+        <p:spPr>
+          <a:xfrm>
+            <a:off x="3662976" y="4206421"/>
+            <a:ext cx="215901" cy="207818"/>
+          </a:xfrm>
+          <a:prstGeom prst="ellipse">
+            <a:avLst/>
+          </a:prstGeom>
+          <a:solidFill>
+            <a:schemeClr val="tx1"/>
+          </a:solidFill>
+          <a:ln>
+            <a:noFill/>
+          </a:ln>
+        </p:spPr>
+        <p:style>
+          <a:lnRef idx="2">
+            <a:schemeClr val="accent1">
+              <a:shade val="50000"/>
+            </a:schemeClr>
+          </a:lnRef>
+          <a:fillRef idx="1">
+            <a:schemeClr val="accent1"/>
+          </a:fillRef>
+          <a:effectRef idx="0">
+            <a:schemeClr val="accent1"/>
+          </a:effectRef>
+          <a:fontRef idx="minor">
+            <a:schemeClr val="lt1"/>
+          </a:fontRef>
+        </p:style>
+        <p:txBody>
+          <a:bodyPr rtlCol="0" anchor="ctr"/>
+          <a:lstStyle/>
+          <a:p>
+            <a:pPr algn="ctr"/>
+            <a:endParaRPr lang="fr-FR"/>
+          </a:p>
+        </p:txBody>
+      </p:sp>
+      <p:sp>
+        <p:nvSpPr>
+          <p:cNvPr id="13" name="Ellipse 12"/>
+          <p:cNvSpPr/>
+          <p:nvPr/>
+        </p:nvSpPr>
+        <p:spPr>
+          <a:xfrm>
+            <a:off x="3986828" y="5654881"/>
+            <a:ext cx="215901" cy="207818"/>
+          </a:xfrm>
+          <a:prstGeom prst="ellipse">
+            <a:avLst/>
+          </a:prstGeom>
+          <a:solidFill>
+            <a:schemeClr val="tx1"/>
+          </a:solidFill>
+          <a:ln>
+            <a:noFill/>
+          </a:ln>
+        </p:spPr>
+        <p:style>
+          <a:lnRef idx="2">
+            <a:schemeClr val="accent1">
+              <a:shade val="50000"/>
+            </a:schemeClr>
+          </a:lnRef>
+          <a:fillRef idx="1">
+            <a:schemeClr val="accent1"/>
+          </a:fillRef>
+          <a:effectRef idx="0">
+            <a:schemeClr val="accent1"/>
+          </a:effectRef>
+          <a:fontRef idx="minor">
+            <a:schemeClr val="lt1"/>
+          </a:fontRef>
+        </p:style>
+        <p:txBody>
+          <a:bodyPr rtlCol="0" anchor="ctr"/>
+          <a:lstStyle/>
+          <a:p>
+            <a:pPr algn="ctr"/>
+            <a:endParaRPr lang="fr-FR"/>
+          </a:p>
+        </p:txBody>
+      </p:sp>
+      <p:sp>
+        <p:nvSpPr>
+          <p:cNvPr id="14" name="Ellipse 13"/>
+          <p:cNvSpPr/>
+          <p:nvPr/>
+        </p:nvSpPr>
+        <p:spPr>
+          <a:xfrm>
+            <a:off x="7478174" y="2644981"/>
+            <a:ext cx="215901" cy="207818"/>
+          </a:xfrm>
+          <a:prstGeom prst="ellipse">
+            <a:avLst/>
+          </a:prstGeom>
+          <a:solidFill>
+            <a:schemeClr val="tx1"/>
+          </a:solidFill>
+          <a:ln>
+            <a:noFill/>
+          </a:ln>
+        </p:spPr>
+        <p:style>
+          <a:lnRef idx="2">
+            <a:schemeClr val="accent1">
+              <a:shade val="50000"/>
+            </a:schemeClr>
+          </a:lnRef>
+          <a:fillRef idx="1">
+            <a:schemeClr val="accent1"/>
+          </a:fillRef>
+          <a:effectRef idx="0">
+            <a:schemeClr val="accent1"/>
+          </a:effectRef>
+          <a:fontRef idx="minor">
+            <a:schemeClr val="lt1"/>
+          </a:fontRef>
+        </p:style>
+        <p:txBody>
+          <a:bodyPr rtlCol="0" anchor="ctr"/>
+          <a:lstStyle/>
+          <a:p>
+            <a:pPr algn="ctr"/>
+            <a:endParaRPr lang="fr-FR"/>
+          </a:p>
+        </p:txBody>
+      </p:sp>
+      <p:sp>
+        <p:nvSpPr>
+          <p:cNvPr id="15" name="Ellipse 14"/>
+          <p:cNvSpPr/>
+          <p:nvPr/>
+        </p:nvSpPr>
+        <p:spPr>
+          <a:xfrm>
+            <a:off x="9627042" y="4083256"/>
+            <a:ext cx="215901" cy="207818"/>
+          </a:xfrm>
+          <a:prstGeom prst="ellipse">
+            <a:avLst/>
+          </a:prstGeom>
+          <a:solidFill>
+            <a:schemeClr val="tx1"/>
+          </a:solidFill>
+          <a:ln>
+            <a:noFill/>
+          </a:ln>
+        </p:spPr>
+        <p:style>
+          <a:lnRef idx="2">
+            <a:schemeClr val="accent1">
+              <a:shade val="50000"/>
+            </a:schemeClr>
+          </a:lnRef>
+          <a:fillRef idx="1">
+            <a:schemeClr val="accent1"/>
+          </a:fillRef>
+          <a:effectRef idx="0">
+            <a:schemeClr val="accent1"/>
+          </a:effectRef>
+          <a:fontRef idx="minor">
+            <a:schemeClr val="lt1"/>
+          </a:fontRef>
+        </p:style>
+        <p:txBody>
+          <a:bodyPr rtlCol="0" anchor="ctr"/>
+          <a:lstStyle/>
+          <a:p>
+            <a:pPr algn="ctr"/>
+            <a:endParaRPr lang="fr-FR"/>
+          </a:p>
+        </p:txBody>
+      </p:sp>
+      <p:sp>
+        <p:nvSpPr>
+          <p:cNvPr id="16" name="Rectangle 15"/>
+          <p:cNvSpPr/>
+          <p:nvPr/>
+        </p:nvSpPr>
+        <p:spPr>
+          <a:xfrm>
+            <a:off x="2024991" y="2767857"/>
+            <a:ext cx="392545" cy="338200"/>
+          </a:xfrm>
+          <a:prstGeom prst="rect">
+            <a:avLst/>
+          </a:prstGeom>
+          <a:solidFill>
+            <a:schemeClr val="bg1"/>
+          </a:solidFill>
+          <a:ln>
+            <a:noFill/>
+          </a:ln>
+        </p:spPr>
+        <p:style>
+          <a:lnRef idx="2">
+            <a:schemeClr val="accent1">
+              <a:shade val="50000"/>
+            </a:schemeClr>
+          </a:lnRef>
+          <a:fillRef idx="1">
+            <a:schemeClr val="accent1"/>
+          </a:fillRef>
+          <a:effectRef idx="0">
+            <a:schemeClr val="accent1"/>
+          </a:effectRef>
+          <a:fontRef idx="minor">
+            <a:schemeClr val="lt1"/>
+          </a:fontRef>
+        </p:style>
+        <p:txBody>
+          <a:bodyPr rtlCol="0" anchor="ctr"/>
+          <a:lstStyle/>
+          <a:p>
+            <a:pPr algn="ctr"/>
+            <a:endParaRPr lang="fr-FR"/>
+          </a:p>
+        </p:txBody>
+      </p:sp>
+      <p:sp>
+        <p:nvSpPr>
+          <p:cNvPr id="17" name="Rectangle 16"/>
+          <p:cNvSpPr/>
+          <p:nvPr/>
+        </p:nvSpPr>
+        <p:spPr>
+          <a:xfrm>
+            <a:off x="2246663" y="2840099"/>
+            <a:ext cx="129308" cy="338200"/>
+          </a:xfrm>
+          <a:prstGeom prst="rect">
+            <a:avLst/>
+          </a:prstGeom>
+          <a:solidFill>
+            <a:schemeClr val="bg1"/>
+          </a:solidFill>
+          <a:ln>
+            <a:noFill/>
+          </a:ln>
+        </p:spPr>
+        <p:style>
+          <a:lnRef idx="2">
+            <a:schemeClr val="accent1">
+              <a:shade val="50000"/>
+            </a:schemeClr>
+          </a:lnRef>
+          <a:fillRef idx="1">
+            <a:schemeClr val="accent1"/>
+          </a:fillRef>
+          <a:effectRef idx="0">
+            <a:schemeClr val="accent1"/>
+          </a:effectRef>
+          <a:fontRef idx="minor">
+            <a:schemeClr val="lt1"/>
+          </a:fontRef>
+        </p:style>
+        <p:txBody>
+          <a:bodyPr rtlCol="0" anchor="ctr"/>
+          <a:lstStyle/>
+          <a:p>
+            <a:pPr algn="ctr"/>
+            <a:endParaRPr lang="fr-FR"/>
+          </a:p>
+        </p:txBody>
+      </p:sp>
+      <p:sp>
+        <p:nvSpPr>
+          <p:cNvPr id="18" name="Rectangle 17"/>
+          <p:cNvSpPr/>
+          <p:nvPr/>
+        </p:nvSpPr>
+        <p:spPr>
+          <a:xfrm>
+            <a:off x="2126500" y="3627127"/>
+            <a:ext cx="574324" cy="400110"/>
+          </a:xfrm>
+          <a:prstGeom prst="rect">
+            <a:avLst/>
+          </a:prstGeom>
+        </p:spPr>
+        <p:txBody>
+          <a:bodyPr wrap="none">
+            <a:spAutoFit/>
+          </a:bodyPr>
+          <a:lstStyle/>
+          <a:p>
+            <a:r>
+              <a:rPr lang="fr-FR" sz="2000" b="1" dirty="0"/>
+              <a:t>v</a:t>
+            </a:r>
+            <a:r>
+              <a:rPr lang="fr-FR" sz="2000" b="1" baseline="-25000" dirty="0"/>
+              <a:t>flux</a:t>
+            </a:r>
+            <a:endParaRPr lang="fr-FR" sz="2000" dirty="0"/>
+          </a:p>
+        </p:txBody>
+      </p:sp>
+      <p:sp>
+        <p:nvSpPr>
+          <p:cNvPr id="19" name="Rectangle 18"/>
+          <p:cNvSpPr/>
+          <p:nvPr/>
+        </p:nvSpPr>
+        <p:spPr>
+          <a:xfrm>
+            <a:off x="2507096" y="2226953"/>
+            <a:ext cx="392545" cy="951346"/>
+          </a:xfrm>
+          <a:prstGeom prst="rect">
+            <a:avLst/>
+          </a:prstGeom>
+          <a:solidFill>
+            <a:schemeClr val="bg1"/>
+          </a:solidFill>
+          <a:ln>
+            <a:noFill/>
+          </a:ln>
+        </p:spPr>
+        <p:style>
+          <a:lnRef idx="2">
+            <a:schemeClr val="accent1">
+              <a:shade val="50000"/>
+            </a:schemeClr>
+          </a:lnRef>
+          <a:fillRef idx="1">
+            <a:schemeClr val="accent1"/>
+          </a:fillRef>
+          <a:effectRef idx="0">
+            <a:schemeClr val="accent1"/>
+          </a:effectRef>
+          <a:fontRef idx="minor">
+            <a:schemeClr val="lt1"/>
+          </a:fontRef>
+        </p:style>
+        <p:txBody>
+          <a:bodyPr rtlCol="0" anchor="ctr"/>
+          <a:lstStyle/>
+          <a:p>
+            <a:pPr algn="ctr"/>
+            <a:endParaRPr lang="fr-FR"/>
+          </a:p>
+        </p:txBody>
+      </p:sp>
+      <p:cxnSp>
+        <p:nvCxnSpPr>
+          <p:cNvPr id="20" name="Connecteur droit avec flèche 19"/>
+          <p:cNvCxnSpPr/>
+          <p:nvPr/>
+        </p:nvCxnSpPr>
+        <p:spPr>
+          <a:xfrm flipV="1">
+            <a:off x="2899641" y="2226953"/>
+            <a:ext cx="0" cy="1517155"/>
+          </a:xfrm>
+          <a:prstGeom prst="straightConnector1">
+            <a:avLst/>
+          </a:prstGeom>
+          <a:ln w="28575">
+            <a:solidFill>
+              <a:schemeClr val="tx1"/>
+            </a:solidFill>
+            <a:headEnd type="none" w="med" len="med"/>
+            <a:tailEnd type="arrow" w="med" len="med"/>
+          </a:ln>
+        </p:spPr>
+        <p:style>
+          <a:lnRef idx="1">
+            <a:schemeClr val="accent1"/>
+          </a:lnRef>
+          <a:fillRef idx="0">
+            <a:schemeClr val="accent1"/>
+          </a:fillRef>
+          <a:effectRef idx="0">
+            <a:schemeClr val="accent1"/>
+          </a:effectRef>
+          <a:fontRef idx="minor">
+            <a:schemeClr val="tx1"/>
+          </a:fontRef>
+        </p:style>
+      </p:cxnSp>
+      <p:sp>
+        <p:nvSpPr>
+          <p:cNvPr id="21" name="ZoneTexte 20"/>
+          <p:cNvSpPr txBox="1"/>
+          <p:nvPr/>
+        </p:nvSpPr>
+        <p:spPr>
+          <a:xfrm>
+            <a:off x="2311757" y="2333294"/>
+            <a:ext cx="653256" cy="400110"/>
+          </a:xfrm>
+          <a:prstGeom prst="rect">
+            <a:avLst/>
+          </a:prstGeom>
+          <a:noFill/>
+        </p:spPr>
+        <p:txBody>
+          <a:bodyPr wrap="none" rtlCol="0">
+            <a:spAutoFit/>
+          </a:bodyPr>
+          <a:lstStyle/>
+          <a:p>
+            <a:r>
+              <a:rPr lang="fr-FR" sz="2000" b="1" dirty="0"/>
+              <a:t>v</a:t>
+            </a:r>
+            <a:r>
+              <a:rPr lang="fr-FR" sz="2000" b="1" baseline="-25000" dirty="0"/>
+              <a:t>spire</a:t>
+            </a:r>
+          </a:p>
+        </p:txBody>
+      </p:sp>
+      <p:sp>
+        <p:nvSpPr>
+          <p:cNvPr id="22" name="ZoneTexte 21"/>
+          <p:cNvSpPr txBox="1"/>
+          <p:nvPr/>
+        </p:nvSpPr>
+        <p:spPr>
+          <a:xfrm>
+            <a:off x="2925041" y="2069884"/>
+            <a:ext cx="700833" cy="400110"/>
+          </a:xfrm>
+          <a:prstGeom prst="rect">
+            <a:avLst/>
+          </a:prstGeom>
+          <a:noFill/>
+        </p:spPr>
+        <p:txBody>
+          <a:bodyPr wrap="none" rtlCol="0">
+            <a:spAutoFit/>
+          </a:bodyPr>
+          <a:lstStyle/>
+          <a:p>
+            <a:r>
+              <a:rPr lang="fr-FR" sz="2000" b="1" dirty="0"/>
+              <a:t>n</a:t>
+            </a:r>
+            <a:r>
+              <a:rPr lang="el-GR" sz="2000" b="1" baseline="-25000" dirty="0"/>
+              <a:t>φ</a:t>
+            </a:r>
+            <a:r>
+              <a:rPr lang="fr-FR" sz="2000" b="1" dirty="0"/>
+              <a:t>=1</a:t>
+            </a:r>
+          </a:p>
+        </p:txBody>
+      </p:sp>
+      <p:cxnSp>
+        <p:nvCxnSpPr>
+          <p:cNvPr id="23" name="Connecteur droit avec flèche 22"/>
+          <p:cNvCxnSpPr/>
+          <p:nvPr/>
+        </p:nvCxnSpPr>
+        <p:spPr>
+          <a:xfrm>
+            <a:off x="7907729" y="2762084"/>
+            <a:ext cx="104775" cy="0"/>
+          </a:xfrm>
+          <a:prstGeom prst="straightConnector1">
+            <a:avLst/>
+          </a:prstGeom>
+          <a:ln w="57150">
+            <a:solidFill>
+              <a:schemeClr val="tx1"/>
+            </a:solidFill>
+            <a:tailEnd type="triangle"/>
+          </a:ln>
+        </p:spPr>
+        <p:style>
+          <a:lnRef idx="1">
+            <a:schemeClr val="accent1"/>
+          </a:lnRef>
+          <a:fillRef idx="0">
+            <a:schemeClr val="accent1"/>
+          </a:fillRef>
+          <a:effectRef idx="0">
+            <a:schemeClr val="accent1"/>
+          </a:effectRef>
+          <a:fontRef idx="minor">
+            <a:schemeClr val="tx1"/>
+          </a:fontRef>
+        </p:style>
+      </p:cxnSp>
+      <p:sp>
+        <p:nvSpPr>
+          <p:cNvPr id="24" name="ZoneTexte 23"/>
+          <p:cNvSpPr txBox="1"/>
+          <p:nvPr/>
+        </p:nvSpPr>
+        <p:spPr>
+          <a:xfrm>
+            <a:off x="7778015" y="2300419"/>
+            <a:ext cx="330540" cy="400110"/>
+          </a:xfrm>
+          <a:prstGeom prst="rect">
+            <a:avLst/>
+          </a:prstGeom>
+          <a:noFill/>
+        </p:spPr>
+        <p:txBody>
+          <a:bodyPr wrap="none" rtlCol="0">
+            <a:spAutoFit/>
+          </a:bodyPr>
+          <a:lstStyle/>
+          <a:p>
+            <a:r>
+              <a:rPr lang="fr-FR" sz="2000" b="1" dirty="0"/>
+              <a:t>i</a:t>
+            </a:r>
+            <a:r>
+              <a:rPr lang="fr-FR" sz="2000" b="1" baseline="-25000" dirty="0"/>
+              <a:t>2</a:t>
+            </a:r>
+          </a:p>
+        </p:txBody>
+      </p:sp>
+      <p:cxnSp>
+        <p:nvCxnSpPr>
+          <p:cNvPr id="25" name="Connecteur droit avec flèche 24"/>
+          <p:cNvCxnSpPr/>
+          <p:nvPr/>
+        </p:nvCxnSpPr>
+        <p:spPr>
+          <a:xfrm>
+            <a:off x="4455512" y="3908090"/>
+            <a:ext cx="1" cy="169068"/>
+          </a:xfrm>
+          <a:prstGeom prst="straightConnector1">
+            <a:avLst/>
+          </a:prstGeom>
+          <a:ln w="57150">
+            <a:solidFill>
+              <a:schemeClr val="tx1"/>
+            </a:solidFill>
+            <a:tailEnd type="triangle"/>
+          </a:ln>
+        </p:spPr>
+        <p:style>
+          <a:lnRef idx="1">
+            <a:schemeClr val="accent1"/>
+          </a:lnRef>
+          <a:fillRef idx="0">
+            <a:schemeClr val="accent1"/>
+          </a:fillRef>
+          <a:effectRef idx="0">
+            <a:schemeClr val="accent1"/>
+          </a:effectRef>
+          <a:fontRef idx="minor">
+            <a:schemeClr val="tx1"/>
+          </a:fontRef>
+        </p:style>
+      </p:cxnSp>
+      <p:sp>
+        <p:nvSpPr>
+          <p:cNvPr id="26" name="ZoneTexte 25"/>
+          <p:cNvSpPr txBox="1"/>
+          <p:nvPr/>
+        </p:nvSpPr>
+        <p:spPr>
+          <a:xfrm>
+            <a:off x="4509586" y="3791013"/>
+            <a:ext cx="330540" cy="400110"/>
+          </a:xfrm>
+          <a:prstGeom prst="rect">
+            <a:avLst/>
+          </a:prstGeom>
+          <a:noFill/>
+        </p:spPr>
+        <p:txBody>
+          <a:bodyPr wrap="none" rtlCol="0">
+            <a:spAutoFit/>
+          </a:bodyPr>
+          <a:lstStyle/>
+          <a:p>
+            <a:r>
+              <a:rPr lang="fr-FR" sz="2000" b="1" dirty="0"/>
+              <a:t>i</a:t>
+            </a:r>
+            <a:r>
+              <a:rPr lang="fr-FR" sz="2000" b="1" baseline="-25000" dirty="0"/>
+              <a:t>1</a:t>
+            </a:r>
+          </a:p>
+        </p:txBody>
+      </p:sp>
+      <p:cxnSp>
+        <p:nvCxnSpPr>
+          <p:cNvPr id="32" name="Connecteur droit avec flèche 31"/>
+          <p:cNvCxnSpPr/>
+          <p:nvPr/>
+        </p:nvCxnSpPr>
+        <p:spPr>
+          <a:xfrm flipV="1">
+            <a:off x="3767484" y="3898109"/>
+            <a:ext cx="1" cy="165130"/>
+          </a:xfrm>
+          <a:prstGeom prst="straightConnector1">
+            <a:avLst/>
+          </a:prstGeom>
+          <a:ln w="57150">
+            <a:solidFill>
+              <a:schemeClr val="tx1"/>
+            </a:solidFill>
+            <a:tailEnd type="triangle"/>
+          </a:ln>
+        </p:spPr>
+        <p:style>
+          <a:lnRef idx="1">
+            <a:schemeClr val="accent1"/>
+          </a:lnRef>
+          <a:fillRef idx="0">
+            <a:schemeClr val="accent1"/>
+          </a:fillRef>
+          <a:effectRef idx="0">
+            <a:schemeClr val="accent1"/>
+          </a:effectRef>
+          <a:fontRef idx="minor">
+            <a:schemeClr val="tx1"/>
+          </a:fontRef>
+        </p:style>
+      </p:cxnSp>
+      <p:sp>
+        <p:nvSpPr>
+          <p:cNvPr id="33" name="ZoneTexte 32"/>
+          <p:cNvSpPr txBox="1"/>
+          <p:nvPr/>
+        </p:nvSpPr>
+        <p:spPr>
+          <a:xfrm>
+            <a:off x="3807995" y="3787055"/>
+            <a:ext cx="330540" cy="400110"/>
+          </a:xfrm>
+          <a:prstGeom prst="rect">
+            <a:avLst/>
+          </a:prstGeom>
+          <a:noFill/>
+        </p:spPr>
+        <p:txBody>
+          <a:bodyPr wrap="none" rtlCol="0">
+            <a:spAutoFit/>
+          </a:bodyPr>
+          <a:lstStyle/>
+          <a:p>
+            <a:r>
+              <a:rPr lang="fr-FR" sz="2000" b="1" dirty="0"/>
+              <a:t>i</a:t>
+            </a:r>
+            <a:r>
+              <a:rPr lang="fr-FR" sz="2000" b="1" baseline="-25000" dirty="0"/>
+              <a:t>3</a:t>
+            </a:r>
+          </a:p>
+        </p:txBody>
+      </p:sp>
+    </p:spTree>
+    <p:extLst>
+      <p:ext uri="{BB962C8B-B14F-4D97-AF65-F5344CB8AC3E}">
+        <p14:creationId xmlns:p14="http://schemas.microsoft.com/office/powerpoint/2010/main" val="3765914464"/>
+      </p:ext>
+    </p:extLst>
+  </p:cSld>
+  <p:clrMapOvr>
+    <a:masterClrMapping/>
+  </p:clrMapOvr>
+</p:sld>
+</file>
+
+<file path=ppt/slides/slide14.xml><?xml version="1.0" encoding="utf-8"?>
+<p:sld xmlns:a="http://schemas.openxmlformats.org/drawingml/2006/main" xmlns:r="http://schemas.openxmlformats.org/officeDocument/2006/relationships" xmlns:p="http://schemas.openxmlformats.org/presentationml/2006/main">
+  <p:cSld>
+    <p:spTree>
+      <p:nvGrpSpPr>
+        <p:cNvPr id="1" name=""/>
+        <p:cNvGrpSpPr/>
+        <p:nvPr/>
+      </p:nvGrpSpPr>
+      <p:grpSpPr>
+        <a:xfrm>
+          <a:off x="0" y="0"/>
+          <a:ext cx="0" cy="0"/>
+          <a:chOff x="0" y="0"/>
+          <a:chExt cx="0" cy="0"/>
+        </a:xfrm>
+      </p:grpSpPr>
+      <p:cxnSp>
+        <p:nvCxnSpPr>
+          <p:cNvPr id="2" name="Connecteur droit avec flèche 1"/>
+          <p:cNvCxnSpPr/>
+          <p:nvPr/>
+        </p:nvCxnSpPr>
+        <p:spPr>
+          <a:xfrm>
+            <a:off x="3823991" y="1413611"/>
+            <a:ext cx="3911909" cy="0"/>
+          </a:xfrm>
+          <a:prstGeom prst="straightConnector1">
+            <a:avLst/>
+          </a:prstGeom>
+          <a:ln w="38100">
+            <a:tailEnd type="triangle"/>
+          </a:ln>
+        </p:spPr>
+        <p:style>
+          <a:lnRef idx="1">
+            <a:schemeClr val="dk1"/>
+          </a:lnRef>
+          <a:fillRef idx="0">
+            <a:schemeClr val="dk1"/>
+          </a:fillRef>
+          <a:effectRef idx="0">
+            <a:schemeClr val="dk1"/>
+          </a:effectRef>
+          <a:fontRef idx="minor">
+            <a:schemeClr val="tx1"/>
+          </a:fontRef>
+        </p:style>
+      </p:cxnSp>
+      <p:cxnSp>
+        <p:nvCxnSpPr>
+          <p:cNvPr id="3" name="Connecteur droit avec flèche 2"/>
+          <p:cNvCxnSpPr/>
+          <p:nvPr/>
+        </p:nvCxnSpPr>
+        <p:spPr>
+          <a:xfrm flipV="1">
+            <a:off x="3917272" y="770463"/>
+            <a:ext cx="0" cy="760977"/>
+          </a:xfrm>
+          <a:prstGeom prst="straightConnector1">
+            <a:avLst/>
+          </a:prstGeom>
+          <a:ln w="38100">
+            <a:tailEnd type="triangle"/>
+          </a:ln>
+        </p:spPr>
+        <p:style>
+          <a:lnRef idx="1">
+            <a:schemeClr val="dk1"/>
+          </a:lnRef>
+          <a:fillRef idx="0">
+            <a:schemeClr val="dk1"/>
+          </a:fillRef>
+          <a:effectRef idx="0">
+            <a:schemeClr val="dk1"/>
+          </a:effectRef>
+          <a:fontRef idx="minor">
+            <a:schemeClr val="tx1"/>
+          </a:fontRef>
+        </p:style>
+      </p:cxnSp>
+      <p:sp>
+        <p:nvSpPr>
+          <p:cNvPr id="4" name="ZoneTexte 3"/>
+          <p:cNvSpPr txBox="1"/>
+          <p:nvPr/>
+        </p:nvSpPr>
+        <p:spPr>
+          <a:xfrm>
+            <a:off x="7586430" y="1151856"/>
+            <a:ext cx="240772" cy="288669"/>
+          </a:xfrm>
+          <a:prstGeom prst="rect">
+            <a:avLst/>
+          </a:prstGeom>
+          <a:noFill/>
+        </p:spPr>
+        <p:txBody>
+          <a:bodyPr wrap="none" rtlCol="0">
+            <a:spAutoFit/>
+          </a:bodyPr>
+          <a:lstStyle/>
+          <a:p>
+            <a:r>
+              <a:rPr lang="fr-FR" sz="1276" b="1" dirty="0"/>
+              <a:t>t</a:t>
+            </a:r>
+          </a:p>
+        </p:txBody>
+      </p:sp>
+      <mc:AlternateContent xmlns:mc="http://schemas.openxmlformats.org/markup-compatibility/2006" xmlns:a14="http://schemas.microsoft.com/office/drawing/2010/main">
+        <mc:Choice Requires="a14">
+          <p:sp>
+            <p:nvSpPr>
+              <p:cNvPr id="5" name="ZoneTexte 4"/>
+              <p:cNvSpPr txBox="1"/>
+              <p:nvPr/>
+            </p:nvSpPr>
+            <p:spPr>
+              <a:xfrm>
+                <a:off x="3380326" y="549277"/>
+                <a:ext cx="1125629" cy="288669"/>
+              </a:xfrm>
+              <a:prstGeom prst="rect">
+                <a:avLst/>
+              </a:prstGeom>
+              <a:noFill/>
+            </p:spPr>
+            <p:txBody>
+              <a:bodyPr wrap="none" rtlCol="0">
+                <a:spAutoFit/>
+              </a:bodyPr>
+              <a:lstStyle/>
+              <a:p>
+                <a:pPr/>
+                <a14:m>
+                  <m:oMathPara xmlns:m="http://schemas.openxmlformats.org/officeDocument/2006/math">
+                    <m:oMath>
+                      <m:r>
+                        <a:rPr lang="fr-FR" sz="1276" b="1" i="1" smtClean="0">
+                          <a:latin typeface="Cambria Math" panose="02040503050406030204" pitchFamily="18" charset="0"/>
+                          <a:ea typeface="Cambria Math" panose="02040503050406030204" pitchFamily="18" charset="0"/>
+                        </a:rPr>
+                        <m:t>𝑪𝒐𝒎𝒎𝒂𝒏𝒅𝒆</m:t>
+                      </m:r>
+                    </m:oMath>
+                  </m:oMathPara>
+                </a14:m>
+                <a:endParaRPr lang="fr-FR" sz="1276" b="1" dirty="0"/>
+              </a:p>
+            </p:txBody>
+          </p:sp>
+        </mc:Choice>
+        <mc:Fallback xmlns="">
+          <p:sp>
+            <p:nvSpPr>
+              <p:cNvPr id="5" name="ZoneTexte 4"/>
+              <p:cNvSpPr txBox="1">
+                <a:spLocks noRot="1" noChangeAspect="1" noMove="1" noResize="1" noEditPoints="1" noAdjustHandles="1" noChangeArrowheads="1" noChangeShapeType="1" noTextEdit="1"/>
+              </p:cNvSpPr>
+              <p:nvPr/>
+            </p:nvSpPr>
+            <p:spPr>
+              <a:xfrm>
+                <a:off x="3380326" y="549277"/>
+                <a:ext cx="1125629" cy="288669"/>
+              </a:xfrm>
+              <a:prstGeom prst="rect">
+                <a:avLst/>
+              </a:prstGeom>
+              <a:blipFill>
+                <a:blip r:embed="rId2"/>
+                <a:stretch>
+                  <a:fillRect/>
+                </a:stretch>
+              </a:blipFill>
+            </p:spPr>
+            <p:txBody>
+              <a:bodyPr/>
+              <a:lstStyle/>
+              <a:p>
+                <a:r>
+                  <a:rPr lang="fr-FR">
+                    <a:noFill/>
+                  </a:rPr>
+                  <a:t> </a:t>
+                </a:r>
+              </a:p>
+            </p:txBody>
+          </p:sp>
+        </mc:Fallback>
+      </mc:AlternateContent>
+      <p:sp>
+        <p:nvSpPr>
+          <p:cNvPr id="6" name="ZoneTexte 5"/>
+          <p:cNvSpPr txBox="1"/>
+          <p:nvPr/>
+        </p:nvSpPr>
+        <p:spPr>
+          <a:xfrm>
+            <a:off x="3741714" y="1423429"/>
+            <a:ext cx="268022" cy="288669"/>
+          </a:xfrm>
+          <a:prstGeom prst="rect">
+            <a:avLst/>
+          </a:prstGeom>
+          <a:noFill/>
+        </p:spPr>
+        <p:txBody>
+          <a:bodyPr wrap="none" rtlCol="0">
+            <a:spAutoFit/>
+          </a:bodyPr>
+          <a:lstStyle/>
+          <a:p>
+            <a:r>
+              <a:rPr lang="fr-FR" sz="1276" b="1" dirty="0"/>
+              <a:t>0</a:t>
+            </a:r>
+          </a:p>
+        </p:txBody>
+      </p:sp>
+      <mc:AlternateContent xmlns:mc="http://schemas.openxmlformats.org/markup-compatibility/2006" xmlns:a14="http://schemas.microsoft.com/office/drawing/2010/main">
+        <mc:Choice Requires="a14">
+          <p:sp>
+            <p:nvSpPr>
+              <p:cNvPr id="7" name="ZoneTexte 6"/>
+              <p:cNvSpPr txBox="1"/>
+              <p:nvPr/>
+            </p:nvSpPr>
+            <p:spPr>
+              <a:xfrm>
+                <a:off x="4408523" y="1422721"/>
+                <a:ext cx="502061" cy="288669"/>
+              </a:xfrm>
+              <a:prstGeom prst="rect">
+                <a:avLst/>
+              </a:prstGeom>
+              <a:noFill/>
+            </p:spPr>
+            <p:txBody>
+              <a:bodyPr wrap="none" rtlCol="0">
+                <a:spAutoFit/>
+              </a:bodyPr>
+              <a:lstStyle/>
+              <a:p>
+                <a:pPr/>
+                <a14:m>
+                  <m:oMathPara xmlns:m="http://schemas.openxmlformats.org/officeDocument/2006/math">
+                    <m:oMath>
+                      <m:r>
+                        <a:rPr lang="fr-FR" sz="1276" b="1" i="1">
+                          <a:latin typeface="Cambria Math" panose="02040503050406030204" pitchFamily="18" charset="0"/>
+                        </a:rPr>
+                        <m:t>𝑻</m:t>
+                      </m:r>
+                      <m:r>
+                        <a:rPr lang="fr-FR" sz="1276" b="1" i="1">
+                          <a:latin typeface="Cambria Math" panose="02040503050406030204" pitchFamily="18" charset="0"/>
+                        </a:rPr>
+                        <m:t>/</m:t>
+                      </m:r>
+                      <m:r>
+                        <a:rPr lang="fr-FR" sz="1276" b="1" i="1">
+                          <a:latin typeface="Cambria Math" panose="02040503050406030204" pitchFamily="18" charset="0"/>
+                        </a:rPr>
+                        <m:t>𝟐</m:t>
+                      </m:r>
+                    </m:oMath>
+                  </m:oMathPara>
+                </a14:m>
+                <a:endParaRPr lang="fr-FR" sz="1276" b="1" dirty="0"/>
+              </a:p>
+            </p:txBody>
+          </p:sp>
+        </mc:Choice>
+        <mc:Fallback xmlns="">
+          <p:sp>
+            <p:nvSpPr>
+              <p:cNvPr id="7" name="ZoneTexte 6"/>
+              <p:cNvSpPr txBox="1">
+                <a:spLocks noRot="1" noChangeAspect="1" noMove="1" noResize="1" noEditPoints="1" noAdjustHandles="1" noChangeArrowheads="1" noChangeShapeType="1" noTextEdit="1"/>
+              </p:cNvSpPr>
+              <p:nvPr/>
+            </p:nvSpPr>
+            <p:spPr>
+              <a:xfrm>
+                <a:off x="4408523" y="1422721"/>
+                <a:ext cx="502061" cy="288669"/>
+              </a:xfrm>
+              <a:prstGeom prst="rect">
+                <a:avLst/>
+              </a:prstGeom>
+              <a:blipFill>
+                <a:blip r:embed="rId3"/>
+                <a:stretch>
+                  <a:fillRect b="-8333"/>
+                </a:stretch>
+              </a:blipFill>
+            </p:spPr>
+            <p:txBody>
+              <a:bodyPr/>
+              <a:lstStyle/>
+              <a:p>
+                <a:r>
+                  <a:rPr lang="fr-FR">
+                    <a:noFill/>
+                  </a:rPr>
+                  <a:t> </a:t>
+                </a:r>
+              </a:p>
+            </p:txBody>
+          </p:sp>
+        </mc:Fallback>
+      </mc:AlternateContent>
+      <p:sp>
+        <p:nvSpPr>
+          <p:cNvPr id="8" name="ZoneTexte 7"/>
+          <p:cNvSpPr txBox="1"/>
+          <p:nvPr/>
+        </p:nvSpPr>
+        <p:spPr>
+          <a:xfrm>
+            <a:off x="5457312" y="1431007"/>
+            <a:ext cx="266420" cy="288669"/>
+          </a:xfrm>
+          <a:prstGeom prst="rect">
+            <a:avLst/>
+          </a:prstGeom>
+          <a:noFill/>
+        </p:spPr>
+        <p:txBody>
+          <a:bodyPr wrap="none" rtlCol="0">
+            <a:spAutoFit/>
+          </a:bodyPr>
+          <a:lstStyle/>
+          <a:p>
+            <a:r>
+              <a:rPr lang="fr-FR" sz="1276" b="1" dirty="0"/>
+              <a:t>T</a:t>
+            </a:r>
+          </a:p>
+        </p:txBody>
+      </p:sp>
+      <p:cxnSp>
+        <p:nvCxnSpPr>
+          <p:cNvPr id="9" name="Connecteur droit avec flèche 8"/>
+          <p:cNvCxnSpPr/>
+          <p:nvPr/>
+        </p:nvCxnSpPr>
+        <p:spPr>
+          <a:xfrm>
+            <a:off x="3823991" y="2305472"/>
+            <a:ext cx="3911909" cy="0"/>
+          </a:xfrm>
+          <a:prstGeom prst="straightConnector1">
+            <a:avLst/>
+          </a:prstGeom>
+          <a:ln w="38100">
+            <a:tailEnd type="triangle"/>
+          </a:ln>
+        </p:spPr>
+        <p:style>
+          <a:lnRef idx="1">
+            <a:schemeClr val="dk1"/>
+          </a:lnRef>
+          <a:fillRef idx="0">
+            <a:schemeClr val="dk1"/>
+          </a:fillRef>
+          <a:effectRef idx="0">
+            <a:schemeClr val="dk1"/>
+          </a:effectRef>
+          <a:fontRef idx="minor">
+            <a:schemeClr val="tx1"/>
+          </a:fontRef>
+        </p:style>
+      </p:cxnSp>
+      <p:cxnSp>
+        <p:nvCxnSpPr>
+          <p:cNvPr id="10" name="Connecteur droit avec flèche 9"/>
+          <p:cNvCxnSpPr/>
+          <p:nvPr/>
+        </p:nvCxnSpPr>
+        <p:spPr>
+          <a:xfrm flipV="1">
+            <a:off x="3917272" y="1662324"/>
+            <a:ext cx="0" cy="760977"/>
+          </a:xfrm>
+          <a:prstGeom prst="straightConnector1">
+            <a:avLst/>
+          </a:prstGeom>
+          <a:ln w="38100">
+            <a:tailEnd type="triangle"/>
+          </a:ln>
+        </p:spPr>
+        <p:style>
+          <a:lnRef idx="1">
+            <a:schemeClr val="dk1"/>
+          </a:lnRef>
+          <a:fillRef idx="0">
+            <a:schemeClr val="dk1"/>
+          </a:fillRef>
+          <a:effectRef idx="0">
+            <a:schemeClr val="dk1"/>
+          </a:effectRef>
+          <a:fontRef idx="minor">
+            <a:schemeClr val="tx1"/>
+          </a:fontRef>
+        </p:style>
+      </p:cxnSp>
+      <p:sp>
+        <p:nvSpPr>
+          <p:cNvPr id="11" name="ZoneTexte 10"/>
+          <p:cNvSpPr txBox="1"/>
+          <p:nvPr/>
+        </p:nvSpPr>
+        <p:spPr>
+          <a:xfrm>
+            <a:off x="7582599" y="2029347"/>
+            <a:ext cx="240772" cy="288669"/>
+          </a:xfrm>
+          <a:prstGeom prst="rect">
+            <a:avLst/>
+          </a:prstGeom>
+          <a:noFill/>
+        </p:spPr>
+        <p:txBody>
+          <a:bodyPr wrap="none" rtlCol="0">
+            <a:spAutoFit/>
+          </a:bodyPr>
+          <a:lstStyle/>
+          <a:p>
+            <a:r>
+              <a:rPr lang="fr-FR" sz="1276" b="1" dirty="0"/>
+              <a:t>t</a:t>
+            </a:r>
+          </a:p>
+        </p:txBody>
+      </p:sp>
+      <p:sp>
+        <p:nvSpPr>
+          <p:cNvPr id="12" name="ZoneTexte 11"/>
+          <p:cNvSpPr txBox="1"/>
+          <p:nvPr/>
+        </p:nvSpPr>
+        <p:spPr>
+          <a:xfrm>
+            <a:off x="3613568" y="1571609"/>
+            <a:ext cx="300082" cy="288669"/>
+          </a:xfrm>
+          <a:prstGeom prst="rect">
+            <a:avLst/>
+          </a:prstGeom>
+          <a:noFill/>
+        </p:spPr>
+        <p:txBody>
+          <a:bodyPr wrap="none" rtlCol="0">
+            <a:spAutoFit/>
+          </a:bodyPr>
+          <a:lstStyle/>
+          <a:p>
+            <a:r>
+              <a:rPr lang="el-GR" sz="1276" b="1" dirty="0"/>
+              <a:t>ϕ</a:t>
+            </a:r>
+            <a:endParaRPr lang="fr-FR" sz="1276" b="1" dirty="0"/>
+          </a:p>
+        </p:txBody>
+      </p:sp>
+      <p:sp>
+        <p:nvSpPr>
+          <p:cNvPr id="13" name="ZoneTexte 12"/>
+          <p:cNvSpPr txBox="1"/>
+          <p:nvPr/>
+        </p:nvSpPr>
+        <p:spPr>
+          <a:xfrm>
+            <a:off x="3741714" y="2315290"/>
+            <a:ext cx="268022" cy="288669"/>
+          </a:xfrm>
+          <a:prstGeom prst="rect">
+            <a:avLst/>
+          </a:prstGeom>
+          <a:noFill/>
+        </p:spPr>
+        <p:txBody>
+          <a:bodyPr wrap="none" rtlCol="0">
+            <a:spAutoFit/>
+          </a:bodyPr>
+          <a:lstStyle/>
+          <a:p>
+            <a:r>
+              <a:rPr lang="fr-FR" sz="1276" b="1" dirty="0"/>
+              <a:t>0</a:t>
+            </a:r>
+          </a:p>
+        </p:txBody>
+      </p:sp>
+      <p:cxnSp>
+        <p:nvCxnSpPr>
+          <p:cNvPr id="14" name="Connecteur droit avec flèche 13"/>
+          <p:cNvCxnSpPr/>
+          <p:nvPr/>
+        </p:nvCxnSpPr>
+        <p:spPr>
+          <a:xfrm>
+            <a:off x="3823991" y="3177695"/>
+            <a:ext cx="3911909" cy="0"/>
+          </a:xfrm>
+          <a:prstGeom prst="straightConnector1">
+            <a:avLst/>
+          </a:prstGeom>
+          <a:ln w="38100">
+            <a:tailEnd type="triangle"/>
+          </a:ln>
+        </p:spPr>
+        <p:style>
+          <a:lnRef idx="1">
+            <a:schemeClr val="dk1"/>
+          </a:lnRef>
+          <a:fillRef idx="0">
+            <a:schemeClr val="dk1"/>
+          </a:fillRef>
+          <a:effectRef idx="0">
+            <a:schemeClr val="dk1"/>
+          </a:effectRef>
+          <a:fontRef idx="minor">
+            <a:schemeClr val="tx1"/>
+          </a:fontRef>
+        </p:style>
+      </p:cxnSp>
+      <p:cxnSp>
+        <p:nvCxnSpPr>
+          <p:cNvPr id="15" name="Connecteur droit avec flèche 14"/>
+          <p:cNvCxnSpPr/>
+          <p:nvPr/>
+        </p:nvCxnSpPr>
+        <p:spPr>
+          <a:xfrm flipV="1">
+            <a:off x="3917272" y="2534547"/>
+            <a:ext cx="0" cy="760977"/>
+          </a:xfrm>
+          <a:prstGeom prst="straightConnector1">
+            <a:avLst/>
+          </a:prstGeom>
+          <a:ln w="38100">
+            <a:tailEnd type="triangle"/>
+          </a:ln>
+        </p:spPr>
+        <p:style>
+          <a:lnRef idx="1">
+            <a:schemeClr val="dk1"/>
+          </a:lnRef>
+          <a:fillRef idx="0">
+            <a:schemeClr val="dk1"/>
+          </a:fillRef>
+          <a:effectRef idx="0">
+            <a:schemeClr val="dk1"/>
+          </a:effectRef>
+          <a:fontRef idx="minor">
+            <a:schemeClr val="tx1"/>
+          </a:fontRef>
+        </p:style>
+      </p:cxnSp>
+      <p:sp>
+        <p:nvSpPr>
+          <p:cNvPr id="16" name="ZoneTexte 15"/>
+          <p:cNvSpPr txBox="1"/>
+          <p:nvPr/>
+        </p:nvSpPr>
+        <p:spPr>
+          <a:xfrm>
+            <a:off x="7578932" y="2912227"/>
+            <a:ext cx="240772" cy="288669"/>
+          </a:xfrm>
+          <a:prstGeom prst="rect">
+            <a:avLst/>
+          </a:prstGeom>
+          <a:noFill/>
+        </p:spPr>
+        <p:txBody>
+          <a:bodyPr wrap="none" rtlCol="0">
+            <a:spAutoFit/>
+          </a:bodyPr>
+          <a:lstStyle/>
+          <a:p>
+            <a:r>
+              <a:rPr lang="fr-FR" sz="1276" b="1" dirty="0"/>
+              <a:t>t</a:t>
+            </a:r>
+          </a:p>
+        </p:txBody>
+      </p:sp>
+      <p:sp>
+        <p:nvSpPr>
+          <p:cNvPr id="17" name="ZoneTexte 16"/>
+          <p:cNvSpPr txBox="1"/>
+          <p:nvPr/>
+        </p:nvSpPr>
+        <p:spPr>
+          <a:xfrm>
+            <a:off x="3639679" y="2433671"/>
+            <a:ext cx="279244" cy="288669"/>
+          </a:xfrm>
+          <a:prstGeom prst="rect">
+            <a:avLst/>
+          </a:prstGeom>
+          <a:noFill/>
+        </p:spPr>
+        <p:txBody>
+          <a:bodyPr wrap="none" rtlCol="0">
+            <a:spAutoFit/>
+          </a:bodyPr>
+          <a:lstStyle/>
+          <a:p>
+            <a:r>
+              <a:rPr lang="fr-FR" sz="1276" b="1" dirty="0"/>
+              <a:t>i</a:t>
+            </a:r>
+            <a:r>
+              <a:rPr lang="fr-FR" sz="1276" b="1" baseline="-25000" dirty="0"/>
+              <a:t>1</a:t>
+            </a:r>
+          </a:p>
+        </p:txBody>
+      </p:sp>
+      <p:sp>
+        <p:nvSpPr>
+          <p:cNvPr id="18" name="ZoneTexte 17"/>
+          <p:cNvSpPr txBox="1"/>
+          <p:nvPr/>
+        </p:nvSpPr>
+        <p:spPr>
+          <a:xfrm>
+            <a:off x="3741714" y="3187513"/>
+            <a:ext cx="268022" cy="288669"/>
+          </a:xfrm>
+          <a:prstGeom prst="rect">
+            <a:avLst/>
+          </a:prstGeom>
+          <a:noFill/>
+        </p:spPr>
+        <p:txBody>
+          <a:bodyPr wrap="none" rtlCol="0">
+            <a:spAutoFit/>
+          </a:bodyPr>
+          <a:lstStyle/>
+          <a:p>
+            <a:r>
+              <a:rPr lang="fr-FR" sz="1276" b="1" dirty="0"/>
+              <a:t>0</a:t>
+            </a:r>
+          </a:p>
+        </p:txBody>
+      </p:sp>
+      <p:cxnSp>
+        <p:nvCxnSpPr>
+          <p:cNvPr id="19" name="Connecteur droit avec flèche 18"/>
+          <p:cNvCxnSpPr/>
+          <p:nvPr/>
+        </p:nvCxnSpPr>
+        <p:spPr>
+          <a:xfrm>
+            <a:off x="3823991" y="4059736"/>
+            <a:ext cx="3911909" cy="0"/>
+          </a:xfrm>
+          <a:prstGeom prst="straightConnector1">
+            <a:avLst/>
+          </a:prstGeom>
+          <a:ln w="38100">
+            <a:tailEnd type="triangle"/>
+          </a:ln>
+        </p:spPr>
+        <p:style>
+          <a:lnRef idx="1">
+            <a:schemeClr val="dk1"/>
+          </a:lnRef>
+          <a:fillRef idx="0">
+            <a:schemeClr val="dk1"/>
+          </a:fillRef>
+          <a:effectRef idx="0">
+            <a:schemeClr val="dk1"/>
+          </a:effectRef>
+          <a:fontRef idx="minor">
+            <a:schemeClr val="tx1"/>
+          </a:fontRef>
+        </p:style>
+      </p:cxnSp>
+      <p:cxnSp>
+        <p:nvCxnSpPr>
+          <p:cNvPr id="20" name="Connecteur droit avec flèche 19"/>
+          <p:cNvCxnSpPr/>
+          <p:nvPr/>
+        </p:nvCxnSpPr>
+        <p:spPr>
+          <a:xfrm flipV="1">
+            <a:off x="3917272" y="3416588"/>
+            <a:ext cx="0" cy="760977"/>
+          </a:xfrm>
+          <a:prstGeom prst="straightConnector1">
+            <a:avLst/>
+          </a:prstGeom>
+          <a:ln w="38100">
+            <a:tailEnd type="triangle"/>
+          </a:ln>
+        </p:spPr>
+        <p:style>
+          <a:lnRef idx="1">
+            <a:schemeClr val="dk1"/>
+          </a:lnRef>
+          <a:fillRef idx="0">
+            <a:schemeClr val="dk1"/>
+          </a:fillRef>
+          <a:effectRef idx="0">
+            <a:schemeClr val="dk1"/>
+          </a:effectRef>
+          <a:fontRef idx="minor">
+            <a:schemeClr val="tx1"/>
+          </a:fontRef>
+        </p:style>
+      </p:cxnSp>
+      <p:sp>
+        <p:nvSpPr>
+          <p:cNvPr id="21" name="ZoneTexte 20"/>
+          <p:cNvSpPr txBox="1"/>
+          <p:nvPr/>
+        </p:nvSpPr>
+        <p:spPr>
+          <a:xfrm>
+            <a:off x="7586430" y="3787496"/>
+            <a:ext cx="240772" cy="288669"/>
+          </a:xfrm>
+          <a:prstGeom prst="rect">
+            <a:avLst/>
+          </a:prstGeom>
+          <a:noFill/>
+        </p:spPr>
+        <p:txBody>
+          <a:bodyPr wrap="none" rtlCol="0">
+            <a:spAutoFit/>
+          </a:bodyPr>
+          <a:lstStyle/>
+          <a:p>
+            <a:r>
+              <a:rPr lang="fr-FR" sz="1276" b="1" dirty="0"/>
+              <a:t>t</a:t>
+            </a:r>
+          </a:p>
+        </p:txBody>
+      </p:sp>
+      <p:sp>
+        <p:nvSpPr>
+          <p:cNvPr id="22" name="ZoneTexte 21"/>
+          <p:cNvSpPr txBox="1"/>
+          <p:nvPr/>
+        </p:nvSpPr>
+        <p:spPr>
+          <a:xfrm>
+            <a:off x="3741714" y="4069555"/>
+            <a:ext cx="268022" cy="288669"/>
+          </a:xfrm>
+          <a:prstGeom prst="rect">
+            <a:avLst/>
+          </a:prstGeom>
+          <a:noFill/>
+        </p:spPr>
+        <p:txBody>
+          <a:bodyPr wrap="none" rtlCol="0">
+            <a:spAutoFit/>
+          </a:bodyPr>
+          <a:lstStyle/>
+          <a:p>
+            <a:r>
+              <a:rPr lang="fr-FR" sz="1276" b="1" dirty="0"/>
+              <a:t>0</a:t>
+            </a:r>
+          </a:p>
+        </p:txBody>
+      </p:sp>
+      <p:cxnSp>
+        <p:nvCxnSpPr>
+          <p:cNvPr id="23" name="Connecteur droit avec flèche 22"/>
+          <p:cNvCxnSpPr/>
+          <p:nvPr/>
+        </p:nvCxnSpPr>
+        <p:spPr>
+          <a:xfrm>
+            <a:off x="3823991" y="4953920"/>
+            <a:ext cx="3911909" cy="0"/>
+          </a:xfrm>
+          <a:prstGeom prst="straightConnector1">
+            <a:avLst/>
+          </a:prstGeom>
+          <a:ln w="38100">
+            <a:tailEnd type="triangle"/>
+          </a:ln>
+        </p:spPr>
+        <p:style>
+          <a:lnRef idx="1">
+            <a:schemeClr val="dk1"/>
+          </a:lnRef>
+          <a:fillRef idx="0">
+            <a:schemeClr val="dk1"/>
+          </a:fillRef>
+          <a:effectRef idx="0">
+            <a:schemeClr val="dk1"/>
+          </a:effectRef>
+          <a:fontRef idx="minor">
+            <a:schemeClr val="tx1"/>
+          </a:fontRef>
+        </p:style>
+      </p:cxnSp>
+      <p:cxnSp>
+        <p:nvCxnSpPr>
+          <p:cNvPr id="24" name="Connecteur droit avec flèche 23"/>
+          <p:cNvCxnSpPr/>
+          <p:nvPr/>
+        </p:nvCxnSpPr>
+        <p:spPr>
+          <a:xfrm flipV="1">
+            <a:off x="3917272" y="4310772"/>
+            <a:ext cx="0" cy="760977"/>
+          </a:xfrm>
+          <a:prstGeom prst="straightConnector1">
+            <a:avLst/>
+          </a:prstGeom>
+          <a:ln w="38100">
+            <a:tailEnd type="triangle"/>
+          </a:ln>
+        </p:spPr>
+        <p:style>
+          <a:lnRef idx="1">
+            <a:schemeClr val="dk1"/>
+          </a:lnRef>
+          <a:fillRef idx="0">
+            <a:schemeClr val="dk1"/>
+          </a:fillRef>
+          <a:effectRef idx="0">
+            <a:schemeClr val="dk1"/>
+          </a:effectRef>
+          <a:fontRef idx="minor">
+            <a:schemeClr val="tx1"/>
+          </a:fontRef>
+        </p:style>
+      </p:cxnSp>
+      <p:sp>
+        <p:nvSpPr>
+          <p:cNvPr id="25" name="ZoneTexte 24"/>
+          <p:cNvSpPr txBox="1"/>
+          <p:nvPr/>
+        </p:nvSpPr>
+        <p:spPr>
+          <a:xfrm>
+            <a:off x="7586430" y="4681679"/>
+            <a:ext cx="240772" cy="288669"/>
+          </a:xfrm>
+          <a:prstGeom prst="rect">
+            <a:avLst/>
+          </a:prstGeom>
+          <a:noFill/>
+        </p:spPr>
+        <p:txBody>
+          <a:bodyPr wrap="none" rtlCol="0">
+            <a:spAutoFit/>
+          </a:bodyPr>
+          <a:lstStyle/>
+          <a:p>
+            <a:r>
+              <a:rPr lang="fr-FR" sz="1276" b="1" dirty="0"/>
+              <a:t>t</a:t>
+            </a:r>
+          </a:p>
+        </p:txBody>
+      </p:sp>
+      <p:sp>
+        <p:nvSpPr>
+          <p:cNvPr id="26" name="ZoneTexte 25"/>
+          <p:cNvSpPr txBox="1"/>
+          <p:nvPr/>
+        </p:nvSpPr>
+        <p:spPr>
+          <a:xfrm>
+            <a:off x="3602553" y="4209602"/>
+            <a:ext cx="316112" cy="288669"/>
+          </a:xfrm>
+          <a:prstGeom prst="rect">
+            <a:avLst/>
+          </a:prstGeom>
+          <a:noFill/>
+        </p:spPr>
+        <p:txBody>
+          <a:bodyPr wrap="none" rtlCol="0">
+            <a:spAutoFit/>
+          </a:bodyPr>
+          <a:lstStyle/>
+          <a:p>
+            <a:r>
+              <a:rPr lang="fr-FR" sz="1276" b="1" dirty="0"/>
+              <a:t>v</a:t>
+            </a:r>
+            <a:r>
+              <a:rPr lang="fr-FR" sz="1276" b="1" baseline="-25000" dirty="0"/>
+              <a:t>2</a:t>
+            </a:r>
+          </a:p>
+        </p:txBody>
+      </p:sp>
+      <p:sp>
+        <p:nvSpPr>
+          <p:cNvPr id="27" name="ZoneTexte 26"/>
+          <p:cNvSpPr txBox="1"/>
+          <p:nvPr/>
+        </p:nvSpPr>
+        <p:spPr>
+          <a:xfrm>
+            <a:off x="3741714" y="5019286"/>
+            <a:ext cx="268022" cy="288669"/>
+          </a:xfrm>
+          <a:prstGeom prst="rect">
+            <a:avLst/>
+          </a:prstGeom>
+          <a:noFill/>
+        </p:spPr>
+        <p:txBody>
+          <a:bodyPr wrap="none" rtlCol="0">
+            <a:spAutoFit/>
+          </a:bodyPr>
+          <a:lstStyle/>
+          <a:p>
+            <a:r>
+              <a:rPr lang="fr-FR" sz="1276" b="1" dirty="0"/>
+              <a:t>0</a:t>
+            </a:r>
+          </a:p>
+        </p:txBody>
+      </p:sp>
+      <p:cxnSp>
+        <p:nvCxnSpPr>
+          <p:cNvPr id="28" name="Connecteur droit 27"/>
+          <p:cNvCxnSpPr/>
+          <p:nvPr/>
+        </p:nvCxnSpPr>
+        <p:spPr>
+          <a:xfrm flipH="1">
+            <a:off x="4782610" y="770463"/>
+            <a:ext cx="13466" cy="4782302"/>
+          </a:xfrm>
+          <a:prstGeom prst="line">
+            <a:avLst/>
+          </a:prstGeom>
+          <a:ln w="28575">
+            <a:prstDash val="dash"/>
+          </a:ln>
+        </p:spPr>
+        <p:style>
+          <a:lnRef idx="1">
+            <a:schemeClr val="dk1"/>
+          </a:lnRef>
+          <a:fillRef idx="0">
+            <a:schemeClr val="dk1"/>
+          </a:fillRef>
+          <a:effectRef idx="0">
+            <a:schemeClr val="dk1"/>
+          </a:effectRef>
+          <a:fontRef idx="minor">
+            <a:schemeClr val="tx1"/>
+          </a:fontRef>
+        </p:style>
+      </p:cxnSp>
+      <p:cxnSp>
+        <p:nvCxnSpPr>
+          <p:cNvPr id="29" name="Connecteur droit 28"/>
+          <p:cNvCxnSpPr/>
+          <p:nvPr/>
+        </p:nvCxnSpPr>
+        <p:spPr>
+          <a:xfrm>
+            <a:off x="5669972" y="770463"/>
+            <a:ext cx="0" cy="4782302"/>
+          </a:xfrm>
+          <a:prstGeom prst="line">
+            <a:avLst/>
+          </a:prstGeom>
+          <a:ln w="28575">
+            <a:prstDash val="dash"/>
+          </a:ln>
+        </p:spPr>
+        <p:style>
+          <a:lnRef idx="1">
+            <a:schemeClr val="dk1"/>
+          </a:lnRef>
+          <a:fillRef idx="0">
+            <a:schemeClr val="dk1"/>
+          </a:fillRef>
+          <a:effectRef idx="0">
+            <a:schemeClr val="dk1"/>
+          </a:effectRef>
+          <a:fontRef idx="minor">
+            <a:schemeClr val="tx1"/>
+          </a:fontRef>
+        </p:style>
+      </p:cxnSp>
+      <p:cxnSp>
+        <p:nvCxnSpPr>
+          <p:cNvPr id="30" name="Connecteur droit 29"/>
+          <p:cNvCxnSpPr/>
+          <p:nvPr/>
+        </p:nvCxnSpPr>
+        <p:spPr>
+          <a:xfrm>
+            <a:off x="6549758" y="770464"/>
+            <a:ext cx="0" cy="4782303"/>
+          </a:xfrm>
+          <a:prstGeom prst="line">
+            <a:avLst/>
+          </a:prstGeom>
+          <a:ln w="28575">
+            <a:prstDash val="dash"/>
+          </a:ln>
+        </p:spPr>
+        <p:style>
+          <a:lnRef idx="1">
+            <a:schemeClr val="dk1"/>
+          </a:lnRef>
+          <a:fillRef idx="0">
+            <a:schemeClr val="dk1"/>
+          </a:fillRef>
+          <a:effectRef idx="0">
+            <a:schemeClr val="dk1"/>
+          </a:effectRef>
+          <a:fontRef idx="minor">
+            <a:schemeClr val="tx1"/>
+          </a:fontRef>
+        </p:style>
+      </p:cxnSp>
+      <p:cxnSp>
+        <p:nvCxnSpPr>
+          <p:cNvPr id="31" name="Connecteur droit 30"/>
+          <p:cNvCxnSpPr/>
+          <p:nvPr/>
+        </p:nvCxnSpPr>
+        <p:spPr>
+          <a:xfrm>
+            <a:off x="7429545" y="770462"/>
+            <a:ext cx="0" cy="4782303"/>
+          </a:xfrm>
+          <a:prstGeom prst="line">
+            <a:avLst/>
+          </a:prstGeom>
+          <a:ln w="28575">
+            <a:prstDash val="dash"/>
+          </a:ln>
+        </p:spPr>
+        <p:style>
+          <a:lnRef idx="1">
+            <a:schemeClr val="dk1"/>
+          </a:lnRef>
+          <a:fillRef idx="0">
+            <a:schemeClr val="dk1"/>
+          </a:fillRef>
+          <a:effectRef idx="0">
+            <a:schemeClr val="dk1"/>
+          </a:effectRef>
+          <a:fontRef idx="minor">
+            <a:schemeClr val="tx1"/>
+          </a:fontRef>
+        </p:style>
+      </p:cxnSp>
+      <mc:AlternateContent xmlns:mc="http://schemas.openxmlformats.org/markup-compatibility/2006" xmlns:a14="http://schemas.microsoft.com/office/drawing/2010/main">
+        <mc:Choice Requires="a14">
+          <p:sp>
+            <p:nvSpPr>
+              <p:cNvPr id="32" name="ZoneTexte 31"/>
+              <p:cNvSpPr txBox="1"/>
+              <p:nvPr/>
+            </p:nvSpPr>
+            <p:spPr>
+              <a:xfrm>
+                <a:off x="6070392" y="1411289"/>
+                <a:ext cx="599844" cy="288669"/>
+              </a:xfrm>
+              <a:prstGeom prst="rect">
+                <a:avLst/>
+              </a:prstGeom>
+              <a:noFill/>
+            </p:spPr>
+            <p:txBody>
+              <a:bodyPr wrap="none" rtlCol="0">
+                <a:spAutoFit/>
+              </a:bodyPr>
+              <a:lstStyle/>
+              <a:p>
+                <a:pPr/>
+                <a14:m>
+                  <m:oMathPara xmlns:m="http://schemas.openxmlformats.org/officeDocument/2006/math">
+                    <m:oMath>
+                      <m:r>
+                        <a:rPr lang="fr-FR" sz="1276" b="1" i="1">
+                          <a:latin typeface="Cambria Math" panose="02040503050406030204" pitchFamily="18" charset="0"/>
+                        </a:rPr>
+                        <m:t>𝟑</m:t>
+                      </m:r>
+                      <m:r>
+                        <a:rPr lang="fr-FR" sz="1276" b="1" i="1">
+                          <a:latin typeface="Cambria Math" panose="02040503050406030204" pitchFamily="18" charset="0"/>
+                        </a:rPr>
+                        <m:t>𝑻</m:t>
+                      </m:r>
+                      <m:r>
+                        <a:rPr lang="fr-FR" sz="1276" b="1" i="1">
+                          <a:latin typeface="Cambria Math" panose="02040503050406030204" pitchFamily="18" charset="0"/>
+                        </a:rPr>
+                        <m:t>/</m:t>
+                      </m:r>
+                      <m:r>
+                        <a:rPr lang="fr-FR" sz="1276" b="1" i="1">
+                          <a:latin typeface="Cambria Math" panose="02040503050406030204" pitchFamily="18" charset="0"/>
+                        </a:rPr>
+                        <m:t>𝟐</m:t>
+                      </m:r>
+                    </m:oMath>
+                  </m:oMathPara>
+                </a14:m>
+                <a:endParaRPr lang="fr-FR" sz="1276" b="1" dirty="0"/>
+              </a:p>
+            </p:txBody>
+          </p:sp>
+        </mc:Choice>
+        <mc:Fallback xmlns="">
+          <p:sp>
+            <p:nvSpPr>
+              <p:cNvPr id="32" name="ZoneTexte 31"/>
+              <p:cNvSpPr txBox="1">
+                <a:spLocks noRot="1" noChangeAspect="1" noMove="1" noResize="1" noEditPoints="1" noAdjustHandles="1" noChangeArrowheads="1" noChangeShapeType="1" noTextEdit="1"/>
+              </p:cNvSpPr>
+              <p:nvPr/>
+            </p:nvSpPr>
+            <p:spPr>
+              <a:xfrm>
+                <a:off x="6070392" y="1411289"/>
+                <a:ext cx="599844" cy="288669"/>
+              </a:xfrm>
+              <a:prstGeom prst="rect">
+                <a:avLst/>
+              </a:prstGeom>
+              <a:blipFill>
+                <a:blip r:embed="rId4"/>
+                <a:stretch>
+                  <a:fillRect b="-8511"/>
+                </a:stretch>
+              </a:blipFill>
+            </p:spPr>
+            <p:txBody>
+              <a:bodyPr/>
+              <a:lstStyle/>
+              <a:p>
+                <a:r>
+                  <a:rPr lang="fr-FR">
+                    <a:noFill/>
+                  </a:rPr>
+                  <a:t> </a:t>
+                </a:r>
+              </a:p>
+            </p:txBody>
+          </p:sp>
+        </mc:Fallback>
+      </mc:AlternateContent>
+      <mc:AlternateContent xmlns:mc="http://schemas.openxmlformats.org/markup-compatibility/2006" xmlns:a14="http://schemas.microsoft.com/office/drawing/2010/main">
+        <mc:Choice Requires="a14">
+          <p:sp>
+            <p:nvSpPr>
+              <p:cNvPr id="33" name="ZoneTexte 32"/>
+              <p:cNvSpPr txBox="1"/>
+              <p:nvPr/>
+            </p:nvSpPr>
+            <p:spPr>
+              <a:xfrm>
+                <a:off x="7121707" y="1440964"/>
+                <a:ext cx="421910" cy="288669"/>
+              </a:xfrm>
+              <a:prstGeom prst="rect">
+                <a:avLst/>
+              </a:prstGeom>
+              <a:noFill/>
+            </p:spPr>
+            <p:txBody>
+              <a:bodyPr wrap="none" rtlCol="0">
+                <a:spAutoFit/>
+              </a:bodyPr>
+              <a:lstStyle/>
+              <a:p>
+                <a:pPr/>
+                <a14:m>
+                  <m:oMathPara xmlns:m="http://schemas.openxmlformats.org/officeDocument/2006/math">
+                    <m:oMath>
+                      <m:r>
+                        <a:rPr lang="fr-FR" sz="1276" b="1" i="1">
+                          <a:latin typeface="Cambria Math" panose="02040503050406030204" pitchFamily="18" charset="0"/>
+                        </a:rPr>
+                        <m:t>𝟐</m:t>
+                      </m:r>
+                      <m:r>
+                        <a:rPr lang="fr-FR" sz="1276" b="1" i="1">
+                          <a:latin typeface="Cambria Math" panose="02040503050406030204" pitchFamily="18" charset="0"/>
+                        </a:rPr>
+                        <m:t>𝑻</m:t>
+                      </m:r>
+                    </m:oMath>
+                  </m:oMathPara>
+                </a14:m>
+                <a:endParaRPr lang="fr-FR" sz="1276" b="1" dirty="0"/>
+              </a:p>
+            </p:txBody>
+          </p:sp>
+        </mc:Choice>
+        <mc:Fallback xmlns="">
+          <p:sp>
+            <p:nvSpPr>
+              <p:cNvPr id="33" name="ZoneTexte 32"/>
+              <p:cNvSpPr txBox="1">
+                <a:spLocks noRot="1" noChangeAspect="1" noMove="1" noResize="1" noEditPoints="1" noAdjustHandles="1" noChangeArrowheads="1" noChangeShapeType="1" noTextEdit="1"/>
+              </p:cNvSpPr>
+              <p:nvPr/>
+            </p:nvSpPr>
+            <p:spPr>
+              <a:xfrm>
+                <a:off x="7121707" y="1440964"/>
+                <a:ext cx="421910" cy="288669"/>
+              </a:xfrm>
+              <a:prstGeom prst="rect">
+                <a:avLst/>
+              </a:prstGeom>
+              <a:blipFill>
+                <a:blip r:embed="rId5"/>
+                <a:stretch>
+                  <a:fillRect/>
+                </a:stretch>
+              </a:blipFill>
+            </p:spPr>
+            <p:txBody>
+              <a:bodyPr/>
+              <a:lstStyle/>
+              <a:p>
+                <a:r>
+                  <a:rPr lang="fr-FR">
+                    <a:noFill/>
+                  </a:rPr>
+                  <a:t> </a:t>
+                </a:r>
+              </a:p>
+            </p:txBody>
+          </p:sp>
+        </mc:Fallback>
+      </mc:AlternateContent>
+      <p:sp>
+        <p:nvSpPr>
+          <p:cNvPr id="34" name="ZoneTexte 33"/>
+          <p:cNvSpPr txBox="1"/>
+          <p:nvPr/>
+        </p:nvSpPr>
+        <p:spPr>
+          <a:xfrm>
+            <a:off x="3602553" y="3306360"/>
+            <a:ext cx="279244" cy="288669"/>
+          </a:xfrm>
+          <a:prstGeom prst="rect">
+            <a:avLst/>
+          </a:prstGeom>
+          <a:noFill/>
+        </p:spPr>
+        <p:txBody>
+          <a:bodyPr wrap="none" rtlCol="0">
+            <a:spAutoFit/>
+          </a:bodyPr>
+          <a:lstStyle/>
+          <a:p>
+            <a:r>
+              <a:rPr lang="fr-FR" sz="1276" b="1" dirty="0"/>
+              <a:t>i</a:t>
+            </a:r>
+            <a:r>
+              <a:rPr lang="fr-FR" sz="1276" b="1" baseline="-25000" dirty="0"/>
+              <a:t>3</a:t>
+            </a:r>
+          </a:p>
+        </p:txBody>
+      </p:sp>
+      <p:cxnSp>
+        <p:nvCxnSpPr>
+          <p:cNvPr id="44" name="Connecteur droit 43"/>
+          <p:cNvCxnSpPr/>
+          <p:nvPr/>
+        </p:nvCxnSpPr>
+        <p:spPr>
+          <a:xfrm flipV="1">
+            <a:off x="3915767" y="978306"/>
+            <a:ext cx="0" cy="422405"/>
+          </a:xfrm>
+          <a:prstGeom prst="line">
+            <a:avLst/>
+          </a:prstGeom>
+          <a:ln w="38100">
+            <a:solidFill>
+              <a:srgbClr val="FF0000"/>
+            </a:solidFill>
+          </a:ln>
+        </p:spPr>
+        <p:style>
+          <a:lnRef idx="1">
+            <a:schemeClr val="accent1"/>
+          </a:lnRef>
+          <a:fillRef idx="0">
+            <a:schemeClr val="accent1"/>
+          </a:fillRef>
+          <a:effectRef idx="0">
+            <a:schemeClr val="accent1"/>
+          </a:effectRef>
+          <a:fontRef idx="minor">
+            <a:schemeClr val="tx1"/>
+          </a:fontRef>
+        </p:style>
+      </p:cxnSp>
+      <p:cxnSp>
+        <p:nvCxnSpPr>
+          <p:cNvPr id="47" name="Connecteur droit 46"/>
+          <p:cNvCxnSpPr/>
+          <p:nvPr/>
+        </p:nvCxnSpPr>
+        <p:spPr>
+          <a:xfrm flipV="1">
+            <a:off x="4337430" y="978305"/>
+            <a:ext cx="0" cy="422405"/>
+          </a:xfrm>
+          <a:prstGeom prst="line">
+            <a:avLst/>
+          </a:prstGeom>
+          <a:ln w="38100">
+            <a:solidFill>
+              <a:srgbClr val="FF0000"/>
+            </a:solidFill>
+          </a:ln>
+        </p:spPr>
+        <p:style>
+          <a:lnRef idx="1">
+            <a:schemeClr val="accent1"/>
+          </a:lnRef>
+          <a:fillRef idx="0">
+            <a:schemeClr val="accent1"/>
+          </a:fillRef>
+          <a:effectRef idx="0">
+            <a:schemeClr val="accent1"/>
+          </a:effectRef>
+          <a:fontRef idx="minor">
+            <a:schemeClr val="tx1"/>
+          </a:fontRef>
+        </p:style>
+      </p:cxnSp>
+      <p:cxnSp>
+        <p:nvCxnSpPr>
+          <p:cNvPr id="48" name="Connecteur droit 47"/>
+          <p:cNvCxnSpPr/>
+          <p:nvPr/>
+        </p:nvCxnSpPr>
+        <p:spPr>
+          <a:xfrm>
+            <a:off x="3900374" y="994926"/>
+            <a:ext cx="437056" cy="0"/>
+          </a:xfrm>
+          <a:prstGeom prst="line">
+            <a:avLst/>
+          </a:prstGeom>
+          <a:ln w="38100">
+            <a:solidFill>
+              <a:srgbClr val="FF0000"/>
+            </a:solidFill>
+          </a:ln>
+        </p:spPr>
+        <p:style>
+          <a:lnRef idx="1">
+            <a:schemeClr val="accent1"/>
+          </a:lnRef>
+          <a:fillRef idx="0">
+            <a:schemeClr val="accent1"/>
+          </a:fillRef>
+          <a:effectRef idx="0">
+            <a:schemeClr val="accent1"/>
+          </a:effectRef>
+          <a:fontRef idx="minor">
+            <a:schemeClr val="tx1"/>
+          </a:fontRef>
+        </p:style>
+      </p:cxnSp>
+      <p:cxnSp>
+        <p:nvCxnSpPr>
+          <p:cNvPr id="56" name="Connecteur droit 55"/>
+          <p:cNvCxnSpPr/>
+          <p:nvPr/>
+        </p:nvCxnSpPr>
+        <p:spPr>
+          <a:xfrm>
+            <a:off x="4333416" y="1411289"/>
+            <a:ext cx="1352277" cy="0"/>
+          </a:xfrm>
+          <a:prstGeom prst="line">
+            <a:avLst/>
+          </a:prstGeom>
+          <a:ln w="38100">
+            <a:solidFill>
+              <a:srgbClr val="FF0000"/>
+            </a:solidFill>
+          </a:ln>
+        </p:spPr>
+        <p:style>
+          <a:lnRef idx="1">
+            <a:schemeClr val="accent1"/>
+          </a:lnRef>
+          <a:fillRef idx="0">
+            <a:schemeClr val="accent1"/>
+          </a:fillRef>
+          <a:effectRef idx="0">
+            <a:schemeClr val="accent1"/>
+          </a:effectRef>
+          <a:fontRef idx="minor">
+            <a:schemeClr val="tx1"/>
+          </a:fontRef>
+        </p:style>
+      </p:cxnSp>
+      <p:cxnSp>
+        <p:nvCxnSpPr>
+          <p:cNvPr id="58" name="Connecteur droit 57"/>
+          <p:cNvCxnSpPr/>
+          <p:nvPr/>
+        </p:nvCxnSpPr>
+        <p:spPr>
+          <a:xfrm>
+            <a:off x="6096441" y="1415347"/>
+            <a:ext cx="1345079" cy="0"/>
+          </a:xfrm>
+          <a:prstGeom prst="line">
+            <a:avLst/>
+          </a:prstGeom>
+          <a:ln w="38100">
+            <a:solidFill>
+              <a:srgbClr val="FF0000"/>
+            </a:solidFill>
+          </a:ln>
+        </p:spPr>
+        <p:style>
+          <a:lnRef idx="1">
+            <a:schemeClr val="accent1"/>
+          </a:lnRef>
+          <a:fillRef idx="0">
+            <a:schemeClr val="accent1"/>
+          </a:fillRef>
+          <a:effectRef idx="0">
+            <a:schemeClr val="accent1"/>
+          </a:effectRef>
+          <a:fontRef idx="minor">
+            <a:schemeClr val="tx1"/>
+          </a:fontRef>
+        </p:style>
+      </p:cxnSp>
+      <p:cxnSp>
+        <p:nvCxnSpPr>
+          <p:cNvPr id="67" name="Connecteur droit 66"/>
+          <p:cNvCxnSpPr/>
+          <p:nvPr/>
+        </p:nvCxnSpPr>
+        <p:spPr>
+          <a:xfrm flipV="1">
+            <a:off x="7431121" y="981480"/>
+            <a:ext cx="0" cy="422405"/>
+          </a:xfrm>
+          <a:prstGeom prst="line">
+            <a:avLst/>
+          </a:prstGeom>
+          <a:ln w="38100">
+            <a:solidFill>
+              <a:srgbClr val="FF0000"/>
+            </a:solidFill>
+          </a:ln>
+        </p:spPr>
+        <p:style>
+          <a:lnRef idx="1">
+            <a:schemeClr val="accent1"/>
+          </a:lnRef>
+          <a:fillRef idx="0">
+            <a:schemeClr val="accent1"/>
+          </a:fillRef>
+          <a:effectRef idx="0">
+            <a:schemeClr val="accent1"/>
+          </a:effectRef>
+          <a:fontRef idx="minor">
+            <a:schemeClr val="tx1"/>
+          </a:fontRef>
+        </p:style>
+      </p:cxnSp>
+      <p:cxnSp>
+        <p:nvCxnSpPr>
+          <p:cNvPr id="68" name="Connecteur droit 67"/>
+          <p:cNvCxnSpPr/>
+          <p:nvPr/>
+        </p:nvCxnSpPr>
+        <p:spPr>
+          <a:xfrm>
+            <a:off x="7415728" y="998100"/>
+            <a:ext cx="313707" cy="0"/>
+          </a:xfrm>
+          <a:prstGeom prst="line">
+            <a:avLst/>
+          </a:prstGeom>
+          <a:ln w="38100">
+            <a:solidFill>
+              <a:srgbClr val="FF0000"/>
+            </a:solidFill>
+          </a:ln>
+        </p:spPr>
+        <p:style>
+          <a:lnRef idx="1">
+            <a:schemeClr val="accent1"/>
+          </a:lnRef>
+          <a:fillRef idx="0">
+            <a:schemeClr val="accent1"/>
+          </a:fillRef>
+          <a:effectRef idx="0">
+            <a:schemeClr val="accent1"/>
+          </a:effectRef>
+          <a:fontRef idx="minor">
+            <a:schemeClr val="tx1"/>
+          </a:fontRef>
+        </p:style>
+      </p:cxnSp>
+      <p:cxnSp>
+        <p:nvCxnSpPr>
+          <p:cNvPr id="92" name="Connecteur droit avec flèche 91"/>
+          <p:cNvCxnSpPr/>
+          <p:nvPr/>
+        </p:nvCxnSpPr>
+        <p:spPr>
+          <a:xfrm>
+            <a:off x="3917863" y="1517196"/>
+            <a:ext cx="307009" cy="0"/>
+          </a:xfrm>
+          <a:prstGeom prst="straightConnector1">
+            <a:avLst/>
+          </a:prstGeom>
+          <a:ln w="19050">
+            <a:solidFill>
+              <a:srgbClr val="FF0000"/>
+            </a:solidFill>
+            <a:headEnd type="triangle" w="med" len="med"/>
+            <a:tailEnd type="triangle" w="med" len="med"/>
+          </a:ln>
+        </p:spPr>
+        <p:style>
+          <a:lnRef idx="1">
+            <a:schemeClr val="dk1"/>
+          </a:lnRef>
+          <a:fillRef idx="0">
+            <a:schemeClr val="dk1"/>
+          </a:fillRef>
+          <a:effectRef idx="0">
+            <a:schemeClr val="dk1"/>
+          </a:effectRef>
+          <a:fontRef idx="minor">
+            <a:schemeClr val="tx1"/>
+          </a:fontRef>
+        </p:style>
+      </p:cxnSp>
+      <mc:AlternateContent xmlns:mc="http://schemas.openxmlformats.org/markup-compatibility/2006" xmlns:a14="http://schemas.microsoft.com/office/drawing/2010/main">
+        <mc:Choice Requires="a14">
+          <p:sp>
+            <p:nvSpPr>
+              <p:cNvPr id="95" name="ZoneTexte 94"/>
+              <p:cNvSpPr txBox="1"/>
+              <p:nvPr/>
+            </p:nvSpPr>
+            <p:spPr>
+              <a:xfrm>
+                <a:off x="3844026" y="1487350"/>
+                <a:ext cx="434734" cy="288669"/>
+              </a:xfrm>
+              <a:prstGeom prst="rect">
+                <a:avLst/>
+              </a:prstGeom>
+              <a:noFill/>
+            </p:spPr>
+            <p:txBody>
+              <a:bodyPr wrap="none" rtlCol="0">
+                <a:spAutoFit/>
+              </a:bodyPr>
+              <a:lstStyle/>
+              <a:p>
+                <a:pPr/>
+                <a14:m>
+                  <m:oMathPara xmlns:m="http://schemas.openxmlformats.org/officeDocument/2006/math">
+                    <m:oMath>
                       <m:r>
                         <a:rPr lang="el-GR" sz="1276" b="1" i="1" smtClean="0">
                           <a:solidFill>
@@ -7982,10 +9810,7 @@
                 <a:pPr/>
                 <a14:m>
                   <m:oMathPara xmlns:m="http://schemas.openxmlformats.org/officeDocument/2006/math">
-                    <m:oMathParaPr>
-                      <m:jc m:val="centerGroup"/>
-                    </m:oMathParaPr>
-                    <m:oMath xmlns:m="http://schemas.openxmlformats.org/officeDocument/2006/math">
+                    <m:oMath>
                       <m:r>
                         <a:rPr lang="fr-FR" sz="1276" b="1" i="1">
                           <a:latin typeface="Cambria Math" panose="02040503050406030204" pitchFamily="18" charset="0"/>
@@ -8844,10 +10669,7 @@
                 <a:pPr/>
                 <a14:m>
                   <m:oMathPara xmlns:m="http://schemas.openxmlformats.org/officeDocument/2006/math">
-                    <m:oMathParaPr>
-                      <m:jc m:val="centerGroup"/>
-                    </m:oMathParaPr>
-                    <m:oMath xmlns:m="http://schemas.openxmlformats.org/officeDocument/2006/math">
+                    <m:oMath>
                       <m:r>
                         <a:rPr lang="fr-FR" sz="1276" b="1" i="1">
                           <a:latin typeface="Cambria Math" panose="02040503050406030204" pitchFamily="18" charset="0"/>
@@ -8946,10 +10768,7 @@
                 <a:pPr/>
                 <a14:m>
                   <m:oMathPara xmlns:m="http://schemas.openxmlformats.org/officeDocument/2006/math">
-                    <m:oMathParaPr>
-                      <m:jc m:val="centerGroup"/>
-                    </m:oMathParaPr>
-                    <m:oMath xmlns:m="http://schemas.openxmlformats.org/officeDocument/2006/math">
+                    <m:oMath>
                       <m:r>
                         <a:rPr lang="fr-FR" sz="1276" b="1" i="1">
                           <a:latin typeface="Cambria Math" panose="02040503050406030204" pitchFamily="18" charset="0"/>
@@ -10441,10 +12260,7 @@
                 <a:pPr/>
                 <a14:m>
                   <m:oMathPara xmlns:m="http://schemas.openxmlformats.org/officeDocument/2006/math">
-                    <m:oMathParaPr>
-                      <m:jc m:val="centerGroup"/>
-                    </m:oMathParaPr>
-                    <m:oMath xmlns:m="http://schemas.openxmlformats.org/officeDocument/2006/math">
+                    <m:oMath>
                       <m:r>
                         <a:rPr lang="el-GR" sz="1276" b="1" i="1" smtClean="0">
                           <a:solidFill>
@@ -10578,10 +12394,7 @@
                 <a:pPr/>
                 <a14:m>
                   <m:oMathPara xmlns:m="http://schemas.openxmlformats.org/officeDocument/2006/math">
-                    <m:oMathParaPr>
-                      <m:jc m:val="centerGroup"/>
-                    </m:oMathParaPr>
-                    <m:oMath xmlns:m="http://schemas.openxmlformats.org/officeDocument/2006/math">
+                    <m:oMath>
                       <m:r>
                         <a:rPr lang="el-GR" sz="1276" b="1" i="1" smtClean="0">
                           <a:solidFill>
@@ -10891,10 +12704,7 @@
                 <a:pPr/>
                 <a14:m>
                   <m:oMathPara xmlns:m="http://schemas.openxmlformats.org/officeDocument/2006/math">
-                    <m:oMathParaPr>
-                      <m:jc m:val="centerGroup"/>
-                    </m:oMathParaPr>
-                    <m:oMath xmlns:m="http://schemas.openxmlformats.org/officeDocument/2006/math">
+                    <m:oMath>
                       <m:r>
                         <a:rPr lang="fr-FR" sz="1276" b="1" i="1">
                           <a:latin typeface="Cambria Math" panose="02040503050406030204" pitchFamily="18" charset="0"/>
@@ -11753,10 +13563,7 @@
                 <a:pPr/>
                 <a14:m>
                   <m:oMathPara xmlns:m="http://schemas.openxmlformats.org/officeDocument/2006/math">
-                    <m:oMathParaPr>
-                      <m:jc m:val="centerGroup"/>
-                    </m:oMathParaPr>
-                    <m:oMath xmlns:m="http://schemas.openxmlformats.org/officeDocument/2006/math">
+                    <m:oMath>
                       <m:r>
                         <a:rPr lang="fr-FR" sz="1276" b="1" i="1">
                           <a:latin typeface="Cambria Math" panose="02040503050406030204" pitchFamily="18" charset="0"/>
@@ -11855,10 +13662,7 @@
                 <a:pPr/>
                 <a14:m>
                   <m:oMathPara xmlns:m="http://schemas.openxmlformats.org/officeDocument/2006/math">
-                    <m:oMathParaPr>
-                      <m:jc m:val="centerGroup"/>
-                    </m:oMathParaPr>
-                    <m:oMath xmlns:m="http://schemas.openxmlformats.org/officeDocument/2006/math">
+                    <m:oMath>
                       <m:r>
                         <a:rPr lang="fr-FR" sz="1276" b="1" i="1">
                           <a:latin typeface="Cambria Math" panose="02040503050406030204" pitchFamily="18" charset="0"/>
@@ -13315,10 +15119,7 @@
                 <a:pPr/>
                 <a14:m>
                   <m:oMathPara xmlns:m="http://schemas.openxmlformats.org/officeDocument/2006/math">
-                    <m:oMathParaPr>
-                      <m:jc m:val="centerGroup"/>
-                    </m:oMathParaPr>
-                    <m:oMath xmlns:m="http://schemas.openxmlformats.org/officeDocument/2006/math">
+                    <m:oMath>
                       <m:r>
                         <a:rPr lang="el-GR" sz="1276" b="1" i="1" smtClean="0">
                           <a:solidFill>
@@ -13452,10 +15253,7 @@
                 <a:pPr/>
                 <a14:m>
                   <m:oMathPara xmlns:m="http://schemas.openxmlformats.org/officeDocument/2006/math">
-                    <m:oMathParaPr>
-                      <m:jc m:val="centerGroup"/>
-                    </m:oMathParaPr>
-                    <m:oMath xmlns:m="http://schemas.openxmlformats.org/officeDocument/2006/math">
+                    <m:oMath>
                       <m:r>
                         <a:rPr lang="el-GR" sz="1276" b="1" i="1" smtClean="0">
                           <a:solidFill>
@@ -13900,10 +15698,7 @@
                 <a:pPr/>
                 <a14:m>
                   <m:oMathPara xmlns:m="http://schemas.openxmlformats.org/officeDocument/2006/math">
-                    <m:oMathParaPr>
-                      <m:jc m:val="centerGroup"/>
-                    </m:oMathParaPr>
-                    <m:oMath xmlns:m="http://schemas.openxmlformats.org/officeDocument/2006/math">
+                    <m:oMath>
                       <m:r>
                         <a:rPr lang="fr-FR" sz="1276" b="1" i="1">
                           <a:latin typeface="Cambria Math" panose="02040503050406030204" pitchFamily="18" charset="0"/>
@@ -14762,10 +16557,7 @@
                 <a:pPr/>
                 <a14:m>
                   <m:oMathPara xmlns:m="http://schemas.openxmlformats.org/officeDocument/2006/math">
-                    <m:oMathParaPr>
-                      <m:jc m:val="centerGroup"/>
-                    </m:oMathParaPr>
-                    <m:oMath xmlns:m="http://schemas.openxmlformats.org/officeDocument/2006/math">
+                    <m:oMath>
                       <m:r>
                         <a:rPr lang="fr-FR" sz="1276" b="1" i="1">
                           <a:latin typeface="Cambria Math" panose="02040503050406030204" pitchFamily="18" charset="0"/>
@@ -14864,10 +16656,7 @@
                 <a:pPr/>
                 <a14:m>
                   <m:oMathPara xmlns:m="http://schemas.openxmlformats.org/officeDocument/2006/math">
-                    <m:oMathParaPr>
-                      <m:jc m:val="centerGroup"/>
-                    </m:oMathParaPr>
-                    <m:oMath xmlns:m="http://schemas.openxmlformats.org/officeDocument/2006/math">
+                    <m:oMath>
                       <m:r>
                         <a:rPr lang="fr-FR" sz="1276" b="1" i="1">
                           <a:latin typeface="Cambria Math" panose="02040503050406030204" pitchFamily="18" charset="0"/>
@@ -15729,10 +17518,7 @@
                 <a:pPr/>
                 <a14:m>
                   <m:oMathPara xmlns:m="http://schemas.openxmlformats.org/officeDocument/2006/math">
-                    <m:oMathParaPr>
-                      <m:jc m:val="centerGroup"/>
-                    </m:oMathParaPr>
-                    <m:oMath xmlns:m="http://schemas.openxmlformats.org/officeDocument/2006/math">
+                    <m:oMath>
                       <m:r>
                         <a:rPr lang="el-GR" sz="1276" b="1" i="1" smtClean="0">
                           <a:solidFill>
@@ -16042,10 +17828,7 @@
                 <a:pPr/>
                 <a14:m>
                   <m:oMathPara xmlns:m="http://schemas.openxmlformats.org/officeDocument/2006/math">
-                    <m:oMathParaPr>
-                      <m:jc m:val="centerGroup"/>
-                    </m:oMathParaPr>
-                    <m:oMath xmlns:m="http://schemas.openxmlformats.org/officeDocument/2006/math">
+                    <m:oMath>
                       <m:r>
                         <a:rPr lang="fr-FR" sz="1276" b="1" i="1">
                           <a:latin typeface="Cambria Math" panose="02040503050406030204" pitchFamily="18" charset="0"/>
@@ -16904,10 +18687,7 @@
                 <a:pPr/>
                 <a14:m>
                   <m:oMathPara xmlns:m="http://schemas.openxmlformats.org/officeDocument/2006/math">
-                    <m:oMathParaPr>
-                      <m:jc m:val="centerGroup"/>
-                    </m:oMathParaPr>
-                    <m:oMath xmlns:m="http://schemas.openxmlformats.org/officeDocument/2006/math">
+                    <m:oMath>
                       <m:r>
                         <a:rPr lang="fr-FR" sz="1276" b="1" i="1">
                           <a:latin typeface="Cambria Math" panose="02040503050406030204" pitchFamily="18" charset="0"/>
@@ -17006,10 +18786,7 @@
                 <a:pPr/>
                 <a14:m>
                   <m:oMathPara xmlns:m="http://schemas.openxmlformats.org/officeDocument/2006/math">
-                    <m:oMathParaPr>
-                      <m:jc m:val="centerGroup"/>
-                    </m:oMathParaPr>
-                    <m:oMath xmlns:m="http://schemas.openxmlformats.org/officeDocument/2006/math">
+                    <m:oMath>
                       <m:r>
                         <a:rPr lang="fr-FR" sz="1276" b="1" i="1">
                           <a:latin typeface="Cambria Math" panose="02040503050406030204" pitchFamily="18" charset="0"/>
@@ -17836,10 +19613,7 @@
                 <a:pPr/>
                 <a14:m>
                   <m:oMathPara xmlns:m="http://schemas.openxmlformats.org/officeDocument/2006/math">
-                    <m:oMathParaPr>
-                      <m:jc m:val="centerGroup"/>
-                    </m:oMathParaPr>
-                    <m:oMath xmlns:m="http://schemas.openxmlformats.org/officeDocument/2006/math">
+                    <m:oMath>
                       <m:r>
                         <a:rPr lang="el-GR" sz="1276" b="1" i="1" smtClean="0">
                           <a:solidFill>
@@ -19756,6 +21530,566 @@
   <p:cSld>
     <p:spTree>
       <p:nvGrpSpPr>
+        <p:cNvPr id="1" name="">
+          <a:extLst>
+            <a:ext uri="{FF2B5EF4-FFF2-40B4-BE49-F238E27FC236}">
+              <a16:creationId xmlns:a16="http://schemas.microsoft.com/office/drawing/2014/main" id="{3ACE1458-6101-43E8-FE59-D2D76F83B7F2}"/>
+            </a:ext>
+          </a:extLst>
+        </p:cNvPr>
+        <p:cNvGrpSpPr/>
+        <p:nvPr/>
+      </p:nvGrpSpPr>
+      <p:grpSpPr>
+        <a:xfrm>
+          <a:off x="0" y="0"/>
+          <a:ext cx="0" cy="0"/>
+          <a:chOff x="0" y="0"/>
+          <a:chExt cx="0" cy="0"/>
+        </a:xfrm>
+      </p:grpSpPr>
+      <p:pic>
+        <p:nvPicPr>
+          <p:cNvPr id="4" name="Image 3">
+            <a:extLst>
+              <a:ext uri="{FF2B5EF4-FFF2-40B4-BE49-F238E27FC236}">
+                <a16:creationId xmlns:a16="http://schemas.microsoft.com/office/drawing/2014/main" id="{2338A0D6-8EB8-41DB-823C-283287F15F6C}"/>
+              </a:ext>
+            </a:extLst>
+          </p:cNvPr>
+          <p:cNvPicPr>
+            <a:picLocks noChangeAspect="1"/>
+          </p:cNvPicPr>
+          <p:nvPr/>
+        </p:nvPicPr>
+        <p:blipFill>
+          <a:blip r:embed="rId2">
+            <a:extLst>
+              <a:ext uri="{28A0092B-C50C-407E-A947-70E740481C1C}">
+                <a14:useLocalDpi xmlns:a14="http://schemas.microsoft.com/office/drawing/2010/main" val="0"/>
+              </a:ext>
+            </a:extLst>
+          </a:blip>
+          <a:srcRect b="24280"/>
+          <a:stretch>
+            <a:fillRect/>
+          </a:stretch>
+        </p:blipFill>
+        <p:spPr>
+          <a:xfrm>
+            <a:off x="1166812" y="638175"/>
+            <a:ext cx="9858375" cy="4226433"/>
+          </a:xfrm>
+          <a:prstGeom prst="rect">
+            <a:avLst/>
+          </a:prstGeom>
+        </p:spPr>
+      </p:pic>
+      <p:sp>
+        <p:nvSpPr>
+          <p:cNvPr id="2" name="Rectangle : coins arrondis 1">
+            <a:extLst>
+              <a:ext uri="{FF2B5EF4-FFF2-40B4-BE49-F238E27FC236}">
+                <a16:creationId xmlns:a16="http://schemas.microsoft.com/office/drawing/2014/main" id="{A6D83C05-C7B4-738C-031F-00A5A705E84E}"/>
+              </a:ext>
+            </a:extLst>
+          </p:cNvPr>
+          <p:cNvSpPr/>
+          <p:nvPr/>
+        </p:nvSpPr>
+        <p:spPr>
+          <a:xfrm>
+            <a:off x="1819656" y="4581144"/>
+            <a:ext cx="2267712" cy="1335024"/>
+          </a:xfrm>
+          <a:prstGeom prst="roundRect">
+            <a:avLst/>
+          </a:prstGeom>
+          <a:noFill/>
+          <a:ln w="19050">
+            <a:solidFill>
+              <a:schemeClr val="tx1"/>
+            </a:solidFill>
+          </a:ln>
+        </p:spPr>
+        <p:style>
+          <a:lnRef idx="2">
+            <a:schemeClr val="accent1">
+              <a:shade val="15000"/>
+            </a:schemeClr>
+          </a:lnRef>
+          <a:fillRef idx="1">
+            <a:schemeClr val="accent1"/>
+          </a:fillRef>
+          <a:effectRef idx="0">
+            <a:schemeClr val="accent1"/>
+          </a:effectRef>
+          <a:fontRef idx="minor">
+            <a:schemeClr val="lt1"/>
+          </a:fontRef>
+        </p:style>
+        <p:txBody>
+          <a:bodyPr rtlCol="0" anchor="ctr"/>
+          <a:lstStyle/>
+          <a:p>
+            <a:pPr algn="ctr"/>
+            <a:r>
+              <a:rPr lang="fr-FR" dirty="0">
+                <a:solidFill>
+                  <a:schemeClr val="tx1"/>
+                </a:solidFill>
+              </a:rPr>
+              <a:t>Control box</a:t>
+            </a:r>
+          </a:p>
+        </p:txBody>
+      </p:sp>
+      <p:sp>
+        <p:nvSpPr>
+          <p:cNvPr id="3" name="ZoneTexte 2">
+            <a:extLst>
+              <a:ext uri="{FF2B5EF4-FFF2-40B4-BE49-F238E27FC236}">
+                <a16:creationId xmlns:a16="http://schemas.microsoft.com/office/drawing/2014/main" id="{3E9489BC-AE3A-1DCA-18FB-0F6B53BF5814}"/>
+              </a:ext>
+            </a:extLst>
+          </p:cNvPr>
+          <p:cNvSpPr txBox="1"/>
+          <p:nvPr/>
+        </p:nvSpPr>
+        <p:spPr>
+          <a:xfrm>
+            <a:off x="3465576" y="4697890"/>
+            <a:ext cx="621792" cy="461665"/>
+          </a:xfrm>
+          <a:prstGeom prst="rect">
+            <a:avLst/>
+          </a:prstGeom>
+          <a:noFill/>
+        </p:spPr>
+        <p:txBody>
+          <a:bodyPr wrap="square" rtlCol="0">
+            <a:spAutoFit/>
+          </a:bodyPr>
+          <a:lstStyle/>
+          <a:p>
+            <a:r>
+              <a:rPr lang="fr-FR" sz="1200" dirty="0"/>
+              <a:t>TOP1 /</a:t>
+            </a:r>
+          </a:p>
+          <a:p>
+            <a:r>
+              <a:rPr lang="fr-FR" sz="1200" dirty="0"/>
+              <a:t>BOT 2</a:t>
+            </a:r>
+          </a:p>
+        </p:txBody>
+      </p:sp>
+      <p:sp>
+        <p:nvSpPr>
+          <p:cNvPr id="8" name="ZoneTexte 7">
+            <a:extLst>
+              <a:ext uri="{FF2B5EF4-FFF2-40B4-BE49-F238E27FC236}">
+                <a16:creationId xmlns:a16="http://schemas.microsoft.com/office/drawing/2014/main" id="{19C49D94-66BB-9452-221B-55A9C463D52D}"/>
+              </a:ext>
+            </a:extLst>
+          </p:cNvPr>
+          <p:cNvSpPr txBox="1"/>
+          <p:nvPr/>
+        </p:nvSpPr>
+        <p:spPr>
+          <a:xfrm>
+            <a:off x="3465576" y="5307029"/>
+            <a:ext cx="621792" cy="461665"/>
+          </a:xfrm>
+          <a:prstGeom prst="rect">
+            <a:avLst/>
+          </a:prstGeom>
+          <a:noFill/>
+        </p:spPr>
+        <p:txBody>
+          <a:bodyPr wrap="square" rtlCol="0">
+            <a:spAutoFit/>
+          </a:bodyPr>
+          <a:lstStyle/>
+          <a:p>
+            <a:r>
+              <a:rPr lang="fr-FR" sz="1200" dirty="0"/>
+              <a:t>TOP2 /</a:t>
+            </a:r>
+          </a:p>
+          <a:p>
+            <a:r>
+              <a:rPr lang="fr-FR" sz="1200" dirty="0"/>
+              <a:t>BOT 1</a:t>
+            </a:r>
+          </a:p>
+        </p:txBody>
+      </p:sp>
+      <p:sp>
+        <p:nvSpPr>
+          <p:cNvPr id="12" name="ZoneTexte 11">
+            <a:extLst>
+              <a:ext uri="{FF2B5EF4-FFF2-40B4-BE49-F238E27FC236}">
+                <a16:creationId xmlns:a16="http://schemas.microsoft.com/office/drawing/2014/main" id="{57C5753D-D758-6E67-DF10-4245D722D4DC}"/>
+              </a:ext>
+            </a:extLst>
+          </p:cNvPr>
+          <p:cNvSpPr txBox="1"/>
+          <p:nvPr/>
+        </p:nvSpPr>
+        <p:spPr>
+          <a:xfrm>
+            <a:off x="1883664" y="4697890"/>
+            <a:ext cx="530352" cy="276999"/>
+          </a:xfrm>
+          <a:prstGeom prst="rect">
+            <a:avLst/>
+          </a:prstGeom>
+          <a:noFill/>
+        </p:spPr>
+        <p:txBody>
+          <a:bodyPr wrap="square" rtlCol="0">
+            <a:spAutoFit/>
+          </a:bodyPr>
+          <a:lstStyle/>
+          <a:p>
+            <a:r>
+              <a:rPr lang="fr-FR" sz="1200" dirty="0"/>
+              <a:t>+15V</a:t>
+            </a:r>
+          </a:p>
+        </p:txBody>
+      </p:sp>
+      <p:sp>
+        <p:nvSpPr>
+          <p:cNvPr id="14" name="ZoneTexte 13">
+            <a:extLst>
+              <a:ext uri="{FF2B5EF4-FFF2-40B4-BE49-F238E27FC236}">
+                <a16:creationId xmlns:a16="http://schemas.microsoft.com/office/drawing/2014/main" id="{48688A21-AD29-E35F-27E1-97D3CA7FA66A}"/>
+              </a:ext>
+            </a:extLst>
+          </p:cNvPr>
+          <p:cNvSpPr txBox="1"/>
+          <p:nvPr/>
+        </p:nvSpPr>
+        <p:spPr>
+          <a:xfrm>
+            <a:off x="2468880" y="4697889"/>
+            <a:ext cx="530352" cy="276999"/>
+          </a:xfrm>
+          <a:prstGeom prst="rect">
+            <a:avLst/>
+          </a:prstGeom>
+          <a:noFill/>
+        </p:spPr>
+        <p:txBody>
+          <a:bodyPr wrap="square" rtlCol="0">
+            <a:spAutoFit/>
+          </a:bodyPr>
+          <a:lstStyle/>
+          <a:p>
+            <a:r>
+              <a:rPr lang="fr-FR" sz="1200" dirty="0"/>
+              <a:t>GND</a:t>
+            </a:r>
+          </a:p>
+        </p:txBody>
+      </p:sp>
+      <p:cxnSp>
+        <p:nvCxnSpPr>
+          <p:cNvPr id="16" name="Connecteur droit 15">
+            <a:extLst>
+              <a:ext uri="{FF2B5EF4-FFF2-40B4-BE49-F238E27FC236}">
+                <a16:creationId xmlns:a16="http://schemas.microsoft.com/office/drawing/2014/main" id="{648B0ADA-D500-5A71-FCB8-E85975EC8356}"/>
+              </a:ext>
+            </a:extLst>
+          </p:cNvPr>
+          <p:cNvCxnSpPr/>
+          <p:nvPr/>
+        </p:nvCxnSpPr>
+        <p:spPr>
+          <a:xfrm flipV="1">
+            <a:off x="2148840" y="4242816"/>
+            <a:ext cx="0" cy="338328"/>
+          </a:xfrm>
+          <a:prstGeom prst="line">
+            <a:avLst/>
+          </a:prstGeom>
+          <a:ln w="28575">
+            <a:solidFill>
+              <a:srgbClr val="FF0000"/>
+            </a:solidFill>
+          </a:ln>
+        </p:spPr>
+        <p:style>
+          <a:lnRef idx="1">
+            <a:schemeClr val="accent1"/>
+          </a:lnRef>
+          <a:fillRef idx="0">
+            <a:schemeClr val="accent1"/>
+          </a:fillRef>
+          <a:effectRef idx="0">
+            <a:schemeClr val="accent1"/>
+          </a:effectRef>
+          <a:fontRef idx="minor">
+            <a:schemeClr val="tx1"/>
+          </a:fontRef>
+        </p:style>
+      </p:cxnSp>
+      <p:cxnSp>
+        <p:nvCxnSpPr>
+          <p:cNvPr id="17" name="Connecteur droit 16">
+            <a:extLst>
+              <a:ext uri="{FF2B5EF4-FFF2-40B4-BE49-F238E27FC236}">
+                <a16:creationId xmlns:a16="http://schemas.microsoft.com/office/drawing/2014/main" id="{81CE3CF0-D908-31DA-324F-1DF5A3EA6F72}"/>
+              </a:ext>
+            </a:extLst>
+          </p:cNvPr>
+          <p:cNvCxnSpPr/>
+          <p:nvPr/>
+        </p:nvCxnSpPr>
+        <p:spPr>
+          <a:xfrm flipV="1">
+            <a:off x="2721864" y="4242816"/>
+            <a:ext cx="0" cy="338328"/>
+          </a:xfrm>
+          <a:prstGeom prst="line">
+            <a:avLst/>
+          </a:prstGeom>
+          <a:ln w="28575">
+            <a:solidFill>
+              <a:srgbClr val="FF0000"/>
+            </a:solidFill>
+          </a:ln>
+        </p:spPr>
+        <p:style>
+          <a:lnRef idx="1">
+            <a:schemeClr val="accent1"/>
+          </a:lnRef>
+          <a:fillRef idx="0">
+            <a:schemeClr val="accent1"/>
+          </a:fillRef>
+          <a:effectRef idx="0">
+            <a:schemeClr val="accent1"/>
+          </a:effectRef>
+          <a:fontRef idx="minor">
+            <a:schemeClr val="tx1"/>
+          </a:fontRef>
+        </p:style>
+      </p:cxnSp>
+      <p:cxnSp>
+        <p:nvCxnSpPr>
+          <p:cNvPr id="18" name="Connecteur droit 17">
+            <a:extLst>
+              <a:ext uri="{FF2B5EF4-FFF2-40B4-BE49-F238E27FC236}">
+                <a16:creationId xmlns:a16="http://schemas.microsoft.com/office/drawing/2014/main" id="{009DB122-3BD3-22D3-A83A-9C80A5E0773C}"/>
+              </a:ext>
+            </a:extLst>
+          </p:cNvPr>
+          <p:cNvCxnSpPr>
+            <a:cxnSpLocks/>
+          </p:cNvCxnSpPr>
+          <p:nvPr/>
+        </p:nvCxnSpPr>
+        <p:spPr>
+          <a:xfrm>
+            <a:off x="4087368" y="4925765"/>
+            <a:ext cx="292608" cy="0"/>
+          </a:xfrm>
+          <a:prstGeom prst="line">
+            <a:avLst/>
+          </a:prstGeom>
+          <a:ln w="28575">
+            <a:solidFill>
+              <a:schemeClr val="accent6"/>
+            </a:solidFill>
+          </a:ln>
+        </p:spPr>
+        <p:style>
+          <a:lnRef idx="1">
+            <a:schemeClr val="accent1"/>
+          </a:lnRef>
+          <a:fillRef idx="0">
+            <a:schemeClr val="accent1"/>
+          </a:fillRef>
+          <a:effectRef idx="0">
+            <a:schemeClr val="accent1"/>
+          </a:effectRef>
+          <a:fontRef idx="minor">
+            <a:schemeClr val="tx1"/>
+          </a:fontRef>
+        </p:style>
+      </p:cxnSp>
+      <p:cxnSp>
+        <p:nvCxnSpPr>
+          <p:cNvPr id="22" name="Connecteur droit 21">
+            <a:extLst>
+              <a:ext uri="{FF2B5EF4-FFF2-40B4-BE49-F238E27FC236}">
+                <a16:creationId xmlns:a16="http://schemas.microsoft.com/office/drawing/2014/main" id="{E2182D9F-5126-818D-4E34-B302A98D4C7B}"/>
+              </a:ext>
+            </a:extLst>
+          </p:cNvPr>
+          <p:cNvCxnSpPr>
+            <a:cxnSpLocks/>
+          </p:cNvCxnSpPr>
+          <p:nvPr/>
+        </p:nvCxnSpPr>
+        <p:spPr>
+          <a:xfrm>
+            <a:off x="4102608" y="5537861"/>
+            <a:ext cx="292608" cy="0"/>
+          </a:xfrm>
+          <a:prstGeom prst="line">
+            <a:avLst/>
+          </a:prstGeom>
+          <a:ln w="28575">
+            <a:solidFill>
+              <a:schemeClr val="accent6"/>
+            </a:solidFill>
+          </a:ln>
+        </p:spPr>
+        <p:style>
+          <a:lnRef idx="1">
+            <a:schemeClr val="accent1"/>
+          </a:lnRef>
+          <a:fillRef idx="0">
+            <a:schemeClr val="accent1"/>
+          </a:fillRef>
+          <a:effectRef idx="0">
+            <a:schemeClr val="accent1"/>
+          </a:effectRef>
+          <a:fontRef idx="minor">
+            <a:schemeClr val="tx1"/>
+          </a:fontRef>
+        </p:style>
+      </p:cxnSp>
+      <p:sp>
+        <p:nvSpPr>
+          <p:cNvPr id="23" name="Ellipse 22">
+            <a:extLst>
+              <a:ext uri="{FF2B5EF4-FFF2-40B4-BE49-F238E27FC236}">
+                <a16:creationId xmlns:a16="http://schemas.microsoft.com/office/drawing/2014/main" id="{C820D652-3A75-EE18-8F23-E31FB143E769}"/>
+              </a:ext>
+            </a:extLst>
+          </p:cNvPr>
+          <p:cNvSpPr/>
+          <p:nvPr/>
+        </p:nvSpPr>
+        <p:spPr>
+          <a:xfrm>
+            <a:off x="4361434" y="4879918"/>
+            <a:ext cx="114300" cy="117094"/>
+          </a:xfrm>
+          <a:prstGeom prst="ellipse">
+            <a:avLst/>
+          </a:prstGeom>
+          <a:solidFill>
+            <a:schemeClr val="accent6"/>
+          </a:solidFill>
+          <a:ln>
+            <a:solidFill>
+              <a:schemeClr val="accent6"/>
+            </a:solidFill>
+          </a:ln>
+        </p:spPr>
+        <p:style>
+          <a:lnRef idx="2">
+            <a:schemeClr val="accent1">
+              <a:shade val="15000"/>
+            </a:schemeClr>
+          </a:lnRef>
+          <a:fillRef idx="1">
+            <a:schemeClr val="accent1"/>
+          </a:fillRef>
+          <a:effectRef idx="0">
+            <a:schemeClr val="accent1"/>
+          </a:effectRef>
+          <a:fontRef idx="minor">
+            <a:schemeClr val="lt1"/>
+          </a:fontRef>
+        </p:style>
+        <p:txBody>
+          <a:bodyPr rtlCol="0" anchor="ctr"/>
+          <a:lstStyle/>
+          <a:p>
+            <a:pPr algn="ctr"/>
+            <a:endParaRPr lang="fr-FR"/>
+          </a:p>
+        </p:txBody>
+      </p:sp>
+      <p:sp>
+        <p:nvSpPr>
+          <p:cNvPr id="25" name="Ellipse 24">
+            <a:extLst>
+              <a:ext uri="{FF2B5EF4-FFF2-40B4-BE49-F238E27FC236}">
+                <a16:creationId xmlns:a16="http://schemas.microsoft.com/office/drawing/2014/main" id="{8990D22E-36AC-972B-4E0C-025638723E83}"/>
+              </a:ext>
+            </a:extLst>
+          </p:cNvPr>
+          <p:cNvSpPr/>
+          <p:nvPr/>
+        </p:nvSpPr>
+        <p:spPr>
+          <a:xfrm>
+            <a:off x="4353306" y="5492013"/>
+            <a:ext cx="114300" cy="117094"/>
+          </a:xfrm>
+          <a:prstGeom prst="ellipse">
+            <a:avLst/>
+          </a:prstGeom>
+          <a:solidFill>
+            <a:schemeClr val="accent6"/>
+          </a:solidFill>
+          <a:ln>
+            <a:solidFill>
+              <a:schemeClr val="accent6"/>
+            </a:solidFill>
+          </a:ln>
+        </p:spPr>
+        <p:style>
+          <a:lnRef idx="2">
+            <a:schemeClr val="accent1">
+              <a:shade val="15000"/>
+            </a:schemeClr>
+          </a:lnRef>
+          <a:fillRef idx="1">
+            <a:schemeClr val="accent1"/>
+          </a:fillRef>
+          <a:effectRef idx="0">
+            <a:schemeClr val="accent1"/>
+          </a:effectRef>
+          <a:fontRef idx="minor">
+            <a:schemeClr val="lt1"/>
+          </a:fontRef>
+        </p:style>
+        <p:txBody>
+          <a:bodyPr rtlCol="0" anchor="ctr"/>
+          <a:lstStyle/>
+          <a:p>
+            <a:pPr algn="ctr"/>
+            <a:endParaRPr lang="fr-FR"/>
+          </a:p>
+        </p:txBody>
+      </p:sp>
+    </p:spTree>
+    <p:extLst>
+      <p:ext uri="{BB962C8B-B14F-4D97-AF65-F5344CB8AC3E}">
+        <p14:creationId xmlns:p14="http://schemas.microsoft.com/office/powerpoint/2010/main" val="2211141522"/>
+      </p:ext>
+    </p:extLst>
+  </p:cSld>
+  <p:clrMapOvr>
+    <a:masterClrMapping/>
+  </p:clrMapOvr>
+</p:sld>
+</file>
+
+<file path=ppt/slides/slide9.xml><?xml version="1.0" encoding="utf-8"?>
+<p:sld xmlns:a="http://schemas.openxmlformats.org/drawingml/2006/main" xmlns:r="http://schemas.openxmlformats.org/officeDocument/2006/relationships" xmlns:p="http://schemas.openxmlformats.org/presentationml/2006/main">
+  <p:cSld>
+    <p:spTree>
+      <p:nvGrpSpPr>
         <p:cNvPr id="1" name=""/>
         <p:cNvGrpSpPr/>
         <p:nvPr/>
@@ -19799,1807 +22133,6 @@
     <p:extLst>
       <p:ext uri="{BB962C8B-B14F-4D97-AF65-F5344CB8AC3E}">
         <p14:creationId xmlns:p14="http://schemas.microsoft.com/office/powerpoint/2010/main" val="2170523235"/>
-      </p:ext>
-    </p:extLst>
-  </p:cSld>
-  <p:clrMapOvr>
-    <a:masterClrMapping/>
-  </p:clrMapOvr>
-</p:sld>
-</file>
-
-<file path=ppt/slides/slide9.xml><?xml version="1.0" encoding="utf-8"?>
-<p:sld xmlns:a="http://schemas.openxmlformats.org/drawingml/2006/main" xmlns:r="http://schemas.openxmlformats.org/officeDocument/2006/relationships" xmlns:p="http://schemas.openxmlformats.org/presentationml/2006/main">
-  <p:cSld>
-    <p:spTree>
-      <p:nvGrpSpPr>
-        <p:cNvPr id="1" name=""/>
-        <p:cNvGrpSpPr/>
-        <p:nvPr/>
-      </p:nvGrpSpPr>
-      <p:grpSpPr>
-        <a:xfrm>
-          <a:off x="0" y="0"/>
-          <a:ext cx="0" cy="0"/>
-          <a:chOff x="0" y="0"/>
-          <a:chExt cx="0" cy="0"/>
-        </a:xfrm>
-      </p:grpSpPr>
-      <p:cxnSp>
-        <p:nvCxnSpPr>
-          <p:cNvPr id="2" name="Connecteur droit avec flèche 1"/>
-          <p:cNvCxnSpPr/>
-          <p:nvPr/>
-        </p:nvCxnSpPr>
-        <p:spPr>
-          <a:xfrm>
-            <a:off x="3823991" y="1413611"/>
-            <a:ext cx="3911909" cy="0"/>
-          </a:xfrm>
-          <a:prstGeom prst="straightConnector1">
-            <a:avLst/>
-          </a:prstGeom>
-          <a:ln w="38100">
-            <a:tailEnd type="triangle"/>
-          </a:ln>
-        </p:spPr>
-        <p:style>
-          <a:lnRef idx="1">
-            <a:schemeClr val="dk1"/>
-          </a:lnRef>
-          <a:fillRef idx="0">
-            <a:schemeClr val="dk1"/>
-          </a:fillRef>
-          <a:effectRef idx="0">
-            <a:schemeClr val="dk1"/>
-          </a:effectRef>
-          <a:fontRef idx="minor">
-            <a:schemeClr val="tx1"/>
-          </a:fontRef>
-        </p:style>
-      </p:cxnSp>
-      <p:cxnSp>
-        <p:nvCxnSpPr>
-          <p:cNvPr id="3" name="Connecteur droit avec flèche 2"/>
-          <p:cNvCxnSpPr/>
-          <p:nvPr/>
-        </p:nvCxnSpPr>
-        <p:spPr>
-          <a:xfrm flipV="1">
-            <a:off x="3917272" y="770463"/>
-            <a:ext cx="0" cy="760977"/>
-          </a:xfrm>
-          <a:prstGeom prst="straightConnector1">
-            <a:avLst/>
-          </a:prstGeom>
-          <a:ln w="38100">
-            <a:tailEnd type="triangle"/>
-          </a:ln>
-        </p:spPr>
-        <p:style>
-          <a:lnRef idx="1">
-            <a:schemeClr val="dk1"/>
-          </a:lnRef>
-          <a:fillRef idx="0">
-            <a:schemeClr val="dk1"/>
-          </a:fillRef>
-          <a:effectRef idx="0">
-            <a:schemeClr val="dk1"/>
-          </a:effectRef>
-          <a:fontRef idx="minor">
-            <a:schemeClr val="tx1"/>
-          </a:fontRef>
-        </p:style>
-      </p:cxnSp>
-      <p:sp>
-        <p:nvSpPr>
-          <p:cNvPr id="4" name="ZoneTexte 3"/>
-          <p:cNvSpPr txBox="1"/>
-          <p:nvPr/>
-        </p:nvSpPr>
-        <p:spPr>
-          <a:xfrm>
-            <a:off x="7586430" y="1151856"/>
-            <a:ext cx="240772" cy="288669"/>
-          </a:xfrm>
-          <a:prstGeom prst="rect">
-            <a:avLst/>
-          </a:prstGeom>
-          <a:noFill/>
-        </p:spPr>
-        <p:txBody>
-          <a:bodyPr wrap="none" rtlCol="0">
-            <a:spAutoFit/>
-          </a:bodyPr>
-          <a:lstStyle/>
-          <a:p>
-            <a:r>
-              <a:rPr lang="fr-FR" sz="1276" b="1" dirty="0"/>
-              <a:t>t</a:t>
-            </a:r>
-          </a:p>
-        </p:txBody>
-      </p:sp>
-      <mc:AlternateContent xmlns:mc="http://schemas.openxmlformats.org/markup-compatibility/2006" xmlns:a14="http://schemas.microsoft.com/office/drawing/2010/main">
-        <mc:Choice Requires="a14">
-          <p:sp>
-            <p:nvSpPr>
-              <p:cNvPr id="5" name="ZoneTexte 4"/>
-              <p:cNvSpPr txBox="1"/>
-              <p:nvPr/>
-            </p:nvSpPr>
-            <p:spPr>
-              <a:xfrm>
-                <a:off x="3380326" y="549277"/>
-                <a:ext cx="1125629" cy="288669"/>
-              </a:xfrm>
-              <a:prstGeom prst="rect">
-                <a:avLst/>
-              </a:prstGeom>
-              <a:noFill/>
-            </p:spPr>
-            <p:txBody>
-              <a:bodyPr wrap="none" rtlCol="0">
-                <a:spAutoFit/>
-              </a:bodyPr>
-              <a:lstStyle/>
-              <a:p>
-                <a:pPr/>
-                <a14:m>
-                  <m:oMathPara xmlns:m="http://schemas.openxmlformats.org/officeDocument/2006/math">
-                    <m:oMathParaPr>
-                      <m:jc m:val="centerGroup"/>
-                    </m:oMathParaPr>
-                    <m:oMath xmlns:m="http://schemas.openxmlformats.org/officeDocument/2006/math">
-                      <m:r>
-                        <a:rPr lang="fr-FR" sz="1276" b="1" i="1" smtClean="0">
-                          <a:latin typeface="Cambria Math" panose="02040503050406030204" pitchFamily="18" charset="0"/>
-                          <a:ea typeface="Cambria Math" panose="02040503050406030204" pitchFamily="18" charset="0"/>
-                        </a:rPr>
-                        <m:t>𝑪𝒐𝒎𝒎𝒂𝒏𝒅𝒆</m:t>
-                      </m:r>
-                    </m:oMath>
-                  </m:oMathPara>
-                </a14:m>
-                <a:endParaRPr lang="fr-FR" sz="1276" b="1" dirty="0"/>
-              </a:p>
-            </p:txBody>
-          </p:sp>
-        </mc:Choice>
-        <mc:Fallback xmlns="">
-          <p:sp>
-            <p:nvSpPr>
-              <p:cNvPr id="5" name="ZoneTexte 4"/>
-              <p:cNvSpPr txBox="1">
-                <a:spLocks noRot="1" noChangeAspect="1" noMove="1" noResize="1" noEditPoints="1" noAdjustHandles="1" noChangeArrowheads="1" noChangeShapeType="1" noTextEdit="1"/>
-              </p:cNvSpPr>
-              <p:nvPr/>
-            </p:nvSpPr>
-            <p:spPr>
-              <a:xfrm>
-                <a:off x="3380326" y="549277"/>
-                <a:ext cx="1125629" cy="288669"/>
-              </a:xfrm>
-              <a:prstGeom prst="rect">
-                <a:avLst/>
-              </a:prstGeom>
-              <a:blipFill>
-                <a:blip r:embed="rId2"/>
-                <a:stretch>
-                  <a:fillRect/>
-                </a:stretch>
-              </a:blipFill>
-            </p:spPr>
-            <p:txBody>
-              <a:bodyPr/>
-              <a:lstStyle/>
-              <a:p>
-                <a:r>
-                  <a:rPr lang="fr-FR">
-                    <a:noFill/>
-                  </a:rPr>
-                  <a:t> </a:t>
-                </a:r>
-              </a:p>
-            </p:txBody>
-          </p:sp>
-        </mc:Fallback>
-      </mc:AlternateContent>
-      <p:sp>
-        <p:nvSpPr>
-          <p:cNvPr id="6" name="ZoneTexte 5"/>
-          <p:cNvSpPr txBox="1"/>
-          <p:nvPr/>
-        </p:nvSpPr>
-        <p:spPr>
-          <a:xfrm>
-            <a:off x="3741714" y="1423429"/>
-            <a:ext cx="268022" cy="288669"/>
-          </a:xfrm>
-          <a:prstGeom prst="rect">
-            <a:avLst/>
-          </a:prstGeom>
-          <a:noFill/>
-        </p:spPr>
-        <p:txBody>
-          <a:bodyPr wrap="none" rtlCol="0">
-            <a:spAutoFit/>
-          </a:bodyPr>
-          <a:lstStyle/>
-          <a:p>
-            <a:r>
-              <a:rPr lang="fr-FR" sz="1276" b="1" dirty="0"/>
-              <a:t>0</a:t>
-            </a:r>
-          </a:p>
-        </p:txBody>
-      </p:sp>
-      <mc:AlternateContent xmlns:mc="http://schemas.openxmlformats.org/markup-compatibility/2006" xmlns:a14="http://schemas.microsoft.com/office/drawing/2010/main">
-        <mc:Choice Requires="a14">
-          <p:sp>
-            <p:nvSpPr>
-              <p:cNvPr id="7" name="ZoneTexte 6"/>
-              <p:cNvSpPr txBox="1"/>
-              <p:nvPr/>
-            </p:nvSpPr>
-            <p:spPr>
-              <a:xfrm>
-                <a:off x="4408523" y="1422721"/>
-                <a:ext cx="502061" cy="288669"/>
-              </a:xfrm>
-              <a:prstGeom prst="rect">
-                <a:avLst/>
-              </a:prstGeom>
-              <a:noFill/>
-            </p:spPr>
-            <p:txBody>
-              <a:bodyPr wrap="none" rtlCol="0">
-                <a:spAutoFit/>
-              </a:bodyPr>
-              <a:lstStyle/>
-              <a:p>
-                <a:pPr/>
-                <a14:m>
-                  <m:oMathPara xmlns:m="http://schemas.openxmlformats.org/officeDocument/2006/math">
-                    <m:oMathParaPr>
-                      <m:jc m:val="centerGroup"/>
-                    </m:oMathParaPr>
-                    <m:oMath xmlns:m="http://schemas.openxmlformats.org/officeDocument/2006/math">
-                      <m:r>
-                        <a:rPr lang="fr-FR" sz="1276" b="1" i="1">
-                          <a:latin typeface="Cambria Math" panose="02040503050406030204" pitchFamily="18" charset="0"/>
-                        </a:rPr>
-                        <m:t>𝑻</m:t>
-                      </m:r>
-                      <m:r>
-                        <a:rPr lang="fr-FR" sz="1276" b="1" i="1">
-                          <a:latin typeface="Cambria Math" panose="02040503050406030204" pitchFamily="18" charset="0"/>
-                        </a:rPr>
-                        <m:t>/</m:t>
-                      </m:r>
-                      <m:r>
-                        <a:rPr lang="fr-FR" sz="1276" b="1" i="1">
-                          <a:latin typeface="Cambria Math" panose="02040503050406030204" pitchFamily="18" charset="0"/>
-                        </a:rPr>
-                        <m:t>𝟐</m:t>
-                      </m:r>
-                    </m:oMath>
-                  </m:oMathPara>
-                </a14:m>
-                <a:endParaRPr lang="fr-FR" sz="1276" b="1" dirty="0"/>
-              </a:p>
-            </p:txBody>
-          </p:sp>
-        </mc:Choice>
-        <mc:Fallback xmlns="">
-          <p:sp>
-            <p:nvSpPr>
-              <p:cNvPr id="7" name="ZoneTexte 6"/>
-              <p:cNvSpPr txBox="1">
-                <a:spLocks noRot="1" noChangeAspect="1" noMove="1" noResize="1" noEditPoints="1" noAdjustHandles="1" noChangeArrowheads="1" noChangeShapeType="1" noTextEdit="1"/>
-              </p:cNvSpPr>
-              <p:nvPr/>
-            </p:nvSpPr>
-            <p:spPr>
-              <a:xfrm>
-                <a:off x="4408523" y="1422721"/>
-                <a:ext cx="502061" cy="288669"/>
-              </a:xfrm>
-              <a:prstGeom prst="rect">
-                <a:avLst/>
-              </a:prstGeom>
-              <a:blipFill>
-                <a:blip r:embed="rId3"/>
-                <a:stretch>
-                  <a:fillRect b="-8333"/>
-                </a:stretch>
-              </a:blipFill>
-            </p:spPr>
-            <p:txBody>
-              <a:bodyPr/>
-              <a:lstStyle/>
-              <a:p>
-                <a:r>
-                  <a:rPr lang="fr-FR">
-                    <a:noFill/>
-                  </a:rPr>
-                  <a:t> </a:t>
-                </a:r>
-              </a:p>
-            </p:txBody>
-          </p:sp>
-        </mc:Fallback>
-      </mc:AlternateContent>
-      <p:sp>
-        <p:nvSpPr>
-          <p:cNvPr id="8" name="ZoneTexte 7"/>
-          <p:cNvSpPr txBox="1"/>
-          <p:nvPr/>
-        </p:nvSpPr>
-        <p:spPr>
-          <a:xfrm>
-            <a:off x="5457312" y="1431007"/>
-            <a:ext cx="266420" cy="288669"/>
-          </a:xfrm>
-          <a:prstGeom prst="rect">
-            <a:avLst/>
-          </a:prstGeom>
-          <a:noFill/>
-        </p:spPr>
-        <p:txBody>
-          <a:bodyPr wrap="none" rtlCol="0">
-            <a:spAutoFit/>
-          </a:bodyPr>
-          <a:lstStyle/>
-          <a:p>
-            <a:r>
-              <a:rPr lang="fr-FR" sz="1276" b="1" dirty="0"/>
-              <a:t>T</a:t>
-            </a:r>
-          </a:p>
-        </p:txBody>
-      </p:sp>
-      <p:cxnSp>
-        <p:nvCxnSpPr>
-          <p:cNvPr id="9" name="Connecteur droit avec flèche 8"/>
-          <p:cNvCxnSpPr/>
-          <p:nvPr/>
-        </p:nvCxnSpPr>
-        <p:spPr>
-          <a:xfrm>
-            <a:off x="3823991" y="2305472"/>
-            <a:ext cx="3911909" cy="0"/>
-          </a:xfrm>
-          <a:prstGeom prst="straightConnector1">
-            <a:avLst/>
-          </a:prstGeom>
-          <a:ln w="38100">
-            <a:tailEnd type="triangle"/>
-          </a:ln>
-        </p:spPr>
-        <p:style>
-          <a:lnRef idx="1">
-            <a:schemeClr val="dk1"/>
-          </a:lnRef>
-          <a:fillRef idx="0">
-            <a:schemeClr val="dk1"/>
-          </a:fillRef>
-          <a:effectRef idx="0">
-            <a:schemeClr val="dk1"/>
-          </a:effectRef>
-          <a:fontRef idx="minor">
-            <a:schemeClr val="tx1"/>
-          </a:fontRef>
-        </p:style>
-      </p:cxnSp>
-      <p:cxnSp>
-        <p:nvCxnSpPr>
-          <p:cNvPr id="10" name="Connecteur droit avec flèche 9"/>
-          <p:cNvCxnSpPr/>
-          <p:nvPr/>
-        </p:nvCxnSpPr>
-        <p:spPr>
-          <a:xfrm flipV="1">
-            <a:off x="3917272" y="1662324"/>
-            <a:ext cx="0" cy="760977"/>
-          </a:xfrm>
-          <a:prstGeom prst="straightConnector1">
-            <a:avLst/>
-          </a:prstGeom>
-          <a:ln w="38100">
-            <a:tailEnd type="triangle"/>
-          </a:ln>
-        </p:spPr>
-        <p:style>
-          <a:lnRef idx="1">
-            <a:schemeClr val="dk1"/>
-          </a:lnRef>
-          <a:fillRef idx="0">
-            <a:schemeClr val="dk1"/>
-          </a:fillRef>
-          <a:effectRef idx="0">
-            <a:schemeClr val="dk1"/>
-          </a:effectRef>
-          <a:fontRef idx="minor">
-            <a:schemeClr val="tx1"/>
-          </a:fontRef>
-        </p:style>
-      </p:cxnSp>
-      <p:sp>
-        <p:nvSpPr>
-          <p:cNvPr id="11" name="ZoneTexte 10"/>
-          <p:cNvSpPr txBox="1"/>
-          <p:nvPr/>
-        </p:nvSpPr>
-        <p:spPr>
-          <a:xfrm>
-            <a:off x="7582599" y="2029347"/>
-            <a:ext cx="240772" cy="288669"/>
-          </a:xfrm>
-          <a:prstGeom prst="rect">
-            <a:avLst/>
-          </a:prstGeom>
-          <a:noFill/>
-        </p:spPr>
-        <p:txBody>
-          <a:bodyPr wrap="none" rtlCol="0">
-            <a:spAutoFit/>
-          </a:bodyPr>
-          <a:lstStyle/>
-          <a:p>
-            <a:r>
-              <a:rPr lang="fr-FR" sz="1276" b="1" dirty="0"/>
-              <a:t>t</a:t>
-            </a:r>
-          </a:p>
-        </p:txBody>
-      </p:sp>
-      <p:sp>
-        <p:nvSpPr>
-          <p:cNvPr id="12" name="ZoneTexte 11"/>
-          <p:cNvSpPr txBox="1"/>
-          <p:nvPr/>
-        </p:nvSpPr>
-        <p:spPr>
-          <a:xfrm>
-            <a:off x="3613568" y="1571609"/>
-            <a:ext cx="300082" cy="288669"/>
-          </a:xfrm>
-          <a:prstGeom prst="rect">
-            <a:avLst/>
-          </a:prstGeom>
-          <a:noFill/>
-        </p:spPr>
-        <p:txBody>
-          <a:bodyPr wrap="none" rtlCol="0">
-            <a:spAutoFit/>
-          </a:bodyPr>
-          <a:lstStyle/>
-          <a:p>
-            <a:r>
-              <a:rPr lang="el-GR" sz="1276" b="1" dirty="0"/>
-              <a:t>ϕ</a:t>
-            </a:r>
-            <a:endParaRPr lang="fr-FR" sz="1276" b="1" dirty="0"/>
-          </a:p>
-        </p:txBody>
-      </p:sp>
-      <p:sp>
-        <p:nvSpPr>
-          <p:cNvPr id="13" name="ZoneTexte 12"/>
-          <p:cNvSpPr txBox="1"/>
-          <p:nvPr/>
-        </p:nvSpPr>
-        <p:spPr>
-          <a:xfrm>
-            <a:off x="3741714" y="2315290"/>
-            <a:ext cx="268022" cy="288669"/>
-          </a:xfrm>
-          <a:prstGeom prst="rect">
-            <a:avLst/>
-          </a:prstGeom>
-          <a:noFill/>
-        </p:spPr>
-        <p:txBody>
-          <a:bodyPr wrap="none" rtlCol="0">
-            <a:spAutoFit/>
-          </a:bodyPr>
-          <a:lstStyle/>
-          <a:p>
-            <a:r>
-              <a:rPr lang="fr-FR" sz="1276" b="1" dirty="0"/>
-              <a:t>0</a:t>
-            </a:r>
-          </a:p>
-        </p:txBody>
-      </p:sp>
-      <p:cxnSp>
-        <p:nvCxnSpPr>
-          <p:cNvPr id="14" name="Connecteur droit avec flèche 13"/>
-          <p:cNvCxnSpPr/>
-          <p:nvPr/>
-        </p:nvCxnSpPr>
-        <p:spPr>
-          <a:xfrm>
-            <a:off x="3823991" y="3177695"/>
-            <a:ext cx="3911909" cy="0"/>
-          </a:xfrm>
-          <a:prstGeom prst="straightConnector1">
-            <a:avLst/>
-          </a:prstGeom>
-          <a:ln w="38100">
-            <a:tailEnd type="triangle"/>
-          </a:ln>
-        </p:spPr>
-        <p:style>
-          <a:lnRef idx="1">
-            <a:schemeClr val="dk1"/>
-          </a:lnRef>
-          <a:fillRef idx="0">
-            <a:schemeClr val="dk1"/>
-          </a:fillRef>
-          <a:effectRef idx="0">
-            <a:schemeClr val="dk1"/>
-          </a:effectRef>
-          <a:fontRef idx="minor">
-            <a:schemeClr val="tx1"/>
-          </a:fontRef>
-        </p:style>
-      </p:cxnSp>
-      <p:cxnSp>
-        <p:nvCxnSpPr>
-          <p:cNvPr id="15" name="Connecteur droit avec flèche 14"/>
-          <p:cNvCxnSpPr/>
-          <p:nvPr/>
-        </p:nvCxnSpPr>
-        <p:spPr>
-          <a:xfrm flipV="1">
-            <a:off x="3917272" y="2534547"/>
-            <a:ext cx="0" cy="760977"/>
-          </a:xfrm>
-          <a:prstGeom prst="straightConnector1">
-            <a:avLst/>
-          </a:prstGeom>
-          <a:ln w="38100">
-            <a:tailEnd type="triangle"/>
-          </a:ln>
-        </p:spPr>
-        <p:style>
-          <a:lnRef idx="1">
-            <a:schemeClr val="dk1"/>
-          </a:lnRef>
-          <a:fillRef idx="0">
-            <a:schemeClr val="dk1"/>
-          </a:fillRef>
-          <a:effectRef idx="0">
-            <a:schemeClr val="dk1"/>
-          </a:effectRef>
-          <a:fontRef idx="minor">
-            <a:schemeClr val="tx1"/>
-          </a:fontRef>
-        </p:style>
-      </p:cxnSp>
-      <p:sp>
-        <p:nvSpPr>
-          <p:cNvPr id="16" name="ZoneTexte 15"/>
-          <p:cNvSpPr txBox="1"/>
-          <p:nvPr/>
-        </p:nvSpPr>
-        <p:spPr>
-          <a:xfrm>
-            <a:off x="7578932" y="2912227"/>
-            <a:ext cx="240772" cy="288669"/>
-          </a:xfrm>
-          <a:prstGeom prst="rect">
-            <a:avLst/>
-          </a:prstGeom>
-          <a:noFill/>
-        </p:spPr>
-        <p:txBody>
-          <a:bodyPr wrap="none" rtlCol="0">
-            <a:spAutoFit/>
-          </a:bodyPr>
-          <a:lstStyle/>
-          <a:p>
-            <a:r>
-              <a:rPr lang="fr-FR" sz="1276" b="1" dirty="0"/>
-              <a:t>t</a:t>
-            </a:r>
-          </a:p>
-        </p:txBody>
-      </p:sp>
-      <p:sp>
-        <p:nvSpPr>
-          <p:cNvPr id="17" name="ZoneTexte 16"/>
-          <p:cNvSpPr txBox="1"/>
-          <p:nvPr/>
-        </p:nvSpPr>
-        <p:spPr>
-          <a:xfrm>
-            <a:off x="3639679" y="2433671"/>
-            <a:ext cx="279244" cy="288669"/>
-          </a:xfrm>
-          <a:prstGeom prst="rect">
-            <a:avLst/>
-          </a:prstGeom>
-          <a:noFill/>
-        </p:spPr>
-        <p:txBody>
-          <a:bodyPr wrap="none" rtlCol="0">
-            <a:spAutoFit/>
-          </a:bodyPr>
-          <a:lstStyle/>
-          <a:p>
-            <a:r>
-              <a:rPr lang="fr-FR" sz="1276" b="1" dirty="0"/>
-              <a:t>i</a:t>
-            </a:r>
-            <a:r>
-              <a:rPr lang="fr-FR" sz="1276" b="1" baseline="-25000" dirty="0"/>
-              <a:t>1</a:t>
-            </a:r>
-          </a:p>
-        </p:txBody>
-      </p:sp>
-      <p:sp>
-        <p:nvSpPr>
-          <p:cNvPr id="18" name="ZoneTexte 17"/>
-          <p:cNvSpPr txBox="1"/>
-          <p:nvPr/>
-        </p:nvSpPr>
-        <p:spPr>
-          <a:xfrm>
-            <a:off x="3741714" y="3187513"/>
-            <a:ext cx="268022" cy="288669"/>
-          </a:xfrm>
-          <a:prstGeom prst="rect">
-            <a:avLst/>
-          </a:prstGeom>
-          <a:noFill/>
-        </p:spPr>
-        <p:txBody>
-          <a:bodyPr wrap="none" rtlCol="0">
-            <a:spAutoFit/>
-          </a:bodyPr>
-          <a:lstStyle/>
-          <a:p>
-            <a:r>
-              <a:rPr lang="fr-FR" sz="1276" b="1" dirty="0"/>
-              <a:t>0</a:t>
-            </a:r>
-          </a:p>
-        </p:txBody>
-      </p:sp>
-      <p:cxnSp>
-        <p:nvCxnSpPr>
-          <p:cNvPr id="19" name="Connecteur droit avec flèche 18"/>
-          <p:cNvCxnSpPr/>
-          <p:nvPr/>
-        </p:nvCxnSpPr>
-        <p:spPr>
-          <a:xfrm>
-            <a:off x="3823991" y="4059736"/>
-            <a:ext cx="3911909" cy="0"/>
-          </a:xfrm>
-          <a:prstGeom prst="straightConnector1">
-            <a:avLst/>
-          </a:prstGeom>
-          <a:ln w="38100">
-            <a:tailEnd type="triangle"/>
-          </a:ln>
-        </p:spPr>
-        <p:style>
-          <a:lnRef idx="1">
-            <a:schemeClr val="dk1"/>
-          </a:lnRef>
-          <a:fillRef idx="0">
-            <a:schemeClr val="dk1"/>
-          </a:fillRef>
-          <a:effectRef idx="0">
-            <a:schemeClr val="dk1"/>
-          </a:effectRef>
-          <a:fontRef idx="minor">
-            <a:schemeClr val="tx1"/>
-          </a:fontRef>
-        </p:style>
-      </p:cxnSp>
-      <p:cxnSp>
-        <p:nvCxnSpPr>
-          <p:cNvPr id="20" name="Connecteur droit avec flèche 19"/>
-          <p:cNvCxnSpPr/>
-          <p:nvPr/>
-        </p:nvCxnSpPr>
-        <p:spPr>
-          <a:xfrm flipV="1">
-            <a:off x="3917272" y="3416588"/>
-            <a:ext cx="0" cy="760977"/>
-          </a:xfrm>
-          <a:prstGeom prst="straightConnector1">
-            <a:avLst/>
-          </a:prstGeom>
-          <a:ln w="38100">
-            <a:tailEnd type="triangle"/>
-          </a:ln>
-        </p:spPr>
-        <p:style>
-          <a:lnRef idx="1">
-            <a:schemeClr val="dk1"/>
-          </a:lnRef>
-          <a:fillRef idx="0">
-            <a:schemeClr val="dk1"/>
-          </a:fillRef>
-          <a:effectRef idx="0">
-            <a:schemeClr val="dk1"/>
-          </a:effectRef>
-          <a:fontRef idx="minor">
-            <a:schemeClr val="tx1"/>
-          </a:fontRef>
-        </p:style>
-      </p:cxnSp>
-      <p:sp>
-        <p:nvSpPr>
-          <p:cNvPr id="21" name="ZoneTexte 20"/>
-          <p:cNvSpPr txBox="1"/>
-          <p:nvPr/>
-        </p:nvSpPr>
-        <p:spPr>
-          <a:xfrm>
-            <a:off x="7586430" y="3787496"/>
-            <a:ext cx="240772" cy="288669"/>
-          </a:xfrm>
-          <a:prstGeom prst="rect">
-            <a:avLst/>
-          </a:prstGeom>
-          <a:noFill/>
-        </p:spPr>
-        <p:txBody>
-          <a:bodyPr wrap="none" rtlCol="0">
-            <a:spAutoFit/>
-          </a:bodyPr>
-          <a:lstStyle/>
-          <a:p>
-            <a:r>
-              <a:rPr lang="fr-FR" sz="1276" b="1" dirty="0"/>
-              <a:t>t</a:t>
-            </a:r>
-          </a:p>
-        </p:txBody>
-      </p:sp>
-      <p:sp>
-        <p:nvSpPr>
-          <p:cNvPr id="22" name="ZoneTexte 21"/>
-          <p:cNvSpPr txBox="1"/>
-          <p:nvPr/>
-        </p:nvSpPr>
-        <p:spPr>
-          <a:xfrm>
-            <a:off x="3741714" y="4069555"/>
-            <a:ext cx="268022" cy="288669"/>
-          </a:xfrm>
-          <a:prstGeom prst="rect">
-            <a:avLst/>
-          </a:prstGeom>
-          <a:noFill/>
-        </p:spPr>
-        <p:txBody>
-          <a:bodyPr wrap="none" rtlCol="0">
-            <a:spAutoFit/>
-          </a:bodyPr>
-          <a:lstStyle/>
-          <a:p>
-            <a:r>
-              <a:rPr lang="fr-FR" sz="1276" b="1" dirty="0"/>
-              <a:t>0</a:t>
-            </a:r>
-          </a:p>
-        </p:txBody>
-      </p:sp>
-      <p:cxnSp>
-        <p:nvCxnSpPr>
-          <p:cNvPr id="23" name="Connecteur droit avec flèche 22"/>
-          <p:cNvCxnSpPr/>
-          <p:nvPr/>
-        </p:nvCxnSpPr>
-        <p:spPr>
-          <a:xfrm>
-            <a:off x="3823991" y="4953920"/>
-            <a:ext cx="3911909" cy="0"/>
-          </a:xfrm>
-          <a:prstGeom prst="straightConnector1">
-            <a:avLst/>
-          </a:prstGeom>
-          <a:ln w="38100">
-            <a:tailEnd type="triangle"/>
-          </a:ln>
-        </p:spPr>
-        <p:style>
-          <a:lnRef idx="1">
-            <a:schemeClr val="dk1"/>
-          </a:lnRef>
-          <a:fillRef idx="0">
-            <a:schemeClr val="dk1"/>
-          </a:fillRef>
-          <a:effectRef idx="0">
-            <a:schemeClr val="dk1"/>
-          </a:effectRef>
-          <a:fontRef idx="minor">
-            <a:schemeClr val="tx1"/>
-          </a:fontRef>
-        </p:style>
-      </p:cxnSp>
-      <p:cxnSp>
-        <p:nvCxnSpPr>
-          <p:cNvPr id="24" name="Connecteur droit avec flèche 23"/>
-          <p:cNvCxnSpPr/>
-          <p:nvPr/>
-        </p:nvCxnSpPr>
-        <p:spPr>
-          <a:xfrm flipV="1">
-            <a:off x="3917272" y="4310772"/>
-            <a:ext cx="0" cy="760977"/>
-          </a:xfrm>
-          <a:prstGeom prst="straightConnector1">
-            <a:avLst/>
-          </a:prstGeom>
-          <a:ln w="38100">
-            <a:tailEnd type="triangle"/>
-          </a:ln>
-        </p:spPr>
-        <p:style>
-          <a:lnRef idx="1">
-            <a:schemeClr val="dk1"/>
-          </a:lnRef>
-          <a:fillRef idx="0">
-            <a:schemeClr val="dk1"/>
-          </a:fillRef>
-          <a:effectRef idx="0">
-            <a:schemeClr val="dk1"/>
-          </a:effectRef>
-          <a:fontRef idx="minor">
-            <a:schemeClr val="tx1"/>
-          </a:fontRef>
-        </p:style>
-      </p:cxnSp>
-      <p:sp>
-        <p:nvSpPr>
-          <p:cNvPr id="25" name="ZoneTexte 24"/>
-          <p:cNvSpPr txBox="1"/>
-          <p:nvPr/>
-        </p:nvSpPr>
-        <p:spPr>
-          <a:xfrm>
-            <a:off x="7586430" y="4681679"/>
-            <a:ext cx="240772" cy="288669"/>
-          </a:xfrm>
-          <a:prstGeom prst="rect">
-            <a:avLst/>
-          </a:prstGeom>
-          <a:noFill/>
-        </p:spPr>
-        <p:txBody>
-          <a:bodyPr wrap="none" rtlCol="0">
-            <a:spAutoFit/>
-          </a:bodyPr>
-          <a:lstStyle/>
-          <a:p>
-            <a:r>
-              <a:rPr lang="fr-FR" sz="1276" b="1" dirty="0"/>
-              <a:t>t</a:t>
-            </a:r>
-          </a:p>
-        </p:txBody>
-      </p:sp>
-      <p:sp>
-        <p:nvSpPr>
-          <p:cNvPr id="26" name="ZoneTexte 25"/>
-          <p:cNvSpPr txBox="1"/>
-          <p:nvPr/>
-        </p:nvSpPr>
-        <p:spPr>
-          <a:xfrm>
-            <a:off x="3602553" y="4209602"/>
-            <a:ext cx="316112" cy="288669"/>
-          </a:xfrm>
-          <a:prstGeom prst="rect">
-            <a:avLst/>
-          </a:prstGeom>
-          <a:noFill/>
-        </p:spPr>
-        <p:txBody>
-          <a:bodyPr wrap="none" rtlCol="0">
-            <a:spAutoFit/>
-          </a:bodyPr>
-          <a:lstStyle/>
-          <a:p>
-            <a:r>
-              <a:rPr lang="fr-FR" sz="1276" b="1" dirty="0"/>
-              <a:t>v</a:t>
-            </a:r>
-            <a:r>
-              <a:rPr lang="fr-FR" sz="1276" b="1" baseline="-25000" dirty="0"/>
-              <a:t>2</a:t>
-            </a:r>
-          </a:p>
-        </p:txBody>
-      </p:sp>
-      <p:sp>
-        <p:nvSpPr>
-          <p:cNvPr id="27" name="ZoneTexte 26"/>
-          <p:cNvSpPr txBox="1"/>
-          <p:nvPr/>
-        </p:nvSpPr>
-        <p:spPr>
-          <a:xfrm>
-            <a:off x="3741714" y="5019286"/>
-            <a:ext cx="268022" cy="288669"/>
-          </a:xfrm>
-          <a:prstGeom prst="rect">
-            <a:avLst/>
-          </a:prstGeom>
-          <a:noFill/>
-        </p:spPr>
-        <p:txBody>
-          <a:bodyPr wrap="none" rtlCol="0">
-            <a:spAutoFit/>
-          </a:bodyPr>
-          <a:lstStyle/>
-          <a:p>
-            <a:r>
-              <a:rPr lang="fr-FR" sz="1276" b="1" dirty="0"/>
-              <a:t>0</a:t>
-            </a:r>
-          </a:p>
-        </p:txBody>
-      </p:sp>
-      <p:cxnSp>
-        <p:nvCxnSpPr>
-          <p:cNvPr id="28" name="Connecteur droit 27"/>
-          <p:cNvCxnSpPr/>
-          <p:nvPr/>
-        </p:nvCxnSpPr>
-        <p:spPr>
-          <a:xfrm flipH="1">
-            <a:off x="4782610" y="770463"/>
-            <a:ext cx="13466" cy="4782302"/>
-          </a:xfrm>
-          <a:prstGeom prst="line">
-            <a:avLst/>
-          </a:prstGeom>
-          <a:ln w="28575">
-            <a:prstDash val="dash"/>
-          </a:ln>
-        </p:spPr>
-        <p:style>
-          <a:lnRef idx="1">
-            <a:schemeClr val="dk1"/>
-          </a:lnRef>
-          <a:fillRef idx="0">
-            <a:schemeClr val="dk1"/>
-          </a:fillRef>
-          <a:effectRef idx="0">
-            <a:schemeClr val="dk1"/>
-          </a:effectRef>
-          <a:fontRef idx="minor">
-            <a:schemeClr val="tx1"/>
-          </a:fontRef>
-        </p:style>
-      </p:cxnSp>
-      <p:cxnSp>
-        <p:nvCxnSpPr>
-          <p:cNvPr id="29" name="Connecteur droit 28"/>
-          <p:cNvCxnSpPr/>
-          <p:nvPr/>
-        </p:nvCxnSpPr>
-        <p:spPr>
-          <a:xfrm>
-            <a:off x="5669972" y="770463"/>
-            <a:ext cx="0" cy="4782302"/>
-          </a:xfrm>
-          <a:prstGeom prst="line">
-            <a:avLst/>
-          </a:prstGeom>
-          <a:ln w="28575">
-            <a:prstDash val="dash"/>
-          </a:ln>
-        </p:spPr>
-        <p:style>
-          <a:lnRef idx="1">
-            <a:schemeClr val="dk1"/>
-          </a:lnRef>
-          <a:fillRef idx="0">
-            <a:schemeClr val="dk1"/>
-          </a:fillRef>
-          <a:effectRef idx="0">
-            <a:schemeClr val="dk1"/>
-          </a:effectRef>
-          <a:fontRef idx="minor">
-            <a:schemeClr val="tx1"/>
-          </a:fontRef>
-        </p:style>
-      </p:cxnSp>
-      <p:cxnSp>
-        <p:nvCxnSpPr>
-          <p:cNvPr id="30" name="Connecteur droit 29"/>
-          <p:cNvCxnSpPr/>
-          <p:nvPr/>
-        </p:nvCxnSpPr>
-        <p:spPr>
-          <a:xfrm>
-            <a:off x="6549758" y="770464"/>
-            <a:ext cx="0" cy="4782303"/>
-          </a:xfrm>
-          <a:prstGeom prst="line">
-            <a:avLst/>
-          </a:prstGeom>
-          <a:ln w="28575">
-            <a:prstDash val="dash"/>
-          </a:ln>
-        </p:spPr>
-        <p:style>
-          <a:lnRef idx="1">
-            <a:schemeClr val="dk1"/>
-          </a:lnRef>
-          <a:fillRef idx="0">
-            <a:schemeClr val="dk1"/>
-          </a:fillRef>
-          <a:effectRef idx="0">
-            <a:schemeClr val="dk1"/>
-          </a:effectRef>
-          <a:fontRef idx="minor">
-            <a:schemeClr val="tx1"/>
-          </a:fontRef>
-        </p:style>
-      </p:cxnSp>
-      <p:cxnSp>
-        <p:nvCxnSpPr>
-          <p:cNvPr id="31" name="Connecteur droit 30"/>
-          <p:cNvCxnSpPr/>
-          <p:nvPr/>
-        </p:nvCxnSpPr>
-        <p:spPr>
-          <a:xfrm>
-            <a:off x="7429545" y="770462"/>
-            <a:ext cx="0" cy="4782303"/>
-          </a:xfrm>
-          <a:prstGeom prst="line">
-            <a:avLst/>
-          </a:prstGeom>
-          <a:ln w="28575">
-            <a:prstDash val="dash"/>
-          </a:ln>
-        </p:spPr>
-        <p:style>
-          <a:lnRef idx="1">
-            <a:schemeClr val="dk1"/>
-          </a:lnRef>
-          <a:fillRef idx="0">
-            <a:schemeClr val="dk1"/>
-          </a:fillRef>
-          <a:effectRef idx="0">
-            <a:schemeClr val="dk1"/>
-          </a:effectRef>
-          <a:fontRef idx="minor">
-            <a:schemeClr val="tx1"/>
-          </a:fontRef>
-        </p:style>
-      </p:cxnSp>
-      <mc:AlternateContent xmlns:mc="http://schemas.openxmlformats.org/markup-compatibility/2006" xmlns:a14="http://schemas.microsoft.com/office/drawing/2010/main">
-        <mc:Choice Requires="a14">
-          <p:sp>
-            <p:nvSpPr>
-              <p:cNvPr id="32" name="ZoneTexte 31"/>
-              <p:cNvSpPr txBox="1"/>
-              <p:nvPr/>
-            </p:nvSpPr>
-            <p:spPr>
-              <a:xfrm>
-                <a:off x="6070392" y="1411289"/>
-                <a:ext cx="599844" cy="288669"/>
-              </a:xfrm>
-              <a:prstGeom prst="rect">
-                <a:avLst/>
-              </a:prstGeom>
-              <a:noFill/>
-            </p:spPr>
-            <p:txBody>
-              <a:bodyPr wrap="none" rtlCol="0">
-                <a:spAutoFit/>
-              </a:bodyPr>
-              <a:lstStyle/>
-              <a:p>
-                <a:pPr/>
-                <a14:m>
-                  <m:oMathPara xmlns:m="http://schemas.openxmlformats.org/officeDocument/2006/math">
-                    <m:oMathParaPr>
-                      <m:jc m:val="centerGroup"/>
-                    </m:oMathParaPr>
-                    <m:oMath xmlns:m="http://schemas.openxmlformats.org/officeDocument/2006/math">
-                      <m:r>
-                        <a:rPr lang="fr-FR" sz="1276" b="1" i="1">
-                          <a:latin typeface="Cambria Math" panose="02040503050406030204" pitchFamily="18" charset="0"/>
-                        </a:rPr>
-                        <m:t>𝟑</m:t>
-                      </m:r>
-                      <m:r>
-                        <a:rPr lang="fr-FR" sz="1276" b="1" i="1">
-                          <a:latin typeface="Cambria Math" panose="02040503050406030204" pitchFamily="18" charset="0"/>
-                        </a:rPr>
-                        <m:t>𝑻</m:t>
-                      </m:r>
-                      <m:r>
-                        <a:rPr lang="fr-FR" sz="1276" b="1" i="1">
-                          <a:latin typeface="Cambria Math" panose="02040503050406030204" pitchFamily="18" charset="0"/>
-                        </a:rPr>
-                        <m:t>/</m:t>
-                      </m:r>
-                      <m:r>
-                        <a:rPr lang="fr-FR" sz="1276" b="1" i="1">
-                          <a:latin typeface="Cambria Math" panose="02040503050406030204" pitchFamily="18" charset="0"/>
-                        </a:rPr>
-                        <m:t>𝟐</m:t>
-                      </m:r>
-                    </m:oMath>
-                  </m:oMathPara>
-                </a14:m>
-                <a:endParaRPr lang="fr-FR" sz="1276" b="1" dirty="0"/>
-              </a:p>
-            </p:txBody>
-          </p:sp>
-        </mc:Choice>
-        <mc:Fallback xmlns="">
-          <p:sp>
-            <p:nvSpPr>
-              <p:cNvPr id="32" name="ZoneTexte 31"/>
-              <p:cNvSpPr txBox="1">
-                <a:spLocks noRot="1" noChangeAspect="1" noMove="1" noResize="1" noEditPoints="1" noAdjustHandles="1" noChangeArrowheads="1" noChangeShapeType="1" noTextEdit="1"/>
-              </p:cNvSpPr>
-              <p:nvPr/>
-            </p:nvSpPr>
-            <p:spPr>
-              <a:xfrm>
-                <a:off x="6070392" y="1411289"/>
-                <a:ext cx="599844" cy="288669"/>
-              </a:xfrm>
-              <a:prstGeom prst="rect">
-                <a:avLst/>
-              </a:prstGeom>
-              <a:blipFill>
-                <a:blip r:embed="rId4"/>
-                <a:stretch>
-                  <a:fillRect b="-8511"/>
-                </a:stretch>
-              </a:blipFill>
-            </p:spPr>
-            <p:txBody>
-              <a:bodyPr/>
-              <a:lstStyle/>
-              <a:p>
-                <a:r>
-                  <a:rPr lang="fr-FR">
-                    <a:noFill/>
-                  </a:rPr>
-                  <a:t> </a:t>
-                </a:r>
-              </a:p>
-            </p:txBody>
-          </p:sp>
-        </mc:Fallback>
-      </mc:AlternateContent>
-      <mc:AlternateContent xmlns:mc="http://schemas.openxmlformats.org/markup-compatibility/2006" xmlns:a14="http://schemas.microsoft.com/office/drawing/2010/main">
-        <mc:Choice Requires="a14">
-          <p:sp>
-            <p:nvSpPr>
-              <p:cNvPr id="33" name="ZoneTexte 32"/>
-              <p:cNvSpPr txBox="1"/>
-              <p:nvPr/>
-            </p:nvSpPr>
-            <p:spPr>
-              <a:xfrm>
-                <a:off x="7121707" y="1440964"/>
-                <a:ext cx="421910" cy="288669"/>
-              </a:xfrm>
-              <a:prstGeom prst="rect">
-                <a:avLst/>
-              </a:prstGeom>
-              <a:noFill/>
-            </p:spPr>
-            <p:txBody>
-              <a:bodyPr wrap="none" rtlCol="0">
-                <a:spAutoFit/>
-              </a:bodyPr>
-              <a:lstStyle/>
-              <a:p>
-                <a:pPr/>
-                <a14:m>
-                  <m:oMathPara xmlns:m="http://schemas.openxmlformats.org/officeDocument/2006/math">
-                    <m:oMathParaPr>
-                      <m:jc m:val="centerGroup"/>
-                    </m:oMathParaPr>
-                    <m:oMath xmlns:m="http://schemas.openxmlformats.org/officeDocument/2006/math">
-                      <m:r>
-                        <a:rPr lang="fr-FR" sz="1276" b="1" i="1">
-                          <a:latin typeface="Cambria Math" panose="02040503050406030204" pitchFamily="18" charset="0"/>
-                        </a:rPr>
-                        <m:t>𝟐</m:t>
-                      </m:r>
-                      <m:r>
-                        <a:rPr lang="fr-FR" sz="1276" b="1" i="1">
-                          <a:latin typeface="Cambria Math" panose="02040503050406030204" pitchFamily="18" charset="0"/>
-                        </a:rPr>
-                        <m:t>𝑻</m:t>
-                      </m:r>
-                    </m:oMath>
-                  </m:oMathPara>
-                </a14:m>
-                <a:endParaRPr lang="fr-FR" sz="1276" b="1" dirty="0"/>
-              </a:p>
-            </p:txBody>
-          </p:sp>
-        </mc:Choice>
-        <mc:Fallback xmlns="">
-          <p:sp>
-            <p:nvSpPr>
-              <p:cNvPr id="33" name="ZoneTexte 32"/>
-              <p:cNvSpPr txBox="1">
-                <a:spLocks noRot="1" noChangeAspect="1" noMove="1" noResize="1" noEditPoints="1" noAdjustHandles="1" noChangeArrowheads="1" noChangeShapeType="1" noTextEdit="1"/>
-              </p:cNvSpPr>
-              <p:nvPr/>
-            </p:nvSpPr>
-            <p:spPr>
-              <a:xfrm>
-                <a:off x="7121707" y="1440964"/>
-                <a:ext cx="421910" cy="288669"/>
-              </a:xfrm>
-              <a:prstGeom prst="rect">
-                <a:avLst/>
-              </a:prstGeom>
-              <a:blipFill>
-                <a:blip r:embed="rId5"/>
-                <a:stretch>
-                  <a:fillRect/>
-                </a:stretch>
-              </a:blipFill>
-            </p:spPr>
-            <p:txBody>
-              <a:bodyPr/>
-              <a:lstStyle/>
-              <a:p>
-                <a:r>
-                  <a:rPr lang="fr-FR">
-                    <a:noFill/>
-                  </a:rPr>
-                  <a:t> </a:t>
-                </a:r>
-              </a:p>
-            </p:txBody>
-          </p:sp>
-        </mc:Fallback>
-      </mc:AlternateContent>
-      <p:sp>
-        <p:nvSpPr>
-          <p:cNvPr id="34" name="ZoneTexte 33"/>
-          <p:cNvSpPr txBox="1"/>
-          <p:nvPr/>
-        </p:nvSpPr>
-        <p:spPr>
-          <a:xfrm>
-            <a:off x="3602553" y="3306360"/>
-            <a:ext cx="279244" cy="288669"/>
-          </a:xfrm>
-          <a:prstGeom prst="rect">
-            <a:avLst/>
-          </a:prstGeom>
-          <a:noFill/>
-        </p:spPr>
-        <p:txBody>
-          <a:bodyPr wrap="none" rtlCol="0">
-            <a:spAutoFit/>
-          </a:bodyPr>
-          <a:lstStyle/>
-          <a:p>
-            <a:r>
-              <a:rPr lang="fr-FR" sz="1276" b="1"/>
-              <a:t>i</a:t>
-            </a:r>
-            <a:r>
-              <a:rPr lang="fr-FR" sz="1276" b="1" baseline="-25000"/>
-              <a:t>2</a:t>
-            </a:r>
-            <a:endParaRPr lang="fr-FR" sz="1276" b="1" baseline="-25000" dirty="0"/>
-          </a:p>
-        </p:txBody>
-      </p:sp>
-      <p:cxnSp>
-        <p:nvCxnSpPr>
-          <p:cNvPr id="44" name="Connecteur droit 43"/>
-          <p:cNvCxnSpPr/>
-          <p:nvPr/>
-        </p:nvCxnSpPr>
-        <p:spPr>
-          <a:xfrm flipV="1">
-            <a:off x="3915767" y="978306"/>
-            <a:ext cx="0" cy="422405"/>
-          </a:xfrm>
-          <a:prstGeom prst="line">
-            <a:avLst/>
-          </a:prstGeom>
-          <a:ln w="38100">
-            <a:solidFill>
-              <a:srgbClr val="FF0000"/>
-            </a:solidFill>
-          </a:ln>
-        </p:spPr>
-        <p:style>
-          <a:lnRef idx="1">
-            <a:schemeClr val="accent1"/>
-          </a:lnRef>
-          <a:fillRef idx="0">
-            <a:schemeClr val="accent1"/>
-          </a:fillRef>
-          <a:effectRef idx="0">
-            <a:schemeClr val="accent1"/>
-          </a:effectRef>
-          <a:fontRef idx="minor">
-            <a:schemeClr val="tx1"/>
-          </a:fontRef>
-        </p:style>
-      </p:cxnSp>
-      <p:cxnSp>
-        <p:nvCxnSpPr>
-          <p:cNvPr id="47" name="Connecteur droit 46"/>
-          <p:cNvCxnSpPr/>
-          <p:nvPr/>
-        </p:nvCxnSpPr>
-        <p:spPr>
-          <a:xfrm flipV="1">
-            <a:off x="4337430" y="978305"/>
-            <a:ext cx="0" cy="422405"/>
-          </a:xfrm>
-          <a:prstGeom prst="line">
-            <a:avLst/>
-          </a:prstGeom>
-          <a:ln w="38100">
-            <a:solidFill>
-              <a:srgbClr val="FF0000"/>
-            </a:solidFill>
-          </a:ln>
-        </p:spPr>
-        <p:style>
-          <a:lnRef idx="1">
-            <a:schemeClr val="accent1"/>
-          </a:lnRef>
-          <a:fillRef idx="0">
-            <a:schemeClr val="accent1"/>
-          </a:fillRef>
-          <a:effectRef idx="0">
-            <a:schemeClr val="accent1"/>
-          </a:effectRef>
-          <a:fontRef idx="minor">
-            <a:schemeClr val="tx1"/>
-          </a:fontRef>
-        </p:style>
-      </p:cxnSp>
-      <p:cxnSp>
-        <p:nvCxnSpPr>
-          <p:cNvPr id="48" name="Connecteur droit 47"/>
-          <p:cNvCxnSpPr/>
-          <p:nvPr/>
-        </p:nvCxnSpPr>
-        <p:spPr>
-          <a:xfrm>
-            <a:off x="3900374" y="994926"/>
-            <a:ext cx="437056" cy="0"/>
-          </a:xfrm>
-          <a:prstGeom prst="line">
-            <a:avLst/>
-          </a:prstGeom>
-          <a:ln w="38100">
-            <a:solidFill>
-              <a:srgbClr val="FF0000"/>
-            </a:solidFill>
-          </a:ln>
-        </p:spPr>
-        <p:style>
-          <a:lnRef idx="1">
-            <a:schemeClr val="accent1"/>
-          </a:lnRef>
-          <a:fillRef idx="0">
-            <a:schemeClr val="accent1"/>
-          </a:fillRef>
-          <a:effectRef idx="0">
-            <a:schemeClr val="accent1"/>
-          </a:effectRef>
-          <a:fontRef idx="minor">
-            <a:schemeClr val="tx1"/>
-          </a:fontRef>
-        </p:style>
-      </p:cxnSp>
-      <p:cxnSp>
-        <p:nvCxnSpPr>
-          <p:cNvPr id="56" name="Connecteur droit 55"/>
-          <p:cNvCxnSpPr/>
-          <p:nvPr/>
-        </p:nvCxnSpPr>
-        <p:spPr>
-          <a:xfrm>
-            <a:off x="4333416" y="1411289"/>
-            <a:ext cx="1352277" cy="0"/>
-          </a:xfrm>
-          <a:prstGeom prst="line">
-            <a:avLst/>
-          </a:prstGeom>
-          <a:ln w="38100">
-            <a:solidFill>
-              <a:srgbClr val="FF0000"/>
-            </a:solidFill>
-          </a:ln>
-        </p:spPr>
-        <p:style>
-          <a:lnRef idx="1">
-            <a:schemeClr val="accent1"/>
-          </a:lnRef>
-          <a:fillRef idx="0">
-            <a:schemeClr val="accent1"/>
-          </a:fillRef>
-          <a:effectRef idx="0">
-            <a:schemeClr val="accent1"/>
-          </a:effectRef>
-          <a:fontRef idx="minor">
-            <a:schemeClr val="tx1"/>
-          </a:fontRef>
-        </p:style>
-      </p:cxnSp>
-      <p:cxnSp>
-        <p:nvCxnSpPr>
-          <p:cNvPr id="58" name="Connecteur droit 57"/>
-          <p:cNvCxnSpPr/>
-          <p:nvPr/>
-        </p:nvCxnSpPr>
-        <p:spPr>
-          <a:xfrm>
-            <a:off x="6096441" y="1415347"/>
-            <a:ext cx="1345079" cy="0"/>
-          </a:xfrm>
-          <a:prstGeom prst="line">
-            <a:avLst/>
-          </a:prstGeom>
-          <a:ln w="38100">
-            <a:solidFill>
-              <a:srgbClr val="FF0000"/>
-            </a:solidFill>
-          </a:ln>
-        </p:spPr>
-        <p:style>
-          <a:lnRef idx="1">
-            <a:schemeClr val="accent1"/>
-          </a:lnRef>
-          <a:fillRef idx="0">
-            <a:schemeClr val="accent1"/>
-          </a:fillRef>
-          <a:effectRef idx="0">
-            <a:schemeClr val="accent1"/>
-          </a:effectRef>
-          <a:fontRef idx="minor">
-            <a:schemeClr val="tx1"/>
-          </a:fontRef>
-        </p:style>
-      </p:cxnSp>
-      <p:cxnSp>
-        <p:nvCxnSpPr>
-          <p:cNvPr id="67" name="Connecteur droit 66"/>
-          <p:cNvCxnSpPr/>
-          <p:nvPr/>
-        </p:nvCxnSpPr>
-        <p:spPr>
-          <a:xfrm flipV="1">
-            <a:off x="7431121" y="981480"/>
-            <a:ext cx="0" cy="422405"/>
-          </a:xfrm>
-          <a:prstGeom prst="line">
-            <a:avLst/>
-          </a:prstGeom>
-          <a:ln w="38100">
-            <a:solidFill>
-              <a:srgbClr val="FF0000"/>
-            </a:solidFill>
-          </a:ln>
-        </p:spPr>
-        <p:style>
-          <a:lnRef idx="1">
-            <a:schemeClr val="accent1"/>
-          </a:lnRef>
-          <a:fillRef idx="0">
-            <a:schemeClr val="accent1"/>
-          </a:fillRef>
-          <a:effectRef idx="0">
-            <a:schemeClr val="accent1"/>
-          </a:effectRef>
-          <a:fontRef idx="minor">
-            <a:schemeClr val="tx1"/>
-          </a:fontRef>
-        </p:style>
-      </p:cxnSp>
-      <p:cxnSp>
-        <p:nvCxnSpPr>
-          <p:cNvPr id="68" name="Connecteur droit 67"/>
-          <p:cNvCxnSpPr/>
-          <p:nvPr/>
-        </p:nvCxnSpPr>
-        <p:spPr>
-          <a:xfrm>
-            <a:off x="7415728" y="998100"/>
-            <a:ext cx="313707" cy="0"/>
-          </a:xfrm>
-          <a:prstGeom prst="line">
-            <a:avLst/>
-          </a:prstGeom>
-          <a:ln w="38100">
-            <a:solidFill>
-              <a:srgbClr val="FF0000"/>
-            </a:solidFill>
-          </a:ln>
-        </p:spPr>
-        <p:style>
-          <a:lnRef idx="1">
-            <a:schemeClr val="accent1"/>
-          </a:lnRef>
-          <a:fillRef idx="0">
-            <a:schemeClr val="accent1"/>
-          </a:fillRef>
-          <a:effectRef idx="0">
-            <a:schemeClr val="accent1"/>
-          </a:effectRef>
-          <a:fontRef idx="minor">
-            <a:schemeClr val="tx1"/>
-          </a:fontRef>
-        </p:style>
-      </p:cxnSp>
-      <p:cxnSp>
-        <p:nvCxnSpPr>
-          <p:cNvPr id="92" name="Connecteur droit avec flèche 91"/>
-          <p:cNvCxnSpPr/>
-          <p:nvPr/>
-        </p:nvCxnSpPr>
-        <p:spPr>
-          <a:xfrm>
-            <a:off x="3917863" y="1517196"/>
-            <a:ext cx="307009" cy="0"/>
-          </a:xfrm>
-          <a:prstGeom prst="straightConnector1">
-            <a:avLst/>
-          </a:prstGeom>
-          <a:ln w="19050">
-            <a:solidFill>
-              <a:srgbClr val="FF0000"/>
-            </a:solidFill>
-            <a:headEnd type="triangle" w="med" len="med"/>
-            <a:tailEnd type="triangle" w="med" len="med"/>
-          </a:ln>
-        </p:spPr>
-        <p:style>
-          <a:lnRef idx="1">
-            <a:schemeClr val="dk1"/>
-          </a:lnRef>
-          <a:fillRef idx="0">
-            <a:schemeClr val="dk1"/>
-          </a:fillRef>
-          <a:effectRef idx="0">
-            <a:schemeClr val="dk1"/>
-          </a:effectRef>
-          <a:fontRef idx="minor">
-            <a:schemeClr val="tx1"/>
-          </a:fontRef>
-        </p:style>
-      </p:cxnSp>
-      <mc:AlternateContent xmlns:mc="http://schemas.openxmlformats.org/markup-compatibility/2006" xmlns:a14="http://schemas.microsoft.com/office/drawing/2010/main">
-        <mc:Choice Requires="a14">
-          <p:sp>
-            <p:nvSpPr>
-              <p:cNvPr id="95" name="ZoneTexte 94"/>
-              <p:cNvSpPr txBox="1"/>
-              <p:nvPr/>
-            </p:nvSpPr>
-            <p:spPr>
-              <a:xfrm>
-                <a:off x="3844026" y="1487350"/>
-                <a:ext cx="434734" cy="288669"/>
-              </a:xfrm>
-              <a:prstGeom prst="rect">
-                <a:avLst/>
-              </a:prstGeom>
-              <a:noFill/>
-            </p:spPr>
-            <p:txBody>
-              <a:bodyPr wrap="none" rtlCol="0">
-                <a:spAutoFit/>
-              </a:bodyPr>
-              <a:lstStyle/>
-              <a:p>
-                <a:pPr/>
-                <a14:m>
-                  <m:oMathPara xmlns:m="http://schemas.openxmlformats.org/officeDocument/2006/math">
-                    <m:oMathParaPr>
-                      <m:jc m:val="centerGroup"/>
-                    </m:oMathParaPr>
-                    <m:oMath xmlns:m="http://schemas.openxmlformats.org/officeDocument/2006/math">
-                      <m:r>
-                        <a:rPr lang="el-GR" sz="1276" b="1" i="1" smtClean="0">
-                          <a:solidFill>
-                            <a:srgbClr val="FF0000"/>
-                          </a:solidFill>
-                          <a:latin typeface="Cambria Math" panose="02040503050406030204" pitchFamily="18" charset="0"/>
-                        </a:rPr>
-                        <m:t>𝜶</m:t>
-                      </m:r>
-                      <m:r>
-                        <a:rPr lang="fr-FR" sz="1276" b="1" i="1">
-                          <a:solidFill>
-                            <a:srgbClr val="FF0000"/>
-                          </a:solidFill>
-                          <a:latin typeface="Cambria Math" panose="02040503050406030204" pitchFamily="18" charset="0"/>
-                        </a:rPr>
-                        <m:t>𝑻</m:t>
-                      </m:r>
-                    </m:oMath>
-                  </m:oMathPara>
-                </a14:m>
-                <a:endParaRPr lang="fr-FR" sz="1276" b="1" dirty="0">
-                  <a:solidFill>
-                    <a:srgbClr val="FF0000"/>
-                  </a:solidFill>
-                </a:endParaRPr>
-              </a:p>
-            </p:txBody>
-          </p:sp>
-        </mc:Choice>
-        <mc:Fallback xmlns="">
-          <p:sp>
-            <p:nvSpPr>
-              <p:cNvPr id="95" name="ZoneTexte 94"/>
-              <p:cNvSpPr txBox="1">
-                <a:spLocks noRot="1" noChangeAspect="1" noMove="1" noResize="1" noEditPoints="1" noAdjustHandles="1" noChangeArrowheads="1" noChangeShapeType="1" noTextEdit="1"/>
-              </p:cNvSpPr>
-              <p:nvPr/>
-            </p:nvSpPr>
-            <p:spPr>
-              <a:xfrm>
-                <a:off x="3844026" y="1487350"/>
-                <a:ext cx="434734" cy="288669"/>
-              </a:xfrm>
-              <a:prstGeom prst="rect">
-                <a:avLst/>
-              </a:prstGeom>
-              <a:blipFill>
-                <a:blip r:embed="rId6"/>
-                <a:stretch>
-                  <a:fillRect/>
-                </a:stretch>
-              </a:blipFill>
-            </p:spPr>
-            <p:txBody>
-              <a:bodyPr/>
-              <a:lstStyle/>
-              <a:p>
-                <a:r>
-                  <a:rPr lang="fr-FR">
-                    <a:noFill/>
-                  </a:rPr>
-                  <a:t> </a:t>
-                </a:r>
-              </a:p>
-            </p:txBody>
-          </p:sp>
-        </mc:Fallback>
-      </mc:AlternateContent>
-      <p:cxnSp>
-        <p:nvCxnSpPr>
-          <p:cNvPr id="176" name="Connecteur droit 175"/>
-          <p:cNvCxnSpPr/>
-          <p:nvPr/>
-        </p:nvCxnSpPr>
-        <p:spPr>
-          <a:xfrm flipV="1">
-            <a:off x="5674778" y="1009009"/>
-            <a:ext cx="0" cy="422405"/>
-          </a:xfrm>
-          <a:prstGeom prst="line">
-            <a:avLst/>
-          </a:prstGeom>
-          <a:ln w="38100">
-            <a:solidFill>
-              <a:srgbClr val="FF0000"/>
-            </a:solidFill>
-          </a:ln>
-        </p:spPr>
-        <p:style>
-          <a:lnRef idx="1">
-            <a:schemeClr val="accent1"/>
-          </a:lnRef>
-          <a:fillRef idx="0">
-            <a:schemeClr val="accent1"/>
-          </a:fillRef>
-          <a:effectRef idx="0">
-            <a:schemeClr val="accent1"/>
-          </a:effectRef>
-          <a:fontRef idx="minor">
-            <a:schemeClr val="tx1"/>
-          </a:fontRef>
-        </p:style>
-      </p:cxnSp>
-      <p:cxnSp>
-        <p:nvCxnSpPr>
-          <p:cNvPr id="177" name="Connecteur droit 176"/>
-          <p:cNvCxnSpPr/>
-          <p:nvPr/>
-        </p:nvCxnSpPr>
-        <p:spPr>
-          <a:xfrm flipV="1">
-            <a:off x="6096441" y="1009008"/>
-            <a:ext cx="0" cy="422405"/>
-          </a:xfrm>
-          <a:prstGeom prst="line">
-            <a:avLst/>
-          </a:prstGeom>
-          <a:ln w="38100">
-            <a:solidFill>
-              <a:srgbClr val="FF0000"/>
-            </a:solidFill>
-          </a:ln>
-        </p:spPr>
-        <p:style>
-          <a:lnRef idx="1">
-            <a:schemeClr val="accent1"/>
-          </a:lnRef>
-          <a:fillRef idx="0">
-            <a:schemeClr val="accent1"/>
-          </a:fillRef>
-          <a:effectRef idx="0">
-            <a:schemeClr val="accent1"/>
-          </a:effectRef>
-          <a:fontRef idx="minor">
-            <a:schemeClr val="tx1"/>
-          </a:fontRef>
-        </p:style>
-      </p:cxnSp>
-      <p:cxnSp>
-        <p:nvCxnSpPr>
-          <p:cNvPr id="178" name="Connecteur droit 177"/>
-          <p:cNvCxnSpPr/>
-          <p:nvPr/>
-        </p:nvCxnSpPr>
-        <p:spPr>
-          <a:xfrm>
-            <a:off x="5659385" y="1025629"/>
-            <a:ext cx="437056" cy="0"/>
-          </a:xfrm>
-          <a:prstGeom prst="line">
-            <a:avLst/>
-          </a:prstGeom>
-          <a:ln w="38100">
-            <a:solidFill>
-              <a:srgbClr val="FF0000"/>
-            </a:solidFill>
-          </a:ln>
-        </p:spPr>
-        <p:style>
-          <a:lnRef idx="1">
-            <a:schemeClr val="accent1"/>
-          </a:lnRef>
-          <a:fillRef idx="0">
-            <a:schemeClr val="accent1"/>
-          </a:fillRef>
-          <a:effectRef idx="0">
-            <a:schemeClr val="accent1"/>
-          </a:effectRef>
-          <a:fontRef idx="minor">
-            <a:schemeClr val="tx1"/>
-          </a:fontRef>
-        </p:style>
-      </p:cxnSp>
-    </p:spTree>
-    <p:extLst>
-      <p:ext uri="{BB962C8B-B14F-4D97-AF65-F5344CB8AC3E}">
-        <p14:creationId xmlns:p14="http://schemas.microsoft.com/office/powerpoint/2010/main" val="2044163002"/>
       </p:ext>
     </p:extLst>
   </p:cSld>
